--- a/docs/certification/AWS_AI_Practitioner_Overview.pptx
+++ b/docs/certification/AWS_AI_Practitioner_Overview.pptx
@@ -17,6 +17,7 @@
     <p:sldId id="265" r:id="rId16"/>
     <p:sldId id="266" r:id="rId17"/>
     <p:sldId id="267" r:id="rId18"/>
+    <p:sldId id="268" r:id="rId19"/>
   </p:sldIdLst>
   <p:sldSz cx="12188952" cy="6858000" type="screen4x3"/>
   <p:notesSz cx="6858000" cy="9144000"/>
@@ -5135,6 +5136,1404 @@
             </a:pPr>
             <a:r>
               <a:t>1〜2ヶ月の学習で十分合格可能。まずAWS Skill Builderから始めよう！</a:t>
+            </a:r>
+          </a:p>
+        </p:txBody>
+      </p:sp>
+    </p:spTree>
+  </p:cSld>
+  <p:clrMapOvr>
+    <a:masterClrMapping/>
+  </p:clrMapOvr>
+</p:sld>
+</file>
+
+<file path=ppt/slides/slide13.xml><?xml version="1.0" encoding="utf-8"?>
+<p:sld xmlns:a="http://schemas.openxmlformats.org/drawingml/2006/main" xmlns:p="http://schemas.openxmlformats.org/presentationml/2006/main" xmlns:r="http://schemas.openxmlformats.org/officeDocument/2006/relationships">
+  <p:cSld>
+    <p:spTree>
+      <p:nvGrpSpPr>
+        <p:cNvPr id="1" name=""/>
+        <p:cNvGrpSpPr/>
+        <p:nvPr/>
+      </p:nvGrpSpPr>
+      <p:grpSpPr/>
+      <p:sp>
+        <p:nvSpPr>
+          <p:cNvPr id="2" name="Rectangle 1"/>
+          <p:cNvSpPr/>
+          <p:nvPr/>
+        </p:nvSpPr>
+        <p:spPr>
+          <a:xfrm>
+            <a:off x="0" y="0"/>
+            <a:ext cx="12188952" cy="6858000"/>
+          </a:xfrm>
+          <a:prstGeom prst="rect">
+            <a:avLst/>
+          </a:prstGeom>
+          <a:solidFill>
+            <a:srgbClr val="F5F5F5"/>
+          </a:solidFill>
+          <a:ln>
+            <a:noFill/>
+          </a:ln>
+        </p:spPr>
+        <p:style>
+          <a:lnRef idx="1">
+            <a:schemeClr val="accent1"/>
+          </a:lnRef>
+          <a:fillRef idx="3">
+            <a:schemeClr val="accent1"/>
+          </a:fillRef>
+          <a:effectRef idx="2">
+            <a:schemeClr val="accent1"/>
+          </a:effectRef>
+          <a:fontRef idx="minor">
+            <a:schemeClr val="lt1"/>
+          </a:fontRef>
+        </p:style>
+        <p:txBody>
+          <a:bodyPr rtlCol="0" anchor="ctr"/>
+          <a:lstStyle/>
+          <a:p>
+            <a:pPr algn="ctr"/>
+          </a:p>
+        </p:txBody>
+      </p:sp>
+      <p:sp>
+        <p:nvSpPr>
+          <p:cNvPr id="3" name="Rectangle 2"/>
+          <p:cNvSpPr/>
+          <p:nvPr/>
+        </p:nvSpPr>
+        <p:spPr>
+          <a:xfrm>
+            <a:off x="0" y="0"/>
+            <a:ext cx="12188952" cy="1005840"/>
+          </a:xfrm>
+          <a:prstGeom prst="rect">
+            <a:avLst/>
+          </a:prstGeom>
+          <a:solidFill>
+            <a:srgbClr val="232F3E"/>
+          </a:solidFill>
+          <a:ln>
+            <a:noFill/>
+          </a:ln>
+        </p:spPr>
+        <p:style>
+          <a:lnRef idx="1">
+            <a:schemeClr val="accent1"/>
+          </a:lnRef>
+          <a:fillRef idx="3">
+            <a:schemeClr val="accent1"/>
+          </a:fillRef>
+          <a:effectRef idx="2">
+            <a:schemeClr val="accent1"/>
+          </a:effectRef>
+          <a:fontRef idx="minor">
+            <a:schemeClr val="lt1"/>
+          </a:fontRef>
+        </p:style>
+        <p:txBody>
+          <a:bodyPr rtlCol="0" anchor="ctr"/>
+          <a:lstStyle/>
+          <a:p>
+            <a:pPr algn="ctr"/>
+          </a:p>
+        </p:txBody>
+      </p:sp>
+      <p:sp>
+        <p:nvSpPr>
+          <p:cNvPr id="4" name="TextBox 3"/>
+          <p:cNvSpPr txBox="1"/>
+          <p:nvPr/>
+        </p:nvSpPr>
+        <p:spPr>
+          <a:xfrm>
+            <a:off x="365760" y="137160"/>
+            <a:ext cx="10972800" cy="731520"/>
+          </a:xfrm>
+          <a:prstGeom prst="rect">
+            <a:avLst/>
+          </a:prstGeom>
+          <a:noFill/>
+        </p:spPr>
+        <p:txBody>
+          <a:bodyPr wrap="none">
+            <a:spAutoFit/>
+          </a:bodyPr>
+          <a:lstStyle/>
+          <a:p/>
+          <a:p>
+            <a:pPr>
+              <a:defRPr sz="2800" b="1">
+                <a:solidFill>
+                  <a:srgbClr val="FFFFFF"/>
+                </a:solidFill>
+              </a:defRPr>
+            </a:pPr>
+            <a:r>
+              <a:t>参考文献・公式リソース</a:t>
+            </a:r>
+          </a:p>
+        </p:txBody>
+      </p:sp>
+      <p:sp>
+        <p:nvSpPr>
+          <p:cNvPr id="5" name="TextBox 4"/>
+          <p:cNvSpPr txBox="1"/>
+          <p:nvPr/>
+        </p:nvSpPr>
+        <p:spPr>
+          <a:xfrm>
+            <a:off x="365760" y="1143000"/>
+            <a:ext cx="5669280" cy="365760"/>
+          </a:xfrm>
+          <a:prstGeom prst="rect">
+            <a:avLst/>
+          </a:prstGeom>
+          <a:noFill/>
+        </p:spPr>
+        <p:txBody>
+          <a:bodyPr wrap="none">
+            <a:spAutoFit/>
+          </a:bodyPr>
+          <a:lstStyle/>
+          <a:p/>
+          <a:p>
+            <a:pPr>
+              <a:defRPr sz="1400" b="1">
+                <a:solidFill>
+                  <a:srgbClr val="FF9900"/>
+                </a:solidFill>
+              </a:defRPr>
+            </a:pPr>
+            <a:r>
+              <a:t>【試験公式】</a:t>
+            </a:r>
+          </a:p>
+        </p:txBody>
+      </p:sp>
+      <p:sp>
+        <p:nvSpPr>
+          <p:cNvPr id="6" name="Rectangle 5"/>
+          <p:cNvSpPr/>
+          <p:nvPr/>
+        </p:nvSpPr>
+        <p:spPr>
+          <a:xfrm>
+            <a:off x="320040" y="1472184"/>
+            <a:ext cx="5760720" cy="566928"/>
+          </a:xfrm>
+          <a:prstGeom prst="rect">
+            <a:avLst/>
+          </a:prstGeom>
+          <a:solidFill>
+            <a:srgbClr val="FFFFFF"/>
+          </a:solidFill>
+          <a:ln>
+            <a:noFill/>
+          </a:ln>
+        </p:spPr>
+        <p:style>
+          <a:lnRef idx="1">
+            <a:schemeClr val="accent1"/>
+          </a:lnRef>
+          <a:fillRef idx="3">
+            <a:schemeClr val="accent1"/>
+          </a:fillRef>
+          <a:effectRef idx="2">
+            <a:schemeClr val="accent1"/>
+          </a:effectRef>
+          <a:fontRef idx="minor">
+            <a:schemeClr val="lt1"/>
+          </a:fontRef>
+        </p:style>
+        <p:txBody>
+          <a:bodyPr rtlCol="0" anchor="ctr"/>
+          <a:lstStyle/>
+          <a:p>
+            <a:pPr algn="ctr"/>
+          </a:p>
+        </p:txBody>
+      </p:sp>
+      <p:sp>
+        <p:nvSpPr>
+          <p:cNvPr id="7" name="TextBox 6"/>
+          <p:cNvSpPr txBox="1"/>
+          <p:nvPr/>
+        </p:nvSpPr>
+        <p:spPr>
+          <a:xfrm>
+            <a:off x="365760" y="1508760"/>
+            <a:ext cx="5669280" cy="274320"/>
+          </a:xfrm>
+          <a:prstGeom prst="rect">
+            <a:avLst/>
+          </a:prstGeom>
+          <a:noFill/>
+        </p:spPr>
+        <p:txBody>
+          <a:bodyPr wrap="none">
+            <a:spAutoFit/>
+          </a:bodyPr>
+          <a:lstStyle/>
+          <a:p/>
+          <a:p>
+            <a:pPr>
+              <a:defRPr sz="1200" b="1">
+                <a:solidFill>
+                  <a:srgbClr val="232F3E"/>
+                </a:solidFill>
+              </a:defRPr>
+            </a:pPr>
+            <a:r>
+              <a:t>AWS Certified AI Practitioner 試験公式ページ</a:t>
+            </a:r>
+          </a:p>
+        </p:txBody>
+      </p:sp>
+      <p:sp>
+        <p:nvSpPr>
+          <p:cNvPr id="8" name="TextBox 7"/>
+          <p:cNvSpPr txBox="1"/>
+          <p:nvPr/>
+        </p:nvSpPr>
+        <p:spPr>
+          <a:xfrm>
+            <a:off x="365760" y="1737360"/>
+            <a:ext cx="5669280" cy="256032"/>
+          </a:xfrm>
+          <a:prstGeom prst="rect">
+            <a:avLst/>
+          </a:prstGeom>
+          <a:noFill/>
+        </p:spPr>
+        <p:txBody>
+          <a:bodyPr wrap="none">
+            <a:spAutoFit/>
+          </a:bodyPr>
+          <a:lstStyle/>
+          <a:p/>
+          <a:p>
+            <a:pPr>
+              <a:defRPr sz="900" u="sng">
+                <a:solidFill>
+                  <a:srgbClr val="0056B3"/>
+                </a:solidFill>
+              </a:defRPr>
+            </a:pPr>
+            <a:r>
+              <a:t>https://aws.amazon.com/certification/certified-ai-practitioner/</a:t>
+            </a:r>
+          </a:p>
+        </p:txBody>
+      </p:sp>
+      <p:sp>
+        <p:nvSpPr>
+          <p:cNvPr id="9" name="Rectangle 8"/>
+          <p:cNvSpPr/>
+          <p:nvPr/>
+        </p:nvSpPr>
+        <p:spPr>
+          <a:xfrm>
+            <a:off x="320040" y="2066544"/>
+            <a:ext cx="5760720" cy="566928"/>
+          </a:xfrm>
+          <a:prstGeom prst="rect">
+            <a:avLst/>
+          </a:prstGeom>
+          <a:solidFill>
+            <a:srgbClr val="FFFFFF"/>
+          </a:solidFill>
+          <a:ln>
+            <a:noFill/>
+          </a:ln>
+        </p:spPr>
+        <p:style>
+          <a:lnRef idx="1">
+            <a:schemeClr val="accent1"/>
+          </a:lnRef>
+          <a:fillRef idx="3">
+            <a:schemeClr val="accent1"/>
+          </a:fillRef>
+          <a:effectRef idx="2">
+            <a:schemeClr val="accent1"/>
+          </a:effectRef>
+          <a:fontRef idx="minor">
+            <a:schemeClr val="lt1"/>
+          </a:fontRef>
+        </p:style>
+        <p:txBody>
+          <a:bodyPr rtlCol="0" anchor="ctr"/>
+          <a:lstStyle/>
+          <a:p>
+            <a:pPr algn="ctr"/>
+          </a:p>
+        </p:txBody>
+      </p:sp>
+      <p:sp>
+        <p:nvSpPr>
+          <p:cNvPr id="10" name="TextBox 9"/>
+          <p:cNvSpPr txBox="1"/>
+          <p:nvPr/>
+        </p:nvSpPr>
+        <p:spPr>
+          <a:xfrm>
+            <a:off x="365760" y="2103120"/>
+            <a:ext cx="5669280" cy="274320"/>
+          </a:xfrm>
+          <a:prstGeom prst="rect">
+            <a:avLst/>
+          </a:prstGeom>
+          <a:noFill/>
+        </p:spPr>
+        <p:txBody>
+          <a:bodyPr wrap="none">
+            <a:spAutoFit/>
+          </a:bodyPr>
+          <a:lstStyle/>
+          <a:p/>
+          <a:p>
+            <a:pPr>
+              <a:defRPr sz="1200" b="1">
+                <a:solidFill>
+                  <a:srgbClr val="232F3E"/>
+                </a:solidFill>
+              </a:defRPr>
+            </a:pPr>
+            <a:r>
+              <a:t>試験ガイド（日本語PDF）</a:t>
+            </a:r>
+          </a:p>
+        </p:txBody>
+      </p:sp>
+      <p:sp>
+        <p:nvSpPr>
+          <p:cNvPr id="11" name="TextBox 10"/>
+          <p:cNvSpPr txBox="1"/>
+          <p:nvPr/>
+        </p:nvSpPr>
+        <p:spPr>
+          <a:xfrm>
+            <a:off x="365760" y="2331720"/>
+            <a:ext cx="5669280" cy="256032"/>
+          </a:xfrm>
+          <a:prstGeom prst="rect">
+            <a:avLst/>
+          </a:prstGeom>
+          <a:noFill/>
+        </p:spPr>
+        <p:txBody>
+          <a:bodyPr wrap="none">
+            <a:spAutoFit/>
+          </a:bodyPr>
+          <a:lstStyle/>
+          <a:p/>
+          <a:p>
+            <a:pPr>
+              <a:defRPr sz="900" u="sng">
+                <a:solidFill>
+                  <a:srgbClr val="0056B3"/>
+                </a:solidFill>
+              </a:defRPr>
+            </a:pPr>
+            <a:r>
+              <a:t>https://d1.awsstatic.com/ja_JP/training-and-certification/docs-ai-practitioner/AWS-Certified-AI-Practitioner_Exam-Guide.pdf</a:t>
+            </a:r>
+          </a:p>
+        </p:txBody>
+      </p:sp>
+      <p:sp>
+        <p:nvSpPr>
+          <p:cNvPr id="12" name="Rectangle 11"/>
+          <p:cNvSpPr/>
+          <p:nvPr/>
+        </p:nvSpPr>
+        <p:spPr>
+          <a:xfrm>
+            <a:off x="320040" y="2660904"/>
+            <a:ext cx="5760720" cy="566928"/>
+          </a:xfrm>
+          <a:prstGeom prst="rect">
+            <a:avLst/>
+          </a:prstGeom>
+          <a:solidFill>
+            <a:srgbClr val="FFFFFF"/>
+          </a:solidFill>
+          <a:ln>
+            <a:noFill/>
+          </a:ln>
+        </p:spPr>
+        <p:style>
+          <a:lnRef idx="1">
+            <a:schemeClr val="accent1"/>
+          </a:lnRef>
+          <a:fillRef idx="3">
+            <a:schemeClr val="accent1"/>
+          </a:fillRef>
+          <a:effectRef idx="2">
+            <a:schemeClr val="accent1"/>
+          </a:effectRef>
+          <a:fontRef idx="minor">
+            <a:schemeClr val="lt1"/>
+          </a:fontRef>
+        </p:style>
+        <p:txBody>
+          <a:bodyPr rtlCol="0" anchor="ctr"/>
+          <a:lstStyle/>
+          <a:p>
+            <a:pPr algn="ctr"/>
+          </a:p>
+        </p:txBody>
+      </p:sp>
+      <p:sp>
+        <p:nvSpPr>
+          <p:cNvPr id="13" name="TextBox 12"/>
+          <p:cNvSpPr txBox="1"/>
+          <p:nvPr/>
+        </p:nvSpPr>
+        <p:spPr>
+          <a:xfrm>
+            <a:off x="365760" y="2697480"/>
+            <a:ext cx="5669280" cy="274320"/>
+          </a:xfrm>
+          <a:prstGeom prst="rect">
+            <a:avLst/>
+          </a:prstGeom>
+          <a:noFill/>
+        </p:spPr>
+        <p:txBody>
+          <a:bodyPr wrap="none">
+            <a:spAutoFit/>
+          </a:bodyPr>
+          <a:lstStyle/>
+          <a:p/>
+          <a:p>
+            <a:pPr>
+              <a:defRPr sz="1200" b="1">
+                <a:solidFill>
+                  <a:srgbClr val="232F3E"/>
+                </a:solidFill>
+              </a:defRPr>
+            </a:pPr>
+            <a:r>
+              <a:t>試験ガイド（AWS Docs）</a:t>
+            </a:r>
+          </a:p>
+        </p:txBody>
+      </p:sp>
+      <p:sp>
+        <p:nvSpPr>
+          <p:cNvPr id="14" name="TextBox 13"/>
+          <p:cNvSpPr txBox="1"/>
+          <p:nvPr/>
+        </p:nvSpPr>
+        <p:spPr>
+          <a:xfrm>
+            <a:off x="365760" y="2926080"/>
+            <a:ext cx="5669280" cy="256032"/>
+          </a:xfrm>
+          <a:prstGeom prst="rect">
+            <a:avLst/>
+          </a:prstGeom>
+          <a:noFill/>
+        </p:spPr>
+        <p:txBody>
+          <a:bodyPr wrap="none">
+            <a:spAutoFit/>
+          </a:bodyPr>
+          <a:lstStyle/>
+          <a:p/>
+          <a:p>
+            <a:pPr>
+              <a:defRPr sz="900" u="sng">
+                <a:solidFill>
+                  <a:srgbClr val="0056B3"/>
+                </a:solidFill>
+              </a:defRPr>
+            </a:pPr>
+            <a:r>
+              <a:t>https://docs.aws.amazon.com/aws-certification/latest/examguides/ai-practitioner-01.html</a:t>
+            </a:r>
+          </a:p>
+        </p:txBody>
+      </p:sp>
+      <p:sp>
+        <p:nvSpPr>
+          <p:cNvPr id="15" name="Rectangle 14"/>
+          <p:cNvSpPr/>
+          <p:nvPr/>
+        </p:nvSpPr>
+        <p:spPr>
+          <a:xfrm>
+            <a:off x="320040" y="3255264"/>
+            <a:ext cx="5760720" cy="566928"/>
+          </a:xfrm>
+          <a:prstGeom prst="rect">
+            <a:avLst/>
+          </a:prstGeom>
+          <a:solidFill>
+            <a:srgbClr val="FFFFFF"/>
+          </a:solidFill>
+          <a:ln>
+            <a:noFill/>
+          </a:ln>
+        </p:spPr>
+        <p:style>
+          <a:lnRef idx="1">
+            <a:schemeClr val="accent1"/>
+          </a:lnRef>
+          <a:fillRef idx="3">
+            <a:schemeClr val="accent1"/>
+          </a:fillRef>
+          <a:effectRef idx="2">
+            <a:schemeClr val="accent1"/>
+          </a:effectRef>
+          <a:fontRef idx="minor">
+            <a:schemeClr val="lt1"/>
+          </a:fontRef>
+        </p:style>
+        <p:txBody>
+          <a:bodyPr rtlCol="0" anchor="ctr"/>
+          <a:lstStyle/>
+          <a:p>
+            <a:pPr algn="ctr"/>
+          </a:p>
+        </p:txBody>
+      </p:sp>
+      <p:sp>
+        <p:nvSpPr>
+          <p:cNvPr id="16" name="TextBox 15"/>
+          <p:cNvSpPr txBox="1"/>
+          <p:nvPr/>
+        </p:nvSpPr>
+        <p:spPr>
+          <a:xfrm>
+            <a:off x="365760" y="3291840"/>
+            <a:ext cx="5669280" cy="274320"/>
+          </a:xfrm>
+          <a:prstGeom prst="rect">
+            <a:avLst/>
+          </a:prstGeom>
+          <a:noFill/>
+        </p:spPr>
+        <p:txBody>
+          <a:bodyPr wrap="none">
+            <a:spAutoFit/>
+          </a:bodyPr>
+          <a:lstStyle/>
+          <a:p/>
+          <a:p>
+            <a:pPr>
+              <a:defRPr sz="1200" b="1">
+                <a:solidFill>
+                  <a:srgbClr val="232F3E"/>
+                </a:solidFill>
+              </a:defRPr>
+            </a:pPr>
+            <a:r>
+              <a:t>試験予約ページ（Pearson VUE）</a:t>
+            </a:r>
+          </a:p>
+        </p:txBody>
+      </p:sp>
+      <p:sp>
+        <p:nvSpPr>
+          <p:cNvPr id="17" name="TextBox 16"/>
+          <p:cNvSpPr txBox="1"/>
+          <p:nvPr/>
+        </p:nvSpPr>
+        <p:spPr>
+          <a:xfrm>
+            <a:off x="365760" y="3520440"/>
+            <a:ext cx="5669280" cy="256032"/>
+          </a:xfrm>
+          <a:prstGeom prst="rect">
+            <a:avLst/>
+          </a:prstGeom>
+          <a:noFill/>
+        </p:spPr>
+        <p:txBody>
+          <a:bodyPr wrap="none">
+            <a:spAutoFit/>
+          </a:bodyPr>
+          <a:lstStyle/>
+          <a:p/>
+          <a:p>
+            <a:pPr>
+              <a:defRPr sz="900" u="sng">
+                <a:solidFill>
+                  <a:srgbClr val="0056B3"/>
+                </a:solidFill>
+              </a:defRPr>
+            </a:pPr>
+            <a:r>
+              <a:t>https://aws.amazon.com/certification/certification-prep/testing/</a:t>
+            </a:r>
+          </a:p>
+        </p:txBody>
+      </p:sp>
+      <p:sp>
+        <p:nvSpPr>
+          <p:cNvPr id="18" name="Rectangle 17"/>
+          <p:cNvSpPr/>
+          <p:nvPr/>
+        </p:nvSpPr>
+        <p:spPr>
+          <a:xfrm>
+            <a:off x="320040" y="3849624"/>
+            <a:ext cx="5760720" cy="566928"/>
+          </a:xfrm>
+          <a:prstGeom prst="rect">
+            <a:avLst/>
+          </a:prstGeom>
+          <a:solidFill>
+            <a:srgbClr val="FFFFFF"/>
+          </a:solidFill>
+          <a:ln>
+            <a:noFill/>
+          </a:ln>
+        </p:spPr>
+        <p:style>
+          <a:lnRef idx="1">
+            <a:schemeClr val="accent1"/>
+          </a:lnRef>
+          <a:fillRef idx="3">
+            <a:schemeClr val="accent1"/>
+          </a:fillRef>
+          <a:effectRef idx="2">
+            <a:schemeClr val="accent1"/>
+          </a:effectRef>
+          <a:fontRef idx="minor">
+            <a:schemeClr val="lt1"/>
+          </a:fontRef>
+        </p:style>
+        <p:txBody>
+          <a:bodyPr rtlCol="0" anchor="ctr"/>
+          <a:lstStyle/>
+          <a:p>
+            <a:pPr algn="ctr"/>
+          </a:p>
+        </p:txBody>
+      </p:sp>
+      <p:sp>
+        <p:nvSpPr>
+          <p:cNvPr id="19" name="TextBox 18"/>
+          <p:cNvSpPr txBox="1"/>
+          <p:nvPr/>
+        </p:nvSpPr>
+        <p:spPr>
+          <a:xfrm>
+            <a:off x="365760" y="3886200"/>
+            <a:ext cx="5669280" cy="274320"/>
+          </a:xfrm>
+          <a:prstGeom prst="rect">
+            <a:avLst/>
+          </a:prstGeom>
+          <a:noFill/>
+        </p:spPr>
+        <p:txBody>
+          <a:bodyPr wrap="none">
+            <a:spAutoFit/>
+          </a:bodyPr>
+          <a:lstStyle/>
+          <a:p/>
+          <a:p>
+            <a:pPr>
+              <a:defRPr sz="1200" b="1">
+                <a:solidFill>
+                  <a:srgbClr val="232F3E"/>
+                </a:solidFill>
+              </a:defRPr>
+            </a:pPr>
+            <a:r>
+              <a:t>AWS認定 FAQ</a:t>
+            </a:r>
+          </a:p>
+        </p:txBody>
+      </p:sp>
+      <p:sp>
+        <p:nvSpPr>
+          <p:cNvPr id="20" name="TextBox 19"/>
+          <p:cNvSpPr txBox="1"/>
+          <p:nvPr/>
+        </p:nvSpPr>
+        <p:spPr>
+          <a:xfrm>
+            <a:off x="365760" y="4114800"/>
+            <a:ext cx="5669280" cy="256032"/>
+          </a:xfrm>
+          <a:prstGeom prst="rect">
+            <a:avLst/>
+          </a:prstGeom>
+          <a:noFill/>
+        </p:spPr>
+        <p:txBody>
+          <a:bodyPr wrap="none">
+            <a:spAutoFit/>
+          </a:bodyPr>
+          <a:lstStyle/>
+          <a:p/>
+          <a:p>
+            <a:pPr>
+              <a:defRPr sz="900" u="sng">
+                <a:solidFill>
+                  <a:srgbClr val="0056B3"/>
+                </a:solidFill>
+              </a:defRPr>
+            </a:pPr>
+            <a:r>
+              <a:t>https://aws.amazon.com/certification/faqs/</a:t>
+            </a:r>
+          </a:p>
+        </p:txBody>
+      </p:sp>
+      <p:sp>
+        <p:nvSpPr>
+          <p:cNvPr id="21" name="TextBox 20"/>
+          <p:cNvSpPr txBox="1"/>
+          <p:nvPr/>
+        </p:nvSpPr>
+        <p:spPr>
+          <a:xfrm>
+            <a:off x="6309360" y="1143000"/>
+            <a:ext cx="5669280" cy="365760"/>
+          </a:xfrm>
+          <a:prstGeom prst="rect">
+            <a:avLst/>
+          </a:prstGeom>
+          <a:noFill/>
+        </p:spPr>
+        <p:txBody>
+          <a:bodyPr wrap="none">
+            <a:spAutoFit/>
+          </a:bodyPr>
+          <a:lstStyle/>
+          <a:p/>
+          <a:p>
+            <a:pPr>
+              <a:defRPr sz="1400" b="1">
+                <a:solidFill>
+                  <a:srgbClr val="FF9900"/>
+                </a:solidFill>
+              </a:defRPr>
+            </a:pPr>
+            <a:r>
+              <a:t>【学習リソース（公式）】</a:t>
+            </a:r>
+          </a:p>
+        </p:txBody>
+      </p:sp>
+      <p:sp>
+        <p:nvSpPr>
+          <p:cNvPr id="22" name="Rectangle 21"/>
+          <p:cNvSpPr/>
+          <p:nvPr/>
+        </p:nvSpPr>
+        <p:spPr>
+          <a:xfrm>
+            <a:off x="6263640" y="1472184"/>
+            <a:ext cx="5760720" cy="566928"/>
+          </a:xfrm>
+          <a:prstGeom prst="rect">
+            <a:avLst/>
+          </a:prstGeom>
+          <a:solidFill>
+            <a:srgbClr val="FFFFFF"/>
+          </a:solidFill>
+          <a:ln>
+            <a:noFill/>
+          </a:ln>
+        </p:spPr>
+        <p:style>
+          <a:lnRef idx="1">
+            <a:schemeClr val="accent1"/>
+          </a:lnRef>
+          <a:fillRef idx="3">
+            <a:schemeClr val="accent1"/>
+          </a:fillRef>
+          <a:effectRef idx="2">
+            <a:schemeClr val="accent1"/>
+          </a:effectRef>
+          <a:fontRef idx="minor">
+            <a:schemeClr val="lt1"/>
+          </a:fontRef>
+        </p:style>
+        <p:txBody>
+          <a:bodyPr rtlCol="0" anchor="ctr"/>
+          <a:lstStyle/>
+          <a:p>
+            <a:pPr algn="ctr"/>
+          </a:p>
+        </p:txBody>
+      </p:sp>
+      <p:sp>
+        <p:nvSpPr>
+          <p:cNvPr id="23" name="TextBox 22"/>
+          <p:cNvSpPr txBox="1"/>
+          <p:nvPr/>
+        </p:nvSpPr>
+        <p:spPr>
+          <a:xfrm>
+            <a:off x="6309360" y="1508760"/>
+            <a:ext cx="5669280" cy="274320"/>
+          </a:xfrm>
+          <a:prstGeom prst="rect">
+            <a:avLst/>
+          </a:prstGeom>
+          <a:noFill/>
+        </p:spPr>
+        <p:txBody>
+          <a:bodyPr wrap="none">
+            <a:spAutoFit/>
+          </a:bodyPr>
+          <a:lstStyle/>
+          <a:p/>
+          <a:p>
+            <a:pPr>
+              <a:defRPr sz="1200" b="1">
+                <a:solidFill>
+                  <a:srgbClr val="232F3E"/>
+                </a:solidFill>
+              </a:defRPr>
+            </a:pPr>
+            <a:r>
+              <a:t>AWS Skill Builder - 試験準備コース（無料）</a:t>
+            </a:r>
+          </a:p>
+        </p:txBody>
+      </p:sp>
+      <p:sp>
+        <p:nvSpPr>
+          <p:cNvPr id="24" name="TextBox 23"/>
+          <p:cNvSpPr txBox="1"/>
+          <p:nvPr/>
+        </p:nvSpPr>
+        <p:spPr>
+          <a:xfrm>
+            <a:off x="6309360" y="1737360"/>
+            <a:ext cx="5669280" cy="256032"/>
+          </a:xfrm>
+          <a:prstGeom prst="rect">
+            <a:avLst/>
+          </a:prstGeom>
+          <a:noFill/>
+        </p:spPr>
+        <p:txBody>
+          <a:bodyPr wrap="none">
+            <a:spAutoFit/>
+          </a:bodyPr>
+          <a:lstStyle/>
+          <a:p/>
+          <a:p>
+            <a:pPr>
+              <a:defRPr sz="900" u="sng">
+                <a:solidFill>
+                  <a:srgbClr val="0056B3"/>
+                </a:solidFill>
+              </a:defRPr>
+            </a:pPr>
+            <a:r>
+              <a:t>https://skillbuilder.aws/learn/X83W99WJXA/exam-prep-standard-course-aws-certified-ai-practitioner-aif-c01/KUW4WB2K4B</a:t>
+            </a:r>
+          </a:p>
+        </p:txBody>
+      </p:sp>
+      <p:sp>
+        <p:nvSpPr>
+          <p:cNvPr id="25" name="Rectangle 24"/>
+          <p:cNvSpPr/>
+          <p:nvPr/>
+        </p:nvSpPr>
+        <p:spPr>
+          <a:xfrm>
+            <a:off x="6263640" y="2066544"/>
+            <a:ext cx="5760720" cy="566928"/>
+          </a:xfrm>
+          <a:prstGeom prst="rect">
+            <a:avLst/>
+          </a:prstGeom>
+          <a:solidFill>
+            <a:srgbClr val="FFFFFF"/>
+          </a:solidFill>
+          <a:ln>
+            <a:noFill/>
+          </a:ln>
+        </p:spPr>
+        <p:style>
+          <a:lnRef idx="1">
+            <a:schemeClr val="accent1"/>
+          </a:lnRef>
+          <a:fillRef idx="3">
+            <a:schemeClr val="accent1"/>
+          </a:fillRef>
+          <a:effectRef idx="2">
+            <a:schemeClr val="accent1"/>
+          </a:effectRef>
+          <a:fontRef idx="minor">
+            <a:schemeClr val="lt1"/>
+          </a:fontRef>
+        </p:style>
+        <p:txBody>
+          <a:bodyPr rtlCol="0" anchor="ctr"/>
+          <a:lstStyle/>
+          <a:p>
+            <a:pPr algn="ctr"/>
+          </a:p>
+        </p:txBody>
+      </p:sp>
+      <p:sp>
+        <p:nvSpPr>
+          <p:cNvPr id="26" name="TextBox 25"/>
+          <p:cNvSpPr txBox="1"/>
+          <p:nvPr/>
+        </p:nvSpPr>
+        <p:spPr>
+          <a:xfrm>
+            <a:off x="6309360" y="2103120"/>
+            <a:ext cx="5669280" cy="274320"/>
+          </a:xfrm>
+          <a:prstGeom prst="rect">
+            <a:avLst/>
+          </a:prstGeom>
+          <a:noFill/>
+        </p:spPr>
+        <p:txBody>
+          <a:bodyPr wrap="none">
+            <a:spAutoFit/>
+          </a:bodyPr>
+          <a:lstStyle/>
+          <a:p/>
+          <a:p>
+            <a:pPr>
+              <a:defRPr sz="1200" b="1">
+                <a:solidFill>
+                  <a:srgbClr val="232F3E"/>
+                </a:solidFill>
+              </a:defRPr>
+            </a:pPr>
+            <a:r>
+              <a:t>AWS Skill Builder - 公式模擬問題集（無料）</a:t>
+            </a:r>
+          </a:p>
+        </p:txBody>
+      </p:sp>
+      <p:sp>
+        <p:nvSpPr>
+          <p:cNvPr id="27" name="TextBox 26"/>
+          <p:cNvSpPr txBox="1"/>
+          <p:nvPr/>
+        </p:nvSpPr>
+        <p:spPr>
+          <a:xfrm>
+            <a:off x="6309360" y="2331720"/>
+            <a:ext cx="5669280" cy="256032"/>
+          </a:xfrm>
+          <a:prstGeom prst="rect">
+            <a:avLst/>
+          </a:prstGeom>
+          <a:noFill/>
+        </p:spPr>
+        <p:txBody>
+          <a:bodyPr wrap="none">
+            <a:spAutoFit/>
+          </a:bodyPr>
+          <a:lstStyle/>
+          <a:p/>
+          <a:p>
+            <a:pPr>
+              <a:defRPr sz="900" u="sng">
+                <a:solidFill>
+                  <a:srgbClr val="0056B3"/>
+                </a:solidFill>
+              </a:defRPr>
+            </a:pPr>
+            <a:r>
+              <a:t>https://explore.skillbuilder.aws/learn/course/19790/exam-prep-official-practice-question-set-aws-certified-ai-practitioner-aif-c01-english</a:t>
+            </a:r>
+          </a:p>
+        </p:txBody>
+      </p:sp>
+      <p:sp>
+        <p:nvSpPr>
+          <p:cNvPr id="28" name="Rectangle 27"/>
+          <p:cNvSpPr/>
+          <p:nvPr/>
+        </p:nvSpPr>
+        <p:spPr>
+          <a:xfrm>
+            <a:off x="6263640" y="2660904"/>
+            <a:ext cx="5760720" cy="566928"/>
+          </a:xfrm>
+          <a:prstGeom prst="rect">
+            <a:avLst/>
+          </a:prstGeom>
+          <a:solidFill>
+            <a:srgbClr val="FFFFFF"/>
+          </a:solidFill>
+          <a:ln>
+            <a:noFill/>
+          </a:ln>
+        </p:spPr>
+        <p:style>
+          <a:lnRef idx="1">
+            <a:schemeClr val="accent1"/>
+          </a:lnRef>
+          <a:fillRef idx="3">
+            <a:schemeClr val="accent1"/>
+          </a:fillRef>
+          <a:effectRef idx="2">
+            <a:schemeClr val="accent1"/>
+          </a:effectRef>
+          <a:fontRef idx="minor">
+            <a:schemeClr val="lt1"/>
+          </a:fontRef>
+        </p:style>
+        <p:txBody>
+          <a:bodyPr rtlCol="0" anchor="ctr"/>
+          <a:lstStyle/>
+          <a:p>
+            <a:pPr algn="ctr"/>
+          </a:p>
+        </p:txBody>
+      </p:sp>
+      <p:sp>
+        <p:nvSpPr>
+          <p:cNvPr id="29" name="TextBox 28"/>
+          <p:cNvSpPr txBox="1"/>
+          <p:nvPr/>
+        </p:nvSpPr>
+        <p:spPr>
+          <a:xfrm>
+            <a:off x="6309360" y="2697480"/>
+            <a:ext cx="5669280" cy="274320"/>
+          </a:xfrm>
+          <a:prstGeom prst="rect">
+            <a:avLst/>
+          </a:prstGeom>
+          <a:noFill/>
+        </p:spPr>
+        <p:txBody>
+          <a:bodyPr wrap="none">
+            <a:spAutoFit/>
+          </a:bodyPr>
+          <a:lstStyle/>
+          <a:p/>
+          <a:p>
+            <a:pPr>
+              <a:defRPr sz="1200" b="1">
+                <a:solidFill>
+                  <a:srgbClr val="232F3E"/>
+                </a:solidFill>
+              </a:defRPr>
+            </a:pPr>
+            <a:r>
+              <a:t>AWS Skill Builder - 試験準備プラン一覧</a:t>
+            </a:r>
+          </a:p>
+        </p:txBody>
+      </p:sp>
+      <p:sp>
+        <p:nvSpPr>
+          <p:cNvPr id="30" name="TextBox 29"/>
+          <p:cNvSpPr txBox="1"/>
+          <p:nvPr/>
+        </p:nvSpPr>
+        <p:spPr>
+          <a:xfrm>
+            <a:off x="6309360" y="2926080"/>
+            <a:ext cx="5669280" cy="256032"/>
+          </a:xfrm>
+          <a:prstGeom prst="rect">
+            <a:avLst/>
+          </a:prstGeom>
+          <a:noFill/>
+        </p:spPr>
+        <p:txBody>
+          <a:bodyPr wrap="none">
+            <a:spAutoFit/>
+          </a:bodyPr>
+          <a:lstStyle/>
+          <a:p/>
+          <a:p>
+            <a:pPr>
+              <a:defRPr sz="900" u="sng">
+                <a:solidFill>
+                  <a:srgbClr val="0056B3"/>
+                </a:solidFill>
+              </a:defRPr>
+            </a:pPr>
+            <a:r>
+              <a:t>https://skillbuilder.aws/category/exam-prep/ai-practitioner</a:t>
+            </a:r>
+          </a:p>
+        </p:txBody>
+      </p:sp>
+      <p:sp>
+        <p:nvSpPr>
+          <p:cNvPr id="31" name="TextBox 30"/>
+          <p:cNvSpPr txBox="1"/>
+          <p:nvPr/>
+        </p:nvSpPr>
+        <p:spPr>
+          <a:xfrm>
+            <a:off x="6309360" y="3474720"/>
+            <a:ext cx="5669280" cy="365760"/>
+          </a:xfrm>
+          <a:prstGeom prst="rect">
+            <a:avLst/>
+          </a:prstGeom>
+          <a:noFill/>
+        </p:spPr>
+        <p:txBody>
+          <a:bodyPr wrap="none">
+            <a:spAutoFit/>
+          </a:bodyPr>
+          <a:lstStyle/>
+          <a:p/>
+          <a:p>
+            <a:pPr>
+              <a:defRPr sz="1400" b="1">
+                <a:solidFill>
+                  <a:srgbClr val="FF9900"/>
+                </a:solidFill>
+              </a:defRPr>
+            </a:pPr>
+            <a:r>
+              <a:t>【AWSサービス公式ドキュメント】</a:t>
+            </a:r>
+          </a:p>
+        </p:txBody>
+      </p:sp>
+      <p:sp>
+        <p:nvSpPr>
+          <p:cNvPr id="32" name="Rectangle 31"/>
+          <p:cNvSpPr/>
+          <p:nvPr/>
+        </p:nvSpPr>
+        <p:spPr>
+          <a:xfrm>
+            <a:off x="6263640" y="3803904"/>
+            <a:ext cx="5760720" cy="566928"/>
+          </a:xfrm>
+          <a:prstGeom prst="rect">
+            <a:avLst/>
+          </a:prstGeom>
+          <a:solidFill>
+            <a:srgbClr val="FFFFFF"/>
+          </a:solidFill>
+          <a:ln>
+            <a:noFill/>
+          </a:ln>
+        </p:spPr>
+        <p:style>
+          <a:lnRef idx="1">
+            <a:schemeClr val="accent1"/>
+          </a:lnRef>
+          <a:fillRef idx="3">
+            <a:schemeClr val="accent1"/>
+          </a:fillRef>
+          <a:effectRef idx="2">
+            <a:schemeClr val="accent1"/>
+          </a:effectRef>
+          <a:fontRef idx="minor">
+            <a:schemeClr val="lt1"/>
+          </a:fontRef>
+        </p:style>
+        <p:txBody>
+          <a:bodyPr rtlCol="0" anchor="ctr"/>
+          <a:lstStyle/>
+          <a:p>
+            <a:pPr algn="ctr"/>
+          </a:p>
+        </p:txBody>
+      </p:sp>
+      <p:sp>
+        <p:nvSpPr>
+          <p:cNvPr id="33" name="TextBox 32"/>
+          <p:cNvSpPr txBox="1"/>
+          <p:nvPr/>
+        </p:nvSpPr>
+        <p:spPr>
+          <a:xfrm>
+            <a:off x="6309360" y="3840480"/>
+            <a:ext cx="5669280" cy="274320"/>
+          </a:xfrm>
+          <a:prstGeom prst="rect">
+            <a:avLst/>
+          </a:prstGeom>
+          <a:noFill/>
+        </p:spPr>
+        <p:txBody>
+          <a:bodyPr wrap="none">
+            <a:spAutoFit/>
+          </a:bodyPr>
+          <a:lstStyle/>
+          <a:p/>
+          <a:p>
+            <a:pPr>
+              <a:defRPr sz="1200" b="1">
+                <a:solidFill>
+                  <a:srgbClr val="232F3E"/>
+                </a:solidFill>
+              </a:defRPr>
+            </a:pPr>
+            <a:r>
+              <a:t>Amazon Bedrock 公式ドキュメント</a:t>
+            </a:r>
+          </a:p>
+        </p:txBody>
+      </p:sp>
+      <p:sp>
+        <p:nvSpPr>
+          <p:cNvPr id="34" name="TextBox 33"/>
+          <p:cNvSpPr txBox="1"/>
+          <p:nvPr/>
+        </p:nvSpPr>
+        <p:spPr>
+          <a:xfrm>
+            <a:off x="6309360" y="4069080"/>
+            <a:ext cx="5669280" cy="256032"/>
+          </a:xfrm>
+          <a:prstGeom prst="rect">
+            <a:avLst/>
+          </a:prstGeom>
+          <a:noFill/>
+        </p:spPr>
+        <p:txBody>
+          <a:bodyPr wrap="none">
+            <a:spAutoFit/>
+          </a:bodyPr>
+          <a:lstStyle/>
+          <a:p/>
+          <a:p>
+            <a:pPr>
+              <a:defRPr sz="900" u="sng">
+                <a:solidFill>
+                  <a:srgbClr val="0056B3"/>
+                </a:solidFill>
+              </a:defRPr>
+            </a:pPr>
+            <a:r>
+              <a:t>https://docs.aws.amazon.com/bedrock/latest/userguide/what-is-bedrock.html</a:t>
+            </a:r>
+          </a:p>
+        </p:txBody>
+      </p:sp>
+      <p:sp>
+        <p:nvSpPr>
+          <p:cNvPr id="35" name="Rectangle 34"/>
+          <p:cNvSpPr/>
+          <p:nvPr/>
+        </p:nvSpPr>
+        <p:spPr>
+          <a:xfrm>
+            <a:off x="6263640" y="4398264"/>
+            <a:ext cx="5760720" cy="566928"/>
+          </a:xfrm>
+          <a:prstGeom prst="rect">
+            <a:avLst/>
+          </a:prstGeom>
+          <a:solidFill>
+            <a:srgbClr val="FFFFFF"/>
+          </a:solidFill>
+          <a:ln>
+            <a:noFill/>
+          </a:ln>
+        </p:spPr>
+        <p:style>
+          <a:lnRef idx="1">
+            <a:schemeClr val="accent1"/>
+          </a:lnRef>
+          <a:fillRef idx="3">
+            <a:schemeClr val="accent1"/>
+          </a:fillRef>
+          <a:effectRef idx="2">
+            <a:schemeClr val="accent1"/>
+          </a:effectRef>
+          <a:fontRef idx="minor">
+            <a:schemeClr val="lt1"/>
+          </a:fontRef>
+        </p:style>
+        <p:txBody>
+          <a:bodyPr rtlCol="0" anchor="ctr"/>
+          <a:lstStyle/>
+          <a:p>
+            <a:pPr algn="ctr"/>
+          </a:p>
+        </p:txBody>
+      </p:sp>
+      <p:sp>
+        <p:nvSpPr>
+          <p:cNvPr id="36" name="TextBox 35"/>
+          <p:cNvSpPr txBox="1"/>
+          <p:nvPr/>
+        </p:nvSpPr>
+        <p:spPr>
+          <a:xfrm>
+            <a:off x="6309360" y="4434840"/>
+            <a:ext cx="5669280" cy="274320"/>
+          </a:xfrm>
+          <a:prstGeom prst="rect">
+            <a:avLst/>
+          </a:prstGeom>
+          <a:noFill/>
+        </p:spPr>
+        <p:txBody>
+          <a:bodyPr wrap="none">
+            <a:spAutoFit/>
+          </a:bodyPr>
+          <a:lstStyle/>
+          <a:p/>
+          <a:p>
+            <a:pPr>
+              <a:defRPr sz="1200" b="1">
+                <a:solidFill>
+                  <a:srgbClr val="232F3E"/>
+                </a:solidFill>
+              </a:defRPr>
+            </a:pPr>
+            <a:r>
+              <a:t>Amazon SageMaker 公式ドキュメント</a:t>
+            </a:r>
+          </a:p>
+        </p:txBody>
+      </p:sp>
+      <p:sp>
+        <p:nvSpPr>
+          <p:cNvPr id="37" name="TextBox 36"/>
+          <p:cNvSpPr txBox="1"/>
+          <p:nvPr/>
+        </p:nvSpPr>
+        <p:spPr>
+          <a:xfrm>
+            <a:off x="6309360" y="4663440"/>
+            <a:ext cx="5669280" cy="256032"/>
+          </a:xfrm>
+          <a:prstGeom prst="rect">
+            <a:avLst/>
+          </a:prstGeom>
+          <a:noFill/>
+        </p:spPr>
+        <p:txBody>
+          <a:bodyPr wrap="none">
+            <a:spAutoFit/>
+          </a:bodyPr>
+          <a:lstStyle/>
+          <a:p/>
+          <a:p>
+            <a:pPr>
+              <a:defRPr sz="900" u="sng">
+                <a:solidFill>
+                  <a:srgbClr val="0056B3"/>
+                </a:solidFill>
+              </a:defRPr>
+            </a:pPr>
+            <a:r>
+              <a:t>https://docs.aws.amazon.com/sagemaker/</a:t>
             </a:r>
           </a:p>
         </p:txBody>

--- a/docs/certification/AWS_AI_Practitioner_Overview.pptx
+++ b/docs/certification/AWS_AI_Practitioner_Overview.pptx
@@ -5210,7 +5210,7 @@
         <p:spPr>
           <a:xfrm>
             <a:off x="0" y="0"/>
-            <a:ext cx="12188952" cy="1005840"/>
+            <a:ext cx="12188952" cy="914400"/>
           </a:xfrm>
           <a:prstGeom prst="rect">
             <a:avLst/>
@@ -5246,92 +5246,20 @@
       </p:sp>
       <p:sp>
         <p:nvSpPr>
-          <p:cNvPr id="4" name="TextBox 3"/>
-          <p:cNvSpPr txBox="1"/>
-          <p:nvPr/>
-        </p:nvSpPr>
-        <p:spPr>
-          <a:xfrm>
-            <a:off x="365760" y="137160"/>
-            <a:ext cx="10972800" cy="731520"/>
-          </a:xfrm>
-          <a:prstGeom prst="rect">
-            <a:avLst/>
-          </a:prstGeom>
-          <a:noFill/>
-        </p:spPr>
-        <p:txBody>
-          <a:bodyPr wrap="none">
-            <a:spAutoFit/>
-          </a:bodyPr>
-          <a:lstStyle/>
-          <a:p/>
-          <a:p>
-            <a:pPr>
-              <a:defRPr sz="2800" b="1">
-                <a:solidFill>
-                  <a:srgbClr val="FFFFFF"/>
-                </a:solidFill>
-              </a:defRPr>
-            </a:pPr>
-            <a:r>
-              <a:t>参考文献・公式リソース</a:t>
-            </a:r>
-          </a:p>
-        </p:txBody>
-      </p:sp>
-      <p:sp>
-        <p:nvSpPr>
-          <p:cNvPr id="5" name="TextBox 4"/>
-          <p:cNvSpPr txBox="1"/>
-          <p:nvPr/>
-        </p:nvSpPr>
-        <p:spPr>
-          <a:xfrm>
-            <a:off x="365760" y="1143000"/>
-            <a:ext cx="5669280" cy="365760"/>
-          </a:xfrm>
-          <a:prstGeom prst="rect">
-            <a:avLst/>
-          </a:prstGeom>
-          <a:noFill/>
-        </p:spPr>
-        <p:txBody>
-          <a:bodyPr wrap="none">
-            <a:spAutoFit/>
-          </a:bodyPr>
-          <a:lstStyle/>
-          <a:p/>
-          <a:p>
-            <a:pPr>
-              <a:defRPr sz="1400" b="1">
-                <a:solidFill>
-                  <a:srgbClr val="FF9900"/>
-                </a:solidFill>
-              </a:defRPr>
-            </a:pPr>
-            <a:r>
-              <a:t>【試験公式】</a:t>
-            </a:r>
-          </a:p>
-        </p:txBody>
-      </p:sp>
-      <p:sp>
-        <p:nvSpPr>
-          <p:cNvPr id="6" name="Rectangle 5"/>
+          <p:cNvPr id="4" name="Rectangle 3"/>
           <p:cNvSpPr/>
           <p:nvPr/>
         </p:nvSpPr>
         <p:spPr>
           <a:xfrm>
-            <a:off x="320040" y="1472184"/>
-            <a:ext cx="5760720" cy="566928"/>
+            <a:off x="0" y="914400"/>
+            <a:ext cx="12188952" cy="45720"/>
           </a:xfrm>
           <a:prstGeom prst="rect">
             <a:avLst/>
           </a:prstGeom>
           <a:solidFill>
-            <a:srgbClr val="FFFFFF"/>
+            <a:srgbClr val="FF9900"/>
           </a:solidFill>
           <a:ln>
             <a:noFill/>
@@ -5361,14 +5289,50 @@
       </p:sp>
       <p:sp>
         <p:nvSpPr>
-          <p:cNvPr id="7" name="TextBox 6"/>
+          <p:cNvPr id="5" name="TextBox 4"/>
           <p:cNvSpPr txBox="1"/>
           <p:nvPr/>
         </p:nvSpPr>
         <p:spPr>
           <a:xfrm>
-            <a:off x="365760" y="1508760"/>
-            <a:ext cx="5669280" cy="274320"/>
+            <a:off x="365760" y="118872"/>
+            <a:ext cx="10972800" cy="685800"/>
+          </a:xfrm>
+          <a:prstGeom prst="rect">
+            <a:avLst/>
+          </a:prstGeom>
+          <a:noFill/>
+        </p:spPr>
+        <p:txBody>
+          <a:bodyPr wrap="square">
+            <a:spAutoFit/>
+          </a:bodyPr>
+          <a:lstStyle/>
+          <a:p/>
+          <a:p>
+            <a:pPr algn="l">
+              <a:defRPr sz="2600" b="1" i="0">
+                <a:solidFill>
+                  <a:srgbClr val="FFFFFF"/>
+                </a:solidFill>
+              </a:defRPr>
+            </a:pPr>
+            <a:r>
+              <a:t>参考文献・公式リソース</a:t>
+            </a:r>
+          </a:p>
+        </p:txBody>
+      </p:sp>
+      <p:sp>
+        <p:nvSpPr>
+          <p:cNvPr id="6" name="TextBox 5"/>
+          <p:cNvSpPr txBox="1"/>
+          <p:nvPr/>
+        </p:nvSpPr>
+        <p:spPr>
+          <a:xfrm>
+            <a:off x="320040" y="1051560"/>
+            <a:ext cx="5577840" cy="320040"/>
           </a:xfrm>
           <a:prstGeom prst="rect">
             <a:avLst/>
@@ -5383,64 +5347,28 @@
           <a:p/>
           <a:p>
             <a:pPr>
-              <a:defRPr sz="1200" b="1">
-                <a:solidFill>
-                  <a:srgbClr val="232F3E"/>
-                </a:solidFill>
-              </a:defRPr>
-            </a:pPr>
-            <a:r>
-              <a:t>AWS Certified AI Practitioner 試験公式ページ</a:t>
-            </a:r>
-          </a:p>
-        </p:txBody>
-      </p:sp>
-      <p:sp>
-        <p:nvSpPr>
-          <p:cNvPr id="8" name="TextBox 7"/>
-          <p:cNvSpPr txBox="1"/>
-          <p:nvPr/>
-        </p:nvSpPr>
-        <p:spPr>
-          <a:xfrm>
-            <a:off x="365760" y="1737360"/>
-            <a:ext cx="5669280" cy="256032"/>
-          </a:xfrm>
-          <a:prstGeom prst="rect">
-            <a:avLst/>
-          </a:prstGeom>
-          <a:noFill/>
-        </p:spPr>
-        <p:txBody>
-          <a:bodyPr wrap="none">
-            <a:spAutoFit/>
-          </a:bodyPr>
-          <a:lstStyle/>
-          <a:p/>
-          <a:p>
-            <a:pPr>
-              <a:defRPr sz="900" u="sng">
-                <a:solidFill>
-                  <a:srgbClr val="0056B3"/>
-                </a:solidFill>
-              </a:defRPr>
-            </a:pPr>
-            <a:r>
-              <a:t>https://aws.amazon.com/certification/certified-ai-practitioner/</a:t>
-            </a:r>
-          </a:p>
-        </p:txBody>
-      </p:sp>
-      <p:sp>
-        <p:nvSpPr>
-          <p:cNvPr id="9" name="Rectangle 8"/>
+              <a:defRPr sz="1300" b="1">
+                <a:solidFill>
+                  <a:srgbClr val="FF9900"/>
+                </a:solidFill>
+              </a:defRPr>
+            </a:pPr>
+            <a:r>
+              <a:t>【試験公式】</a:t>
+            </a:r>
+          </a:p>
+        </p:txBody>
+      </p:sp>
+      <p:sp>
+        <p:nvSpPr>
+          <p:cNvPr id="7" name="Rectangle 6"/>
           <p:cNvSpPr/>
           <p:nvPr/>
         </p:nvSpPr>
         <p:spPr>
           <a:xfrm>
-            <a:off x="320040" y="2066544"/>
-            <a:ext cx="5760720" cy="566928"/>
+            <a:off x="320040" y="1389888"/>
+            <a:ext cx="5577840" cy="658368"/>
           </a:xfrm>
           <a:prstGeom prst="rect">
             <a:avLst/>
@@ -5449,7 +5377,9 @@
             <a:srgbClr val="FFFFFF"/>
           </a:solidFill>
           <a:ln>
-            <a:noFill/>
+            <a:solidFill>
+              <a:srgbClr val="CCCCCC"/>
+            </a:solidFill>
           </a:ln>
         </p:spPr>
         <p:style>
@@ -5476,14 +5406,14 @@
       </p:sp>
       <p:sp>
         <p:nvSpPr>
-          <p:cNvPr id="10" name="TextBox 9"/>
+          <p:cNvPr id="8" name="TextBox 7"/>
           <p:cNvSpPr txBox="1"/>
           <p:nvPr/>
         </p:nvSpPr>
         <p:spPr>
           <a:xfrm>
-            <a:off x="365760" y="2103120"/>
-            <a:ext cx="5669280" cy="274320"/>
+            <a:off x="429768" y="1435608"/>
+            <a:ext cx="5358384" cy="274320"/>
           </a:xfrm>
           <a:prstGeom prst="rect">
             <a:avLst/>
@@ -5491,7 +5421,7 @@
           <a:noFill/>
         </p:spPr>
         <p:txBody>
-          <a:bodyPr wrap="none">
+          <a:bodyPr wrap="square">
             <a:spAutoFit/>
           </a:bodyPr>
           <a:lstStyle/>
@@ -5505,21 +5435,21 @@
               </a:defRPr>
             </a:pPr>
             <a:r>
-              <a:t>試験ガイド（日本語PDF）</a:t>
-            </a:r>
-          </a:p>
-        </p:txBody>
-      </p:sp>
-      <p:sp>
-        <p:nvSpPr>
-          <p:cNvPr id="11" name="TextBox 10"/>
+              <a:t>試験公式ページ</a:t>
+            </a:r>
+          </a:p>
+        </p:txBody>
+      </p:sp>
+      <p:sp>
+        <p:nvSpPr>
+          <p:cNvPr id="9" name="TextBox 8"/>
           <p:cNvSpPr txBox="1"/>
           <p:nvPr/>
         </p:nvSpPr>
         <p:spPr>
           <a:xfrm>
-            <a:off x="365760" y="2331720"/>
-            <a:ext cx="5669280" cy="256032"/>
+            <a:off x="429768" y="1737360"/>
+            <a:ext cx="5358384" cy="256032"/>
           </a:xfrm>
           <a:prstGeom prst="rect">
             <a:avLst/>
@@ -5527,35 +5457,35 @@
           <a:noFill/>
         </p:spPr>
         <p:txBody>
-          <a:bodyPr wrap="none">
+          <a:bodyPr wrap="square">
             <a:spAutoFit/>
           </a:bodyPr>
           <a:lstStyle/>
           <a:p/>
           <a:p>
             <a:pPr>
-              <a:defRPr sz="900" u="sng">
+              <a:defRPr sz="850" u="sng">
                 <a:solidFill>
                   <a:srgbClr val="0056B3"/>
                 </a:solidFill>
               </a:defRPr>
             </a:pPr>
             <a:r>
-              <a:t>https://d1.awsstatic.com/ja_JP/training-and-certification/docs-ai-practitioner/AWS-Certified-AI-Practitioner_Exam-Guide.pdf</a:t>
-            </a:r>
-          </a:p>
-        </p:txBody>
-      </p:sp>
-      <p:sp>
-        <p:nvSpPr>
-          <p:cNvPr id="12" name="Rectangle 11"/>
+              <a:t>https://aws.amazon.com/certification/certified-ai-practitioner/</a:t>
+            </a:r>
+          </a:p>
+        </p:txBody>
+      </p:sp>
+      <p:sp>
+        <p:nvSpPr>
+          <p:cNvPr id="10" name="Rectangle 9"/>
           <p:cNvSpPr/>
           <p:nvPr/>
         </p:nvSpPr>
         <p:spPr>
           <a:xfrm>
-            <a:off x="320040" y="2660904"/>
-            <a:ext cx="5760720" cy="566928"/>
+            <a:off x="320040" y="2093976"/>
+            <a:ext cx="5577840" cy="658368"/>
           </a:xfrm>
           <a:prstGeom prst="rect">
             <a:avLst/>
@@ -5564,7 +5494,9 @@
             <a:srgbClr val="FFFFFF"/>
           </a:solidFill>
           <a:ln>
-            <a:noFill/>
+            <a:solidFill>
+              <a:srgbClr val="CCCCCC"/>
+            </a:solidFill>
           </a:ln>
         </p:spPr>
         <p:style>
@@ -5591,14 +5523,14 @@
       </p:sp>
       <p:sp>
         <p:nvSpPr>
-          <p:cNvPr id="13" name="TextBox 12"/>
+          <p:cNvPr id="11" name="TextBox 10"/>
           <p:cNvSpPr txBox="1"/>
           <p:nvPr/>
         </p:nvSpPr>
         <p:spPr>
           <a:xfrm>
-            <a:off x="365760" y="2697480"/>
-            <a:ext cx="5669280" cy="274320"/>
+            <a:off x="429768" y="2139696"/>
+            <a:ext cx="5358384" cy="274320"/>
           </a:xfrm>
           <a:prstGeom prst="rect">
             <a:avLst/>
@@ -5606,7 +5538,7 @@
           <a:noFill/>
         </p:spPr>
         <p:txBody>
-          <a:bodyPr wrap="none">
+          <a:bodyPr wrap="square">
             <a:spAutoFit/>
           </a:bodyPr>
           <a:lstStyle/>
@@ -5620,21 +5552,21 @@
               </a:defRPr>
             </a:pPr>
             <a:r>
-              <a:t>試験ガイド（AWS Docs）</a:t>
-            </a:r>
-          </a:p>
-        </p:txBody>
-      </p:sp>
-      <p:sp>
-        <p:nvSpPr>
-          <p:cNvPr id="14" name="TextBox 13"/>
+              <a:t>試験ガイド（日本語PDF）</a:t>
+            </a:r>
+          </a:p>
+        </p:txBody>
+      </p:sp>
+      <p:sp>
+        <p:nvSpPr>
+          <p:cNvPr id="12" name="TextBox 11"/>
           <p:cNvSpPr txBox="1"/>
           <p:nvPr/>
         </p:nvSpPr>
         <p:spPr>
           <a:xfrm>
-            <a:off x="365760" y="2926080"/>
-            <a:ext cx="5669280" cy="256032"/>
+            <a:off x="429768" y="2441448"/>
+            <a:ext cx="5358384" cy="256032"/>
           </a:xfrm>
           <a:prstGeom prst="rect">
             <a:avLst/>
@@ -5642,35 +5574,35 @@
           <a:noFill/>
         </p:spPr>
         <p:txBody>
-          <a:bodyPr wrap="none">
+          <a:bodyPr wrap="square">
             <a:spAutoFit/>
           </a:bodyPr>
           <a:lstStyle/>
           <a:p/>
           <a:p>
             <a:pPr>
-              <a:defRPr sz="900" u="sng">
+              <a:defRPr sz="850" u="sng">
                 <a:solidFill>
                   <a:srgbClr val="0056B3"/>
                 </a:solidFill>
               </a:defRPr>
             </a:pPr>
             <a:r>
-              <a:t>https://docs.aws.amazon.com/aws-certification/latest/examguides/ai-practitioner-01.html</a:t>
-            </a:r>
-          </a:p>
-        </p:txBody>
-      </p:sp>
-      <p:sp>
-        <p:nvSpPr>
-          <p:cNvPr id="15" name="Rectangle 14"/>
+              <a:t>https://d1.awsstatic.com/ja_JP/training-and-certification/docs-ai-practitioner/AWS-Certified-AI-Practitioner_Exam-Guide.pdf</a:t>
+            </a:r>
+          </a:p>
+        </p:txBody>
+      </p:sp>
+      <p:sp>
+        <p:nvSpPr>
+          <p:cNvPr id="13" name="Rectangle 12"/>
           <p:cNvSpPr/>
           <p:nvPr/>
         </p:nvSpPr>
         <p:spPr>
           <a:xfrm>
-            <a:off x="320040" y="3255264"/>
-            <a:ext cx="5760720" cy="566928"/>
+            <a:off x="320040" y="2798064"/>
+            <a:ext cx="5577840" cy="658368"/>
           </a:xfrm>
           <a:prstGeom prst="rect">
             <a:avLst/>
@@ -5679,7 +5611,9 @@
             <a:srgbClr val="FFFFFF"/>
           </a:solidFill>
           <a:ln>
-            <a:noFill/>
+            <a:solidFill>
+              <a:srgbClr val="CCCCCC"/>
+            </a:solidFill>
           </a:ln>
         </p:spPr>
         <p:style>
@@ -5706,14 +5640,14 @@
       </p:sp>
       <p:sp>
         <p:nvSpPr>
-          <p:cNvPr id="16" name="TextBox 15"/>
+          <p:cNvPr id="14" name="TextBox 13"/>
           <p:cNvSpPr txBox="1"/>
           <p:nvPr/>
         </p:nvSpPr>
         <p:spPr>
           <a:xfrm>
-            <a:off x="365760" y="3291840"/>
-            <a:ext cx="5669280" cy="274320"/>
+            <a:off x="429768" y="2843784"/>
+            <a:ext cx="5358384" cy="274320"/>
           </a:xfrm>
           <a:prstGeom prst="rect">
             <a:avLst/>
@@ -5721,7 +5655,7 @@
           <a:noFill/>
         </p:spPr>
         <p:txBody>
-          <a:bodyPr wrap="none">
+          <a:bodyPr wrap="square">
             <a:spAutoFit/>
           </a:bodyPr>
           <a:lstStyle/>
@@ -5735,21 +5669,21 @@
               </a:defRPr>
             </a:pPr>
             <a:r>
-              <a:t>試験予約ページ（Pearson VUE）</a:t>
-            </a:r>
-          </a:p>
-        </p:txBody>
-      </p:sp>
-      <p:sp>
-        <p:nvSpPr>
-          <p:cNvPr id="17" name="TextBox 16"/>
+              <a:t>試験ガイド（AWS Docs）</a:t>
+            </a:r>
+          </a:p>
+        </p:txBody>
+      </p:sp>
+      <p:sp>
+        <p:nvSpPr>
+          <p:cNvPr id="15" name="TextBox 14"/>
           <p:cNvSpPr txBox="1"/>
           <p:nvPr/>
         </p:nvSpPr>
         <p:spPr>
           <a:xfrm>
-            <a:off x="365760" y="3520440"/>
-            <a:ext cx="5669280" cy="256032"/>
+            <a:off x="429768" y="3145536"/>
+            <a:ext cx="5358384" cy="256032"/>
           </a:xfrm>
           <a:prstGeom prst="rect">
             <a:avLst/>
@@ -5757,35 +5691,35 @@
           <a:noFill/>
         </p:spPr>
         <p:txBody>
-          <a:bodyPr wrap="none">
+          <a:bodyPr wrap="square">
             <a:spAutoFit/>
           </a:bodyPr>
           <a:lstStyle/>
           <a:p/>
           <a:p>
             <a:pPr>
-              <a:defRPr sz="900" u="sng">
+              <a:defRPr sz="850" u="sng">
                 <a:solidFill>
                   <a:srgbClr val="0056B3"/>
                 </a:solidFill>
               </a:defRPr>
             </a:pPr>
             <a:r>
-              <a:t>https://aws.amazon.com/certification/certification-prep/testing/</a:t>
-            </a:r>
-          </a:p>
-        </p:txBody>
-      </p:sp>
-      <p:sp>
-        <p:nvSpPr>
-          <p:cNvPr id="18" name="Rectangle 17"/>
+              <a:t>https://docs.aws.amazon.com/aws-certification/latest/examguides/ai-practitioner-01.html</a:t>
+            </a:r>
+          </a:p>
+        </p:txBody>
+      </p:sp>
+      <p:sp>
+        <p:nvSpPr>
+          <p:cNvPr id="16" name="Rectangle 15"/>
           <p:cNvSpPr/>
           <p:nvPr/>
         </p:nvSpPr>
         <p:spPr>
           <a:xfrm>
-            <a:off x="320040" y="3849624"/>
-            <a:ext cx="5760720" cy="566928"/>
+            <a:off x="320040" y="3502152"/>
+            <a:ext cx="5577840" cy="658368"/>
           </a:xfrm>
           <a:prstGeom prst="rect">
             <a:avLst/>
@@ -5794,7 +5728,9 @@
             <a:srgbClr val="FFFFFF"/>
           </a:solidFill>
           <a:ln>
-            <a:noFill/>
+            <a:solidFill>
+              <a:srgbClr val="CCCCCC"/>
+            </a:solidFill>
           </a:ln>
         </p:spPr>
         <p:style>
@@ -5821,14 +5757,14 @@
       </p:sp>
       <p:sp>
         <p:nvSpPr>
-          <p:cNvPr id="19" name="TextBox 18"/>
+          <p:cNvPr id="17" name="TextBox 16"/>
           <p:cNvSpPr txBox="1"/>
           <p:nvPr/>
         </p:nvSpPr>
         <p:spPr>
           <a:xfrm>
-            <a:off x="365760" y="3886200"/>
-            <a:ext cx="5669280" cy="274320"/>
+            <a:off x="429768" y="3547872"/>
+            <a:ext cx="5358384" cy="274320"/>
           </a:xfrm>
           <a:prstGeom prst="rect">
             <a:avLst/>
@@ -5836,7 +5772,7 @@
           <a:noFill/>
         </p:spPr>
         <p:txBody>
-          <a:bodyPr wrap="none">
+          <a:bodyPr wrap="square">
             <a:spAutoFit/>
           </a:bodyPr>
           <a:lstStyle/>
@@ -5850,21 +5786,21 @@
               </a:defRPr>
             </a:pPr>
             <a:r>
-              <a:t>AWS認定 FAQ</a:t>
-            </a:r>
-          </a:p>
-        </p:txBody>
-      </p:sp>
-      <p:sp>
-        <p:nvSpPr>
-          <p:cNvPr id="20" name="TextBox 19"/>
+              <a:t>試験予約（Pearson VUE）</a:t>
+            </a:r>
+          </a:p>
+        </p:txBody>
+      </p:sp>
+      <p:sp>
+        <p:nvSpPr>
+          <p:cNvPr id="18" name="TextBox 17"/>
           <p:cNvSpPr txBox="1"/>
           <p:nvPr/>
         </p:nvSpPr>
         <p:spPr>
           <a:xfrm>
-            <a:off x="365760" y="4114800"/>
-            <a:ext cx="5669280" cy="256032"/>
+            <a:off x="429768" y="3849624"/>
+            <a:ext cx="5358384" cy="256032"/>
           </a:xfrm>
           <a:prstGeom prst="rect">
             <a:avLst/>
@@ -5872,71 +5808,35 @@
           <a:noFill/>
         </p:spPr>
         <p:txBody>
-          <a:bodyPr wrap="none">
+          <a:bodyPr wrap="square">
             <a:spAutoFit/>
           </a:bodyPr>
           <a:lstStyle/>
           <a:p/>
           <a:p>
             <a:pPr>
-              <a:defRPr sz="900" u="sng">
+              <a:defRPr sz="850" u="sng">
                 <a:solidFill>
                   <a:srgbClr val="0056B3"/>
                 </a:solidFill>
               </a:defRPr>
             </a:pPr>
             <a:r>
-              <a:t>https://aws.amazon.com/certification/faqs/</a:t>
-            </a:r>
-          </a:p>
-        </p:txBody>
-      </p:sp>
-      <p:sp>
-        <p:nvSpPr>
-          <p:cNvPr id="21" name="TextBox 20"/>
-          <p:cNvSpPr txBox="1"/>
-          <p:nvPr/>
-        </p:nvSpPr>
-        <p:spPr>
-          <a:xfrm>
-            <a:off x="6309360" y="1143000"/>
-            <a:ext cx="5669280" cy="365760"/>
-          </a:xfrm>
-          <a:prstGeom prst="rect">
-            <a:avLst/>
-          </a:prstGeom>
-          <a:noFill/>
-        </p:spPr>
-        <p:txBody>
-          <a:bodyPr wrap="none">
-            <a:spAutoFit/>
-          </a:bodyPr>
-          <a:lstStyle/>
-          <a:p/>
-          <a:p>
-            <a:pPr>
-              <a:defRPr sz="1400" b="1">
-                <a:solidFill>
-                  <a:srgbClr val="FF9900"/>
-                </a:solidFill>
-              </a:defRPr>
-            </a:pPr>
-            <a:r>
-              <a:t>【学習リソース（公式）】</a:t>
-            </a:r>
-          </a:p>
-        </p:txBody>
-      </p:sp>
-      <p:sp>
-        <p:nvSpPr>
-          <p:cNvPr id="22" name="Rectangle 21"/>
+              <a:t>https://aws.amazon.com/certification/certification-prep/testing/</a:t>
+            </a:r>
+          </a:p>
+        </p:txBody>
+      </p:sp>
+      <p:sp>
+        <p:nvSpPr>
+          <p:cNvPr id="19" name="Rectangle 18"/>
           <p:cNvSpPr/>
           <p:nvPr/>
         </p:nvSpPr>
         <p:spPr>
           <a:xfrm>
-            <a:off x="6263640" y="1472184"/>
-            <a:ext cx="5760720" cy="566928"/>
+            <a:off x="320040" y="4206240"/>
+            <a:ext cx="5577840" cy="658368"/>
           </a:xfrm>
           <a:prstGeom prst="rect">
             <a:avLst/>
@@ -5945,7 +5845,9 @@
             <a:srgbClr val="FFFFFF"/>
           </a:solidFill>
           <a:ln>
-            <a:noFill/>
+            <a:solidFill>
+              <a:srgbClr val="CCCCCC"/>
+            </a:solidFill>
           </a:ln>
         </p:spPr>
         <p:style>
@@ -5972,14 +5874,86 @@
       </p:sp>
       <p:sp>
         <p:nvSpPr>
-          <p:cNvPr id="23" name="TextBox 22"/>
+          <p:cNvPr id="20" name="TextBox 19"/>
           <p:cNvSpPr txBox="1"/>
           <p:nvPr/>
         </p:nvSpPr>
         <p:spPr>
           <a:xfrm>
-            <a:off x="6309360" y="1508760"/>
-            <a:ext cx="5669280" cy="274320"/>
+            <a:off x="429768" y="4251960"/>
+            <a:ext cx="5358384" cy="274320"/>
+          </a:xfrm>
+          <a:prstGeom prst="rect">
+            <a:avLst/>
+          </a:prstGeom>
+          <a:noFill/>
+        </p:spPr>
+        <p:txBody>
+          <a:bodyPr wrap="square">
+            <a:spAutoFit/>
+          </a:bodyPr>
+          <a:lstStyle/>
+          <a:p/>
+          <a:p>
+            <a:pPr>
+              <a:defRPr sz="1200" b="1">
+                <a:solidFill>
+                  <a:srgbClr val="232F3E"/>
+                </a:solidFill>
+              </a:defRPr>
+            </a:pPr>
+            <a:r>
+              <a:t>AWS認定 FAQ</a:t>
+            </a:r>
+          </a:p>
+        </p:txBody>
+      </p:sp>
+      <p:sp>
+        <p:nvSpPr>
+          <p:cNvPr id="21" name="TextBox 20"/>
+          <p:cNvSpPr txBox="1"/>
+          <p:nvPr/>
+        </p:nvSpPr>
+        <p:spPr>
+          <a:xfrm>
+            <a:off x="429768" y="4553712"/>
+            <a:ext cx="5358384" cy="256032"/>
+          </a:xfrm>
+          <a:prstGeom prst="rect">
+            <a:avLst/>
+          </a:prstGeom>
+          <a:noFill/>
+        </p:spPr>
+        <p:txBody>
+          <a:bodyPr wrap="square">
+            <a:spAutoFit/>
+          </a:bodyPr>
+          <a:lstStyle/>
+          <a:p/>
+          <a:p>
+            <a:pPr>
+              <a:defRPr sz="850" u="sng">
+                <a:solidFill>
+                  <a:srgbClr val="0056B3"/>
+                </a:solidFill>
+              </a:defRPr>
+            </a:pPr>
+            <a:r>
+              <a:t>https://aws.amazon.com/certification/faqs/</a:t>
+            </a:r>
+          </a:p>
+        </p:txBody>
+      </p:sp>
+      <p:sp>
+        <p:nvSpPr>
+          <p:cNvPr id="22" name="TextBox 21"/>
+          <p:cNvSpPr txBox="1"/>
+          <p:nvPr/>
+        </p:nvSpPr>
+        <p:spPr>
+          <a:xfrm>
+            <a:off x="6291072" y="1051560"/>
+            <a:ext cx="5577840" cy="320040"/>
           </a:xfrm>
           <a:prstGeom prst="rect">
             <a:avLst/>
@@ -5994,64 +5968,28 @@
           <a:p/>
           <a:p>
             <a:pPr>
-              <a:defRPr sz="1200" b="1">
-                <a:solidFill>
-                  <a:srgbClr val="232F3E"/>
-                </a:solidFill>
-              </a:defRPr>
-            </a:pPr>
-            <a:r>
-              <a:t>AWS Skill Builder - 試験準備コース（無料）</a:t>
-            </a:r>
-          </a:p>
-        </p:txBody>
-      </p:sp>
-      <p:sp>
-        <p:nvSpPr>
-          <p:cNvPr id="24" name="TextBox 23"/>
-          <p:cNvSpPr txBox="1"/>
-          <p:nvPr/>
-        </p:nvSpPr>
-        <p:spPr>
-          <a:xfrm>
-            <a:off x="6309360" y="1737360"/>
-            <a:ext cx="5669280" cy="256032"/>
-          </a:xfrm>
-          <a:prstGeom prst="rect">
-            <a:avLst/>
-          </a:prstGeom>
-          <a:noFill/>
-        </p:spPr>
-        <p:txBody>
-          <a:bodyPr wrap="none">
-            <a:spAutoFit/>
-          </a:bodyPr>
-          <a:lstStyle/>
-          <a:p/>
-          <a:p>
-            <a:pPr>
-              <a:defRPr sz="900" u="sng">
-                <a:solidFill>
-                  <a:srgbClr val="0056B3"/>
-                </a:solidFill>
-              </a:defRPr>
-            </a:pPr>
-            <a:r>
-              <a:t>https://skillbuilder.aws/learn/X83W99WJXA/exam-prep-standard-course-aws-certified-ai-practitioner-aif-c01/KUW4WB2K4B</a:t>
-            </a:r>
-          </a:p>
-        </p:txBody>
-      </p:sp>
-      <p:sp>
-        <p:nvSpPr>
-          <p:cNvPr id="25" name="Rectangle 24"/>
+              <a:defRPr sz="1300" b="1">
+                <a:solidFill>
+                  <a:srgbClr val="FF9900"/>
+                </a:solidFill>
+              </a:defRPr>
+            </a:pPr>
+            <a:r>
+              <a:t>【学習リソース（公式）】</a:t>
+            </a:r>
+          </a:p>
+        </p:txBody>
+      </p:sp>
+      <p:sp>
+        <p:nvSpPr>
+          <p:cNvPr id="23" name="Rectangle 22"/>
           <p:cNvSpPr/>
           <p:nvPr/>
         </p:nvSpPr>
         <p:spPr>
           <a:xfrm>
-            <a:off x="6263640" y="2066544"/>
-            <a:ext cx="5760720" cy="566928"/>
+            <a:off x="6291072" y="1389888"/>
+            <a:ext cx="5577840" cy="658368"/>
           </a:xfrm>
           <a:prstGeom prst="rect">
             <a:avLst/>
@@ -6060,7 +5998,9 @@
             <a:srgbClr val="FFFFFF"/>
           </a:solidFill>
           <a:ln>
-            <a:noFill/>
+            <a:solidFill>
+              <a:srgbClr val="CCCCCC"/>
+            </a:solidFill>
           </a:ln>
         </p:spPr>
         <p:style>
@@ -6087,14 +6027,14 @@
       </p:sp>
       <p:sp>
         <p:nvSpPr>
-          <p:cNvPr id="26" name="TextBox 25"/>
+          <p:cNvPr id="24" name="TextBox 23"/>
           <p:cNvSpPr txBox="1"/>
           <p:nvPr/>
         </p:nvSpPr>
         <p:spPr>
           <a:xfrm>
-            <a:off x="6309360" y="2103120"/>
-            <a:ext cx="5669280" cy="274320"/>
+            <a:off x="6400800" y="1435608"/>
+            <a:ext cx="5358384" cy="274320"/>
           </a:xfrm>
           <a:prstGeom prst="rect">
             <a:avLst/>
@@ -6102,7 +6042,7 @@
           <a:noFill/>
         </p:spPr>
         <p:txBody>
-          <a:bodyPr wrap="none">
+          <a:bodyPr wrap="square">
             <a:spAutoFit/>
           </a:bodyPr>
           <a:lstStyle/>
@@ -6116,21 +6056,21 @@
               </a:defRPr>
             </a:pPr>
             <a:r>
-              <a:t>AWS Skill Builder - 公式模擬問題集（無料）</a:t>
-            </a:r>
-          </a:p>
-        </p:txBody>
-      </p:sp>
-      <p:sp>
-        <p:nvSpPr>
-          <p:cNvPr id="27" name="TextBox 26"/>
+              <a:t>AWS Skill Builder - 試験準備コース（無料）</a:t>
+            </a:r>
+          </a:p>
+        </p:txBody>
+      </p:sp>
+      <p:sp>
+        <p:nvSpPr>
+          <p:cNvPr id="25" name="TextBox 24"/>
           <p:cNvSpPr txBox="1"/>
           <p:nvPr/>
         </p:nvSpPr>
         <p:spPr>
           <a:xfrm>
-            <a:off x="6309360" y="2331720"/>
-            <a:ext cx="5669280" cy="256032"/>
+            <a:off x="6400800" y="1737360"/>
+            <a:ext cx="5358384" cy="256032"/>
           </a:xfrm>
           <a:prstGeom prst="rect">
             <a:avLst/>
@@ -6138,35 +6078,35 @@
           <a:noFill/>
         </p:spPr>
         <p:txBody>
-          <a:bodyPr wrap="none">
+          <a:bodyPr wrap="square">
             <a:spAutoFit/>
           </a:bodyPr>
           <a:lstStyle/>
           <a:p/>
           <a:p>
             <a:pPr>
-              <a:defRPr sz="900" u="sng">
+              <a:defRPr sz="850" u="sng">
                 <a:solidFill>
                   <a:srgbClr val="0056B3"/>
                 </a:solidFill>
               </a:defRPr>
             </a:pPr>
             <a:r>
-              <a:t>https://explore.skillbuilder.aws/learn/course/19790/exam-prep-official-practice-question-set-aws-certified-ai-practitioner-aif-c01-english</a:t>
-            </a:r>
-          </a:p>
-        </p:txBody>
-      </p:sp>
-      <p:sp>
-        <p:nvSpPr>
-          <p:cNvPr id="28" name="Rectangle 27"/>
+              <a:t>https://skillbuilder.aws/learn/X83W99WJXA/exam-prep-standard-course-aws-certified-ai-practitioner-aif-c01/KUW4WB2K4B</a:t>
+            </a:r>
+          </a:p>
+        </p:txBody>
+      </p:sp>
+      <p:sp>
+        <p:nvSpPr>
+          <p:cNvPr id="26" name="Rectangle 25"/>
           <p:cNvSpPr/>
           <p:nvPr/>
         </p:nvSpPr>
         <p:spPr>
           <a:xfrm>
-            <a:off x="6263640" y="2660904"/>
-            <a:ext cx="5760720" cy="566928"/>
+            <a:off x="6291072" y="2093976"/>
+            <a:ext cx="5577840" cy="658368"/>
           </a:xfrm>
           <a:prstGeom prst="rect">
             <a:avLst/>
@@ -6175,7 +6115,9 @@
             <a:srgbClr val="FFFFFF"/>
           </a:solidFill>
           <a:ln>
-            <a:noFill/>
+            <a:solidFill>
+              <a:srgbClr val="CCCCCC"/>
+            </a:solidFill>
           </a:ln>
         </p:spPr>
         <p:style>
@@ -6202,14 +6144,14 @@
       </p:sp>
       <p:sp>
         <p:nvSpPr>
-          <p:cNvPr id="29" name="TextBox 28"/>
+          <p:cNvPr id="27" name="TextBox 26"/>
           <p:cNvSpPr txBox="1"/>
           <p:nvPr/>
         </p:nvSpPr>
         <p:spPr>
           <a:xfrm>
-            <a:off x="6309360" y="2697480"/>
-            <a:ext cx="5669280" cy="274320"/>
+            <a:off x="6400800" y="2139696"/>
+            <a:ext cx="5358384" cy="274320"/>
           </a:xfrm>
           <a:prstGeom prst="rect">
             <a:avLst/>
@@ -6217,7 +6159,7 @@
           <a:noFill/>
         </p:spPr>
         <p:txBody>
-          <a:bodyPr wrap="none">
+          <a:bodyPr wrap="square">
             <a:spAutoFit/>
           </a:bodyPr>
           <a:lstStyle/>
@@ -6231,21 +6173,21 @@
               </a:defRPr>
             </a:pPr>
             <a:r>
-              <a:t>AWS Skill Builder - 試験準備プラン一覧</a:t>
-            </a:r>
-          </a:p>
-        </p:txBody>
-      </p:sp>
-      <p:sp>
-        <p:nvSpPr>
-          <p:cNvPr id="30" name="TextBox 29"/>
+              <a:t>AWS Skill Builder - 公式模擬問題集（無料）</a:t>
+            </a:r>
+          </a:p>
+        </p:txBody>
+      </p:sp>
+      <p:sp>
+        <p:nvSpPr>
+          <p:cNvPr id="28" name="TextBox 27"/>
           <p:cNvSpPr txBox="1"/>
           <p:nvPr/>
         </p:nvSpPr>
         <p:spPr>
           <a:xfrm>
-            <a:off x="6309360" y="2926080"/>
-            <a:ext cx="5669280" cy="256032"/>
+            <a:off x="6400800" y="2441448"/>
+            <a:ext cx="5358384" cy="256032"/>
           </a:xfrm>
           <a:prstGeom prst="rect">
             <a:avLst/>
@@ -6253,71 +6195,35 @@
           <a:noFill/>
         </p:spPr>
         <p:txBody>
-          <a:bodyPr wrap="none">
+          <a:bodyPr wrap="square">
             <a:spAutoFit/>
           </a:bodyPr>
           <a:lstStyle/>
           <a:p/>
           <a:p>
             <a:pPr>
-              <a:defRPr sz="900" u="sng">
+              <a:defRPr sz="850" u="sng">
                 <a:solidFill>
                   <a:srgbClr val="0056B3"/>
                 </a:solidFill>
               </a:defRPr>
             </a:pPr>
             <a:r>
-              <a:t>https://skillbuilder.aws/category/exam-prep/ai-practitioner</a:t>
-            </a:r>
-          </a:p>
-        </p:txBody>
-      </p:sp>
-      <p:sp>
-        <p:nvSpPr>
-          <p:cNvPr id="31" name="TextBox 30"/>
-          <p:cNvSpPr txBox="1"/>
-          <p:nvPr/>
-        </p:nvSpPr>
-        <p:spPr>
-          <a:xfrm>
-            <a:off x="6309360" y="3474720"/>
-            <a:ext cx="5669280" cy="365760"/>
-          </a:xfrm>
-          <a:prstGeom prst="rect">
-            <a:avLst/>
-          </a:prstGeom>
-          <a:noFill/>
-        </p:spPr>
-        <p:txBody>
-          <a:bodyPr wrap="none">
-            <a:spAutoFit/>
-          </a:bodyPr>
-          <a:lstStyle/>
-          <a:p/>
-          <a:p>
-            <a:pPr>
-              <a:defRPr sz="1400" b="1">
-                <a:solidFill>
-                  <a:srgbClr val="FF9900"/>
-                </a:solidFill>
-              </a:defRPr>
-            </a:pPr>
-            <a:r>
-              <a:t>【AWSサービス公式ドキュメント】</a:t>
-            </a:r>
-          </a:p>
-        </p:txBody>
-      </p:sp>
-      <p:sp>
-        <p:nvSpPr>
-          <p:cNvPr id="32" name="Rectangle 31"/>
+              <a:t>https://explore.skillbuilder.aws/learn/course/19790/exam-prep-official-practice-question-set-aws-certified-ai-practitioner-aif-c01-english</a:t>
+            </a:r>
+          </a:p>
+        </p:txBody>
+      </p:sp>
+      <p:sp>
+        <p:nvSpPr>
+          <p:cNvPr id="29" name="Rectangle 28"/>
           <p:cNvSpPr/>
           <p:nvPr/>
         </p:nvSpPr>
         <p:spPr>
           <a:xfrm>
-            <a:off x="6263640" y="3803904"/>
-            <a:ext cx="5760720" cy="566928"/>
+            <a:off x="6291072" y="2798064"/>
+            <a:ext cx="5577840" cy="658368"/>
           </a:xfrm>
           <a:prstGeom prst="rect">
             <a:avLst/>
@@ -6326,7 +6232,9 @@
             <a:srgbClr val="FFFFFF"/>
           </a:solidFill>
           <a:ln>
-            <a:noFill/>
+            <a:solidFill>
+              <a:srgbClr val="CCCCCC"/>
+            </a:solidFill>
           </a:ln>
         </p:spPr>
         <p:style>
@@ -6353,14 +6261,86 @@
       </p:sp>
       <p:sp>
         <p:nvSpPr>
-          <p:cNvPr id="33" name="TextBox 32"/>
+          <p:cNvPr id="30" name="TextBox 29"/>
           <p:cNvSpPr txBox="1"/>
           <p:nvPr/>
         </p:nvSpPr>
         <p:spPr>
           <a:xfrm>
-            <a:off x="6309360" y="3840480"/>
-            <a:ext cx="5669280" cy="274320"/>
+            <a:off x="6400800" y="2843784"/>
+            <a:ext cx="5358384" cy="274320"/>
+          </a:xfrm>
+          <a:prstGeom prst="rect">
+            <a:avLst/>
+          </a:prstGeom>
+          <a:noFill/>
+        </p:spPr>
+        <p:txBody>
+          <a:bodyPr wrap="square">
+            <a:spAutoFit/>
+          </a:bodyPr>
+          <a:lstStyle/>
+          <a:p/>
+          <a:p>
+            <a:pPr>
+              <a:defRPr sz="1200" b="1">
+                <a:solidFill>
+                  <a:srgbClr val="232F3E"/>
+                </a:solidFill>
+              </a:defRPr>
+            </a:pPr>
+            <a:r>
+              <a:t>AWS Skill Builder - 試験準備プラン</a:t>
+            </a:r>
+          </a:p>
+        </p:txBody>
+      </p:sp>
+      <p:sp>
+        <p:nvSpPr>
+          <p:cNvPr id="31" name="TextBox 30"/>
+          <p:cNvSpPr txBox="1"/>
+          <p:nvPr/>
+        </p:nvSpPr>
+        <p:spPr>
+          <a:xfrm>
+            <a:off x="6400800" y="3145536"/>
+            <a:ext cx="5358384" cy="256032"/>
+          </a:xfrm>
+          <a:prstGeom prst="rect">
+            <a:avLst/>
+          </a:prstGeom>
+          <a:noFill/>
+        </p:spPr>
+        <p:txBody>
+          <a:bodyPr wrap="square">
+            <a:spAutoFit/>
+          </a:bodyPr>
+          <a:lstStyle/>
+          <a:p/>
+          <a:p>
+            <a:pPr>
+              <a:defRPr sz="850" u="sng">
+                <a:solidFill>
+                  <a:srgbClr val="0056B3"/>
+                </a:solidFill>
+              </a:defRPr>
+            </a:pPr>
+            <a:r>
+              <a:t>https://skillbuilder.aws/category/exam-prep/ai-practitioner</a:t>
+            </a:r>
+          </a:p>
+        </p:txBody>
+      </p:sp>
+      <p:sp>
+        <p:nvSpPr>
+          <p:cNvPr id="32" name="TextBox 31"/>
+          <p:cNvSpPr txBox="1"/>
+          <p:nvPr/>
+        </p:nvSpPr>
+        <p:spPr>
+          <a:xfrm>
+            <a:off x="6291072" y="3611880"/>
+            <a:ext cx="5577840" cy="320040"/>
           </a:xfrm>
           <a:prstGeom prst="rect">
             <a:avLst/>
@@ -6375,64 +6355,28 @@
           <a:p/>
           <a:p>
             <a:pPr>
-              <a:defRPr sz="1200" b="1">
-                <a:solidFill>
-                  <a:srgbClr val="232F3E"/>
-                </a:solidFill>
-              </a:defRPr>
-            </a:pPr>
-            <a:r>
-              <a:t>Amazon Bedrock 公式ドキュメント</a:t>
-            </a:r>
-          </a:p>
-        </p:txBody>
-      </p:sp>
-      <p:sp>
-        <p:nvSpPr>
-          <p:cNvPr id="34" name="TextBox 33"/>
-          <p:cNvSpPr txBox="1"/>
-          <p:nvPr/>
-        </p:nvSpPr>
-        <p:spPr>
-          <a:xfrm>
-            <a:off x="6309360" y="4069080"/>
-            <a:ext cx="5669280" cy="256032"/>
-          </a:xfrm>
-          <a:prstGeom prst="rect">
-            <a:avLst/>
-          </a:prstGeom>
-          <a:noFill/>
-        </p:spPr>
-        <p:txBody>
-          <a:bodyPr wrap="none">
-            <a:spAutoFit/>
-          </a:bodyPr>
-          <a:lstStyle/>
-          <a:p/>
-          <a:p>
-            <a:pPr>
-              <a:defRPr sz="900" u="sng">
-                <a:solidFill>
-                  <a:srgbClr val="0056B3"/>
-                </a:solidFill>
-              </a:defRPr>
-            </a:pPr>
-            <a:r>
-              <a:t>https://docs.aws.amazon.com/bedrock/latest/userguide/what-is-bedrock.html</a:t>
-            </a:r>
-          </a:p>
-        </p:txBody>
-      </p:sp>
-      <p:sp>
-        <p:nvSpPr>
-          <p:cNvPr id="35" name="Rectangle 34"/>
+              <a:defRPr sz="1300" b="1">
+                <a:solidFill>
+                  <a:srgbClr val="FF9900"/>
+                </a:solidFill>
+              </a:defRPr>
+            </a:pPr>
+            <a:r>
+              <a:t>【AWSサービス公式ドキュメント】</a:t>
+            </a:r>
+          </a:p>
+        </p:txBody>
+      </p:sp>
+      <p:sp>
+        <p:nvSpPr>
+          <p:cNvPr id="33" name="Rectangle 32"/>
           <p:cNvSpPr/>
           <p:nvPr/>
         </p:nvSpPr>
         <p:spPr>
           <a:xfrm>
-            <a:off x="6263640" y="4398264"/>
-            <a:ext cx="5760720" cy="566928"/>
+            <a:off x="6291072" y="3950208"/>
+            <a:ext cx="5577840" cy="658368"/>
           </a:xfrm>
           <a:prstGeom prst="rect">
             <a:avLst/>
@@ -6441,7 +6385,9 @@
             <a:srgbClr val="FFFFFF"/>
           </a:solidFill>
           <a:ln>
-            <a:noFill/>
+            <a:solidFill>
+              <a:srgbClr val="CCCCCC"/>
+            </a:solidFill>
           </a:ln>
         </p:spPr>
         <p:style>
@@ -6468,14 +6414,14 @@
       </p:sp>
       <p:sp>
         <p:nvSpPr>
-          <p:cNvPr id="36" name="TextBox 35"/>
+          <p:cNvPr id="34" name="TextBox 33"/>
           <p:cNvSpPr txBox="1"/>
           <p:nvPr/>
         </p:nvSpPr>
         <p:spPr>
           <a:xfrm>
-            <a:off x="6309360" y="4434840"/>
-            <a:ext cx="5669280" cy="274320"/>
+            <a:off x="6400800" y="3995928"/>
+            <a:ext cx="5358384" cy="274320"/>
           </a:xfrm>
           <a:prstGeom prst="rect">
             <a:avLst/>
@@ -6483,7 +6429,7 @@
           <a:noFill/>
         </p:spPr>
         <p:txBody>
-          <a:bodyPr wrap="none">
+          <a:bodyPr wrap="square">
             <a:spAutoFit/>
           </a:bodyPr>
           <a:lstStyle/>
@@ -6497,8 +6443,89 @@
               </a:defRPr>
             </a:pPr>
             <a:r>
-              <a:t>Amazon SageMaker 公式ドキュメント</a:t>
-            </a:r>
+              <a:t>Amazon Bedrock 公式ドキュメント</a:t>
+            </a:r>
+          </a:p>
+        </p:txBody>
+      </p:sp>
+      <p:sp>
+        <p:nvSpPr>
+          <p:cNvPr id="35" name="TextBox 34"/>
+          <p:cNvSpPr txBox="1"/>
+          <p:nvPr/>
+        </p:nvSpPr>
+        <p:spPr>
+          <a:xfrm>
+            <a:off x="6400800" y="4297680"/>
+            <a:ext cx="5358384" cy="256032"/>
+          </a:xfrm>
+          <a:prstGeom prst="rect">
+            <a:avLst/>
+          </a:prstGeom>
+          <a:noFill/>
+        </p:spPr>
+        <p:txBody>
+          <a:bodyPr wrap="square">
+            <a:spAutoFit/>
+          </a:bodyPr>
+          <a:lstStyle/>
+          <a:p/>
+          <a:p>
+            <a:pPr>
+              <a:defRPr sz="850" u="sng">
+                <a:solidFill>
+                  <a:srgbClr val="0056B3"/>
+                </a:solidFill>
+              </a:defRPr>
+            </a:pPr>
+            <a:r>
+              <a:t>https://docs.aws.amazon.com/bedrock/latest/userguide/what-is-bedrock.html</a:t>
+            </a:r>
+          </a:p>
+        </p:txBody>
+      </p:sp>
+      <p:sp>
+        <p:nvSpPr>
+          <p:cNvPr id="36" name="Rectangle 35"/>
+          <p:cNvSpPr/>
+          <p:nvPr/>
+        </p:nvSpPr>
+        <p:spPr>
+          <a:xfrm>
+            <a:off x="6291072" y="4654296"/>
+            <a:ext cx="5577840" cy="658368"/>
+          </a:xfrm>
+          <a:prstGeom prst="rect">
+            <a:avLst/>
+          </a:prstGeom>
+          <a:solidFill>
+            <a:srgbClr val="FFFFFF"/>
+          </a:solidFill>
+          <a:ln>
+            <a:solidFill>
+              <a:srgbClr val="CCCCCC"/>
+            </a:solidFill>
+          </a:ln>
+        </p:spPr>
+        <p:style>
+          <a:lnRef idx="1">
+            <a:schemeClr val="accent1"/>
+          </a:lnRef>
+          <a:fillRef idx="3">
+            <a:schemeClr val="accent1"/>
+          </a:fillRef>
+          <a:effectRef idx="2">
+            <a:schemeClr val="accent1"/>
+          </a:effectRef>
+          <a:fontRef idx="minor">
+            <a:schemeClr val="lt1"/>
+          </a:fontRef>
+        </p:style>
+        <p:txBody>
+          <a:bodyPr rtlCol="0" anchor="ctr"/>
+          <a:lstStyle/>
+          <a:p>
+            <a:pPr algn="ctr"/>
           </a:p>
         </p:txBody>
       </p:sp>
@@ -6510,8 +6537,8 @@
         </p:nvSpPr>
         <p:spPr>
           <a:xfrm>
-            <a:off x="6309360" y="4663440"/>
-            <a:ext cx="5669280" cy="256032"/>
+            <a:off x="6400800" y="4700016"/>
+            <a:ext cx="5358384" cy="274320"/>
           </a:xfrm>
           <a:prstGeom prst="rect">
             <a:avLst/>
@@ -6519,14 +6546,50 @@
           <a:noFill/>
         </p:spPr>
         <p:txBody>
-          <a:bodyPr wrap="none">
+          <a:bodyPr wrap="square">
             <a:spAutoFit/>
           </a:bodyPr>
           <a:lstStyle/>
           <a:p/>
           <a:p>
             <a:pPr>
-              <a:defRPr sz="900" u="sng">
+              <a:defRPr sz="1200" b="1">
+                <a:solidFill>
+                  <a:srgbClr val="232F3E"/>
+                </a:solidFill>
+              </a:defRPr>
+            </a:pPr>
+            <a:r>
+              <a:t>Amazon SageMaker 公式ドキュメント</a:t>
+            </a:r>
+          </a:p>
+        </p:txBody>
+      </p:sp>
+      <p:sp>
+        <p:nvSpPr>
+          <p:cNvPr id="38" name="TextBox 37"/>
+          <p:cNvSpPr txBox="1"/>
+          <p:nvPr/>
+        </p:nvSpPr>
+        <p:spPr>
+          <a:xfrm>
+            <a:off x="6400800" y="5001768"/>
+            <a:ext cx="5358384" cy="256032"/>
+          </a:xfrm>
+          <a:prstGeom prst="rect">
+            <a:avLst/>
+          </a:prstGeom>
+          <a:noFill/>
+        </p:spPr>
+        <p:txBody>
+          <a:bodyPr wrap="square">
+            <a:spAutoFit/>
+          </a:bodyPr>
+          <a:lstStyle/>
+          <a:p/>
+          <a:p>
+            <a:pPr>
+              <a:defRPr sz="850" u="sng">
                 <a:solidFill>
                   <a:srgbClr val="0056B3"/>
                 </a:solidFill>

--- a/docs/certification/AWS_AI_Practitioner_Overview.pptx
+++ b/docs/certification/AWS_AI_Practitioner_Overview.pptx
@@ -5173,7 +5173,7 @@
             <a:avLst/>
           </a:prstGeom>
           <a:solidFill>
-            <a:srgbClr val="F5F5F5"/>
+            <a:srgbClr val="232F3E"/>
           </a:solidFill>
           <a:ln>
             <a:noFill/>
@@ -5216,7 +5216,7 @@
             <a:avLst/>
           </a:prstGeom>
           <a:solidFill>
-            <a:srgbClr val="232F3E"/>
+            <a:srgbClr val="101B27"/>
           </a:solidFill>
           <a:ln>
             <a:noFill/>
@@ -5295,7 +5295,7 @@
         </p:nvSpPr>
         <p:spPr>
           <a:xfrm>
-            <a:off x="365760" y="118872"/>
+            <a:off x="365760" y="137160"/>
             <a:ext cx="10972800" cy="685800"/>
           </a:xfrm>
           <a:prstGeom prst="rect">
@@ -5325,61 +5325,23 @@
       </p:sp>
       <p:sp>
         <p:nvSpPr>
-          <p:cNvPr id="6" name="TextBox 5"/>
-          <p:cNvSpPr txBox="1"/>
+          <p:cNvPr id="6" name="Rectangle 5"/>
+          <p:cNvSpPr/>
           <p:nvPr/>
         </p:nvSpPr>
         <p:spPr>
           <a:xfrm>
             <a:off x="320040" y="1051560"/>
-            <a:ext cx="5577840" cy="320040"/>
-          </a:xfrm>
-          <a:prstGeom prst="rect">
-            <a:avLst/>
-          </a:prstGeom>
-          <a:noFill/>
-        </p:spPr>
-        <p:txBody>
-          <a:bodyPr wrap="none">
-            <a:spAutoFit/>
-          </a:bodyPr>
-          <a:lstStyle/>
-          <a:p/>
-          <a:p>
-            <a:pPr>
-              <a:defRPr sz="1300" b="1">
-                <a:solidFill>
-                  <a:srgbClr val="FF9900"/>
-                </a:solidFill>
-              </a:defRPr>
-            </a:pPr>
-            <a:r>
-              <a:t>【試験公式】</a:t>
-            </a:r>
-          </a:p>
-        </p:txBody>
-      </p:sp>
-      <p:sp>
-        <p:nvSpPr>
-          <p:cNvPr id="7" name="Rectangle 6"/>
-          <p:cNvSpPr/>
-          <p:nvPr/>
-        </p:nvSpPr>
-        <p:spPr>
-          <a:xfrm>
-            <a:off x="320040" y="1389888"/>
-            <a:ext cx="5577840" cy="658368"/>
+            <a:ext cx="5486400" cy="411480"/>
           </a:xfrm>
           <a:prstGeom prst="rect">
             <a:avLst/>
           </a:prstGeom>
           <a:solidFill>
-            <a:srgbClr val="FFFFFF"/>
+            <a:srgbClr val="FF9900"/>
           </a:solidFill>
           <a:ln>
-            <a:solidFill>
-              <a:srgbClr val="CCCCCC"/>
-            </a:solidFill>
+            <a:noFill/>
           </a:ln>
         </p:spPr>
         <p:style>
@@ -5406,14 +5368,14 @@
       </p:sp>
       <p:sp>
         <p:nvSpPr>
-          <p:cNvPr id="8" name="TextBox 7"/>
+          <p:cNvPr id="7" name="TextBox 6"/>
           <p:cNvSpPr txBox="1"/>
           <p:nvPr/>
         </p:nvSpPr>
         <p:spPr>
           <a:xfrm>
-            <a:off x="429768" y="1435608"/>
-            <a:ext cx="5358384" cy="274320"/>
+            <a:off x="457200" y="1078992"/>
+            <a:ext cx="5303520" cy="365760"/>
           </a:xfrm>
           <a:prstGeom prst="rect">
             <a:avLst/>
@@ -5421,82 +5383,44 @@
           <a:noFill/>
         </p:spPr>
         <p:txBody>
-          <a:bodyPr wrap="square">
+          <a:bodyPr wrap="none">
             <a:spAutoFit/>
           </a:bodyPr>
           <a:lstStyle/>
           <a:p/>
           <a:p>
             <a:pPr>
-              <a:defRPr sz="1200" b="1">
+              <a:defRPr sz="1400" b="1">
                 <a:solidFill>
                   <a:srgbClr val="232F3E"/>
                 </a:solidFill>
               </a:defRPr>
             </a:pPr>
             <a:r>
-              <a:t>試験公式ページ</a:t>
-            </a:r>
-          </a:p>
-        </p:txBody>
-      </p:sp>
-      <p:sp>
-        <p:nvSpPr>
-          <p:cNvPr id="9" name="TextBox 8"/>
-          <p:cNvSpPr txBox="1"/>
-          <p:nvPr/>
-        </p:nvSpPr>
-        <p:spPr>
-          <a:xfrm>
-            <a:off x="429768" y="1737360"/>
-            <a:ext cx="5358384" cy="256032"/>
-          </a:xfrm>
-          <a:prstGeom prst="rect">
-            <a:avLst/>
-          </a:prstGeom>
-          <a:noFill/>
-        </p:spPr>
-        <p:txBody>
-          <a:bodyPr wrap="square">
-            <a:spAutoFit/>
-          </a:bodyPr>
-          <a:lstStyle/>
-          <a:p/>
-          <a:p>
-            <a:pPr>
-              <a:defRPr sz="850" u="sng">
-                <a:solidFill>
-                  <a:srgbClr val="0056B3"/>
-                </a:solidFill>
-              </a:defRPr>
-            </a:pPr>
-            <a:r>
-              <a:t>https://aws.amazon.com/certification/certified-ai-practitioner/</a:t>
-            </a:r>
-          </a:p>
-        </p:txBody>
-      </p:sp>
-      <p:sp>
-        <p:nvSpPr>
-          <p:cNvPr id="10" name="Rectangle 9"/>
+              <a:t>試験公式</a:t>
+            </a:r>
+          </a:p>
+        </p:txBody>
+      </p:sp>
+      <p:sp>
+        <p:nvSpPr>
+          <p:cNvPr id="8" name="Rectangle 7"/>
           <p:cNvSpPr/>
           <p:nvPr/>
         </p:nvSpPr>
         <p:spPr>
           <a:xfrm>
-            <a:off x="320040" y="2093976"/>
-            <a:ext cx="5577840" cy="658368"/>
+            <a:off x="320040" y="1508760"/>
+            <a:ext cx="5486400" cy="786384"/>
           </a:xfrm>
           <a:prstGeom prst="rect">
             <a:avLst/>
           </a:prstGeom>
           <a:solidFill>
-            <a:srgbClr val="FFFFFF"/>
+            <a:srgbClr val="1A2635"/>
           </a:solidFill>
           <a:ln>
-            <a:solidFill>
-              <a:srgbClr val="CCCCCC"/>
-            </a:solidFill>
+            <a:noFill/>
           </a:ln>
         </p:spPr>
         <p:style>
@@ -5523,14 +5447,14 @@
       </p:sp>
       <p:sp>
         <p:nvSpPr>
-          <p:cNvPr id="11" name="TextBox 10"/>
+          <p:cNvPr id="9" name="TextBox 8"/>
           <p:cNvSpPr txBox="1"/>
           <p:nvPr/>
         </p:nvSpPr>
         <p:spPr>
           <a:xfrm>
-            <a:off x="429768" y="2139696"/>
-            <a:ext cx="5358384" cy="274320"/>
+            <a:off x="484632" y="1563624"/>
+            <a:ext cx="5257800" cy="731520"/>
           </a:xfrm>
           <a:prstGeom prst="rect">
             <a:avLst/>
@@ -5542,78 +5466,51 @@
             <a:spAutoFit/>
           </a:bodyPr>
           <a:lstStyle/>
-          <a:p/>
           <a:p>
             <a:pPr>
               <a:defRPr sz="1200" b="1">
                 <a:solidFill>
-                  <a:srgbClr val="232F3E"/>
-                </a:solidFill>
-              </a:defRPr>
-            </a:pPr>
-            <a:r>
-              <a:t>試験ガイド（日本語PDF）</a:t>
-            </a:r>
-          </a:p>
-        </p:txBody>
-      </p:sp>
-      <p:sp>
-        <p:nvSpPr>
-          <p:cNvPr id="12" name="TextBox 11"/>
-          <p:cNvSpPr txBox="1"/>
-          <p:nvPr/>
-        </p:nvSpPr>
-        <p:spPr>
-          <a:xfrm>
-            <a:off x="429768" y="2441448"/>
-            <a:ext cx="5358384" cy="256032"/>
-          </a:xfrm>
-          <a:prstGeom prst="rect">
-            <a:avLst/>
-          </a:prstGeom>
-          <a:noFill/>
-        </p:spPr>
-        <p:txBody>
-          <a:bodyPr wrap="square">
-            <a:spAutoFit/>
-          </a:bodyPr>
-          <a:lstStyle/>
-          <a:p/>
-          <a:p>
-            <a:pPr>
-              <a:defRPr sz="850" u="sng">
-                <a:solidFill>
-                  <a:srgbClr val="0056B3"/>
-                </a:solidFill>
-              </a:defRPr>
-            </a:pPr>
-            <a:r>
-              <a:t>https://d1.awsstatic.com/ja_JP/training-and-certification/docs-ai-practitioner/AWS-Certified-AI-Practitioner_Exam-Guide.pdf</a:t>
-            </a:r>
-          </a:p>
-        </p:txBody>
-      </p:sp>
-      <p:sp>
-        <p:nvSpPr>
-          <p:cNvPr id="13" name="Rectangle 12"/>
+                  <a:srgbClr val="FFFFFF"/>
+                </a:solidFill>
+              </a:defRPr>
+            </a:pPr>
+            <a:r>
+              <a:t>試験公式ページ</a:t>
+            </a:r>
+          </a:p>
+          <a:p>
+            <a:pPr>
+              <a:defRPr sz="900" u="sng">
+                <a:solidFill>
+                  <a:srgbClr val="58C4FF"/>
+                </a:solidFill>
+              </a:defRPr>
+            </a:pPr>
+            <a:r>
+              <a:t>https://aws.amazon.com/certification/certified-ai-practitioner/</a:t>
+            </a:r>
+          </a:p>
+        </p:txBody>
+      </p:sp>
+      <p:sp>
+        <p:nvSpPr>
+          <p:cNvPr id="10" name="Rectangle 9"/>
           <p:cNvSpPr/>
           <p:nvPr/>
         </p:nvSpPr>
         <p:spPr>
           <a:xfrm>
-            <a:off x="320040" y="2798064"/>
-            <a:ext cx="5577840" cy="658368"/>
+            <a:off x="320040" y="2331720"/>
+            <a:ext cx="5486400" cy="786384"/>
           </a:xfrm>
           <a:prstGeom prst="rect">
             <a:avLst/>
           </a:prstGeom>
           <a:solidFill>
-            <a:srgbClr val="FFFFFF"/>
+            <a:srgbClr val="223244"/>
           </a:solidFill>
           <a:ln>
-            <a:solidFill>
-              <a:srgbClr val="CCCCCC"/>
-            </a:solidFill>
+            <a:noFill/>
           </a:ln>
         </p:spPr>
         <p:style>
@@ -5640,14 +5537,14 @@
       </p:sp>
       <p:sp>
         <p:nvSpPr>
-          <p:cNvPr id="14" name="TextBox 13"/>
+          <p:cNvPr id="11" name="TextBox 10"/>
           <p:cNvSpPr txBox="1"/>
           <p:nvPr/>
         </p:nvSpPr>
         <p:spPr>
           <a:xfrm>
-            <a:off x="429768" y="2843784"/>
-            <a:ext cx="5358384" cy="274320"/>
+            <a:off x="484632" y="2386584"/>
+            <a:ext cx="5257800" cy="731520"/>
           </a:xfrm>
           <a:prstGeom prst="rect">
             <a:avLst/>
@@ -5659,78 +5556,51 @@
             <a:spAutoFit/>
           </a:bodyPr>
           <a:lstStyle/>
-          <a:p/>
           <a:p>
             <a:pPr>
               <a:defRPr sz="1200" b="1">
                 <a:solidFill>
-                  <a:srgbClr val="232F3E"/>
-                </a:solidFill>
-              </a:defRPr>
-            </a:pPr>
-            <a:r>
-              <a:t>試験ガイド（AWS Docs）</a:t>
-            </a:r>
-          </a:p>
-        </p:txBody>
-      </p:sp>
-      <p:sp>
-        <p:nvSpPr>
-          <p:cNvPr id="15" name="TextBox 14"/>
-          <p:cNvSpPr txBox="1"/>
-          <p:nvPr/>
-        </p:nvSpPr>
-        <p:spPr>
-          <a:xfrm>
-            <a:off x="429768" y="3145536"/>
-            <a:ext cx="5358384" cy="256032"/>
-          </a:xfrm>
-          <a:prstGeom prst="rect">
-            <a:avLst/>
-          </a:prstGeom>
-          <a:noFill/>
-        </p:spPr>
-        <p:txBody>
-          <a:bodyPr wrap="square">
-            <a:spAutoFit/>
-          </a:bodyPr>
-          <a:lstStyle/>
-          <a:p/>
-          <a:p>
-            <a:pPr>
-              <a:defRPr sz="850" u="sng">
-                <a:solidFill>
-                  <a:srgbClr val="0056B3"/>
-                </a:solidFill>
-              </a:defRPr>
-            </a:pPr>
-            <a:r>
-              <a:t>https://docs.aws.amazon.com/aws-certification/latest/examguides/ai-practitioner-01.html</a:t>
-            </a:r>
-          </a:p>
-        </p:txBody>
-      </p:sp>
-      <p:sp>
-        <p:nvSpPr>
-          <p:cNvPr id="16" name="Rectangle 15"/>
+                  <a:srgbClr val="FFFFFF"/>
+                </a:solidFill>
+              </a:defRPr>
+            </a:pPr>
+            <a:r>
+              <a:t>試験ガイド（日本語PDF）</a:t>
+            </a:r>
+          </a:p>
+          <a:p>
+            <a:pPr>
+              <a:defRPr sz="900" u="sng">
+                <a:solidFill>
+                  <a:srgbClr val="58C4FF"/>
+                </a:solidFill>
+              </a:defRPr>
+            </a:pPr>
+            <a:r>
+              <a:t>https://d1.awsstatic.com/ja_JP/training-and-certification/docs-ai-practitioner/AWS-Certified-AI-Practitioner_Exam-Guide.pdf</a:t>
+            </a:r>
+          </a:p>
+        </p:txBody>
+      </p:sp>
+      <p:sp>
+        <p:nvSpPr>
+          <p:cNvPr id="12" name="Rectangle 11"/>
           <p:cNvSpPr/>
           <p:nvPr/>
         </p:nvSpPr>
         <p:spPr>
           <a:xfrm>
-            <a:off x="320040" y="3502152"/>
-            <a:ext cx="5577840" cy="658368"/>
+            <a:off x="320040" y="3154680"/>
+            <a:ext cx="5486400" cy="786384"/>
           </a:xfrm>
           <a:prstGeom prst="rect">
             <a:avLst/>
           </a:prstGeom>
           <a:solidFill>
-            <a:srgbClr val="FFFFFF"/>
+            <a:srgbClr val="1A2635"/>
           </a:solidFill>
           <a:ln>
-            <a:solidFill>
-              <a:srgbClr val="CCCCCC"/>
-            </a:solidFill>
+            <a:noFill/>
           </a:ln>
         </p:spPr>
         <p:style>
@@ -5757,14 +5627,14 @@
       </p:sp>
       <p:sp>
         <p:nvSpPr>
-          <p:cNvPr id="17" name="TextBox 16"/>
+          <p:cNvPr id="13" name="TextBox 12"/>
           <p:cNvSpPr txBox="1"/>
           <p:nvPr/>
         </p:nvSpPr>
         <p:spPr>
           <a:xfrm>
-            <a:off x="429768" y="3547872"/>
-            <a:ext cx="5358384" cy="274320"/>
+            <a:off x="484632" y="3209544"/>
+            <a:ext cx="5257800" cy="731520"/>
           </a:xfrm>
           <a:prstGeom prst="rect">
             <a:avLst/>
@@ -5776,78 +5646,51 @@
             <a:spAutoFit/>
           </a:bodyPr>
           <a:lstStyle/>
-          <a:p/>
           <a:p>
             <a:pPr>
               <a:defRPr sz="1200" b="1">
                 <a:solidFill>
-                  <a:srgbClr val="232F3E"/>
-                </a:solidFill>
-              </a:defRPr>
-            </a:pPr>
-            <a:r>
-              <a:t>試験予約（Pearson VUE）</a:t>
-            </a:r>
-          </a:p>
-        </p:txBody>
-      </p:sp>
-      <p:sp>
-        <p:nvSpPr>
-          <p:cNvPr id="18" name="TextBox 17"/>
-          <p:cNvSpPr txBox="1"/>
-          <p:nvPr/>
-        </p:nvSpPr>
-        <p:spPr>
-          <a:xfrm>
-            <a:off x="429768" y="3849624"/>
-            <a:ext cx="5358384" cy="256032"/>
-          </a:xfrm>
-          <a:prstGeom prst="rect">
-            <a:avLst/>
-          </a:prstGeom>
-          <a:noFill/>
-        </p:spPr>
-        <p:txBody>
-          <a:bodyPr wrap="square">
-            <a:spAutoFit/>
-          </a:bodyPr>
-          <a:lstStyle/>
-          <a:p/>
-          <a:p>
-            <a:pPr>
-              <a:defRPr sz="850" u="sng">
-                <a:solidFill>
-                  <a:srgbClr val="0056B3"/>
-                </a:solidFill>
-              </a:defRPr>
-            </a:pPr>
-            <a:r>
-              <a:t>https://aws.amazon.com/certification/certification-prep/testing/</a:t>
-            </a:r>
-          </a:p>
-        </p:txBody>
-      </p:sp>
-      <p:sp>
-        <p:nvSpPr>
-          <p:cNvPr id="19" name="Rectangle 18"/>
+                  <a:srgbClr val="FFFFFF"/>
+                </a:solidFill>
+              </a:defRPr>
+            </a:pPr>
+            <a:r>
+              <a:t>試験ガイド（AWS Docs）</a:t>
+            </a:r>
+          </a:p>
+          <a:p>
+            <a:pPr>
+              <a:defRPr sz="900" u="sng">
+                <a:solidFill>
+                  <a:srgbClr val="58C4FF"/>
+                </a:solidFill>
+              </a:defRPr>
+            </a:pPr>
+            <a:r>
+              <a:t>https://docs.aws.amazon.com/aws-certification/latest/examguides/ai-practitioner-01.html</a:t>
+            </a:r>
+          </a:p>
+        </p:txBody>
+      </p:sp>
+      <p:sp>
+        <p:nvSpPr>
+          <p:cNvPr id="14" name="Rectangle 13"/>
           <p:cNvSpPr/>
           <p:nvPr/>
         </p:nvSpPr>
         <p:spPr>
           <a:xfrm>
-            <a:off x="320040" y="4206240"/>
-            <a:ext cx="5577840" cy="658368"/>
+            <a:off x="320040" y="3977640"/>
+            <a:ext cx="5486400" cy="786384"/>
           </a:xfrm>
           <a:prstGeom prst="rect">
             <a:avLst/>
           </a:prstGeom>
           <a:solidFill>
-            <a:srgbClr val="FFFFFF"/>
+            <a:srgbClr val="223244"/>
           </a:solidFill>
           <a:ln>
-            <a:solidFill>
-              <a:srgbClr val="CCCCCC"/>
-            </a:solidFill>
+            <a:noFill/>
           </a:ln>
         </p:spPr>
         <p:style>
@@ -5874,14 +5717,14 @@
       </p:sp>
       <p:sp>
         <p:nvSpPr>
-          <p:cNvPr id="20" name="TextBox 19"/>
+          <p:cNvPr id="15" name="TextBox 14"/>
           <p:cNvSpPr txBox="1"/>
           <p:nvPr/>
         </p:nvSpPr>
         <p:spPr>
           <a:xfrm>
-            <a:off x="429768" y="4251960"/>
-            <a:ext cx="5358384" cy="274320"/>
+            <a:off x="484632" y="4032504"/>
+            <a:ext cx="5257800" cy="731520"/>
           </a:xfrm>
           <a:prstGeom prst="rect">
             <a:avLst/>
@@ -5893,114 +5736,51 @@
             <a:spAutoFit/>
           </a:bodyPr>
           <a:lstStyle/>
-          <a:p/>
           <a:p>
             <a:pPr>
               <a:defRPr sz="1200" b="1">
                 <a:solidFill>
-                  <a:srgbClr val="232F3E"/>
-                </a:solidFill>
-              </a:defRPr>
-            </a:pPr>
-            <a:r>
-              <a:t>AWS認定 FAQ</a:t>
-            </a:r>
-          </a:p>
-        </p:txBody>
-      </p:sp>
-      <p:sp>
-        <p:nvSpPr>
-          <p:cNvPr id="21" name="TextBox 20"/>
-          <p:cNvSpPr txBox="1"/>
-          <p:nvPr/>
-        </p:nvSpPr>
-        <p:spPr>
-          <a:xfrm>
-            <a:off x="429768" y="4553712"/>
-            <a:ext cx="5358384" cy="256032"/>
-          </a:xfrm>
-          <a:prstGeom prst="rect">
-            <a:avLst/>
-          </a:prstGeom>
-          <a:noFill/>
-        </p:spPr>
-        <p:txBody>
-          <a:bodyPr wrap="square">
-            <a:spAutoFit/>
-          </a:bodyPr>
-          <a:lstStyle/>
-          <a:p/>
-          <a:p>
-            <a:pPr>
-              <a:defRPr sz="850" u="sng">
-                <a:solidFill>
-                  <a:srgbClr val="0056B3"/>
-                </a:solidFill>
-              </a:defRPr>
-            </a:pPr>
-            <a:r>
-              <a:t>https://aws.amazon.com/certification/faqs/</a:t>
-            </a:r>
-          </a:p>
-        </p:txBody>
-      </p:sp>
-      <p:sp>
-        <p:nvSpPr>
-          <p:cNvPr id="22" name="TextBox 21"/>
-          <p:cNvSpPr txBox="1"/>
-          <p:nvPr/>
-        </p:nvSpPr>
-        <p:spPr>
-          <a:xfrm>
-            <a:off x="6291072" y="1051560"/>
-            <a:ext cx="5577840" cy="320040"/>
-          </a:xfrm>
-          <a:prstGeom prst="rect">
-            <a:avLst/>
-          </a:prstGeom>
-          <a:noFill/>
-        </p:spPr>
-        <p:txBody>
-          <a:bodyPr wrap="none">
-            <a:spAutoFit/>
-          </a:bodyPr>
-          <a:lstStyle/>
-          <a:p/>
-          <a:p>
-            <a:pPr>
-              <a:defRPr sz="1300" b="1">
-                <a:solidFill>
-                  <a:srgbClr val="FF9900"/>
-                </a:solidFill>
-              </a:defRPr>
-            </a:pPr>
-            <a:r>
-              <a:t>【学習リソース（公式）】</a:t>
-            </a:r>
-          </a:p>
-        </p:txBody>
-      </p:sp>
-      <p:sp>
-        <p:nvSpPr>
-          <p:cNvPr id="23" name="Rectangle 22"/>
+                  <a:srgbClr val="FFFFFF"/>
+                </a:solidFill>
+              </a:defRPr>
+            </a:pPr>
+            <a:r>
+              <a:t>試験予約（Pearson VUE）</a:t>
+            </a:r>
+          </a:p>
+          <a:p>
+            <a:pPr>
+              <a:defRPr sz="900" u="sng">
+                <a:solidFill>
+                  <a:srgbClr val="58C4FF"/>
+                </a:solidFill>
+              </a:defRPr>
+            </a:pPr>
+            <a:r>
+              <a:t>https://aws.amazon.com/certification/certification-prep/testing/</a:t>
+            </a:r>
+          </a:p>
+        </p:txBody>
+      </p:sp>
+      <p:sp>
+        <p:nvSpPr>
+          <p:cNvPr id="16" name="Rectangle 15"/>
           <p:cNvSpPr/>
           <p:nvPr/>
         </p:nvSpPr>
         <p:spPr>
           <a:xfrm>
-            <a:off x="6291072" y="1389888"/>
-            <a:ext cx="5577840" cy="658368"/>
+            <a:off x="320040" y="4800600"/>
+            <a:ext cx="5486400" cy="786384"/>
           </a:xfrm>
           <a:prstGeom prst="rect">
             <a:avLst/>
           </a:prstGeom>
           <a:solidFill>
-            <a:srgbClr val="FFFFFF"/>
+            <a:srgbClr val="1A2635"/>
           </a:solidFill>
           <a:ln>
-            <a:solidFill>
-              <a:srgbClr val="CCCCCC"/>
-            </a:solidFill>
+            <a:noFill/>
           </a:ln>
         </p:spPr>
         <p:style>
@@ -6027,14 +5807,14 @@
       </p:sp>
       <p:sp>
         <p:nvSpPr>
-          <p:cNvPr id="24" name="TextBox 23"/>
+          <p:cNvPr id="17" name="TextBox 16"/>
           <p:cNvSpPr txBox="1"/>
           <p:nvPr/>
         </p:nvSpPr>
         <p:spPr>
           <a:xfrm>
-            <a:off x="6400800" y="1435608"/>
-            <a:ext cx="5358384" cy="274320"/>
+            <a:off x="484632" y="4855464"/>
+            <a:ext cx="5257800" cy="731520"/>
           </a:xfrm>
           <a:prstGeom prst="rect">
             <a:avLst/>
@@ -6046,78 +5826,51 @@
             <a:spAutoFit/>
           </a:bodyPr>
           <a:lstStyle/>
-          <a:p/>
           <a:p>
             <a:pPr>
               <a:defRPr sz="1200" b="1">
                 <a:solidFill>
-                  <a:srgbClr val="232F3E"/>
-                </a:solidFill>
-              </a:defRPr>
-            </a:pPr>
-            <a:r>
-              <a:t>AWS Skill Builder - 試験準備コース（無料）</a:t>
-            </a:r>
-          </a:p>
-        </p:txBody>
-      </p:sp>
-      <p:sp>
-        <p:nvSpPr>
-          <p:cNvPr id="25" name="TextBox 24"/>
-          <p:cNvSpPr txBox="1"/>
-          <p:nvPr/>
-        </p:nvSpPr>
-        <p:spPr>
-          <a:xfrm>
-            <a:off x="6400800" y="1737360"/>
-            <a:ext cx="5358384" cy="256032"/>
-          </a:xfrm>
-          <a:prstGeom prst="rect">
-            <a:avLst/>
-          </a:prstGeom>
-          <a:noFill/>
-        </p:spPr>
-        <p:txBody>
-          <a:bodyPr wrap="square">
-            <a:spAutoFit/>
-          </a:bodyPr>
-          <a:lstStyle/>
-          <a:p/>
-          <a:p>
-            <a:pPr>
-              <a:defRPr sz="850" u="sng">
-                <a:solidFill>
-                  <a:srgbClr val="0056B3"/>
-                </a:solidFill>
-              </a:defRPr>
-            </a:pPr>
-            <a:r>
-              <a:t>https://skillbuilder.aws/learn/X83W99WJXA/exam-prep-standard-course-aws-certified-ai-practitioner-aif-c01/KUW4WB2K4B</a:t>
-            </a:r>
-          </a:p>
-        </p:txBody>
-      </p:sp>
-      <p:sp>
-        <p:nvSpPr>
-          <p:cNvPr id="26" name="Rectangle 25"/>
+                  <a:srgbClr val="FFFFFF"/>
+                </a:solidFill>
+              </a:defRPr>
+            </a:pPr>
+            <a:r>
+              <a:t>AWS認定 FAQ</a:t>
+            </a:r>
+          </a:p>
+          <a:p>
+            <a:pPr>
+              <a:defRPr sz="900" u="sng">
+                <a:solidFill>
+                  <a:srgbClr val="58C4FF"/>
+                </a:solidFill>
+              </a:defRPr>
+            </a:pPr>
+            <a:r>
+              <a:t>https://aws.amazon.com/certification/faqs/</a:t>
+            </a:r>
+          </a:p>
+        </p:txBody>
+      </p:sp>
+      <p:sp>
+        <p:nvSpPr>
+          <p:cNvPr id="18" name="Rectangle 17"/>
           <p:cNvSpPr/>
           <p:nvPr/>
         </p:nvSpPr>
         <p:spPr>
           <a:xfrm>
-            <a:off x="6291072" y="2093976"/>
-            <a:ext cx="5577840" cy="658368"/>
+            <a:off x="6263640" y="1051560"/>
+            <a:ext cx="5486400" cy="411480"/>
           </a:xfrm>
           <a:prstGeom prst="rect">
             <a:avLst/>
           </a:prstGeom>
           <a:solidFill>
-            <a:srgbClr val="FFFFFF"/>
+            <a:srgbClr val="FF9900"/>
           </a:solidFill>
           <a:ln>
-            <a:solidFill>
-              <a:srgbClr val="CCCCCC"/>
-            </a:solidFill>
+            <a:noFill/>
           </a:ln>
         </p:spPr>
         <p:style>
@@ -6144,14 +5897,14 @@
       </p:sp>
       <p:sp>
         <p:nvSpPr>
-          <p:cNvPr id="27" name="TextBox 26"/>
+          <p:cNvPr id="19" name="TextBox 18"/>
           <p:cNvSpPr txBox="1"/>
           <p:nvPr/>
         </p:nvSpPr>
         <p:spPr>
           <a:xfrm>
-            <a:off x="6400800" y="2139696"/>
-            <a:ext cx="5358384" cy="274320"/>
+            <a:off x="6400800" y="1078992"/>
+            <a:ext cx="5303520" cy="365760"/>
           </a:xfrm>
           <a:prstGeom prst="rect">
             <a:avLst/>
@@ -6159,82 +5912,44 @@
           <a:noFill/>
         </p:spPr>
         <p:txBody>
-          <a:bodyPr wrap="square">
+          <a:bodyPr wrap="none">
             <a:spAutoFit/>
           </a:bodyPr>
           <a:lstStyle/>
           <a:p/>
           <a:p>
             <a:pPr>
-              <a:defRPr sz="1200" b="1">
+              <a:defRPr sz="1400" b="1">
                 <a:solidFill>
                   <a:srgbClr val="232F3E"/>
                 </a:solidFill>
               </a:defRPr>
             </a:pPr>
             <a:r>
-              <a:t>AWS Skill Builder - 公式模擬問題集（無料）</a:t>
-            </a:r>
-          </a:p>
-        </p:txBody>
-      </p:sp>
-      <p:sp>
-        <p:nvSpPr>
-          <p:cNvPr id="28" name="TextBox 27"/>
-          <p:cNvSpPr txBox="1"/>
-          <p:nvPr/>
-        </p:nvSpPr>
-        <p:spPr>
-          <a:xfrm>
-            <a:off x="6400800" y="2441448"/>
-            <a:ext cx="5358384" cy="256032"/>
-          </a:xfrm>
-          <a:prstGeom prst="rect">
-            <a:avLst/>
-          </a:prstGeom>
-          <a:noFill/>
-        </p:spPr>
-        <p:txBody>
-          <a:bodyPr wrap="square">
-            <a:spAutoFit/>
-          </a:bodyPr>
-          <a:lstStyle/>
-          <a:p/>
-          <a:p>
-            <a:pPr>
-              <a:defRPr sz="850" u="sng">
-                <a:solidFill>
-                  <a:srgbClr val="0056B3"/>
-                </a:solidFill>
-              </a:defRPr>
-            </a:pPr>
-            <a:r>
-              <a:t>https://explore.skillbuilder.aws/learn/course/19790/exam-prep-official-practice-question-set-aws-certified-ai-practitioner-aif-c01-english</a:t>
-            </a:r>
-          </a:p>
-        </p:txBody>
-      </p:sp>
-      <p:sp>
-        <p:nvSpPr>
-          <p:cNvPr id="29" name="Rectangle 28"/>
+              <a:t>学習リソース（公式）</a:t>
+            </a:r>
+          </a:p>
+        </p:txBody>
+      </p:sp>
+      <p:sp>
+        <p:nvSpPr>
+          <p:cNvPr id="20" name="Rectangle 19"/>
           <p:cNvSpPr/>
           <p:nvPr/>
         </p:nvSpPr>
         <p:spPr>
           <a:xfrm>
-            <a:off x="6291072" y="2798064"/>
-            <a:ext cx="5577840" cy="658368"/>
+            <a:off x="6263640" y="1508760"/>
+            <a:ext cx="5486400" cy="786384"/>
           </a:xfrm>
           <a:prstGeom prst="rect">
             <a:avLst/>
           </a:prstGeom>
           <a:solidFill>
-            <a:srgbClr val="FFFFFF"/>
+            <a:srgbClr val="1A2635"/>
           </a:solidFill>
           <a:ln>
-            <a:solidFill>
-              <a:srgbClr val="CCCCCC"/>
-            </a:solidFill>
+            <a:noFill/>
           </a:ln>
         </p:spPr>
         <p:style>
@@ -6261,14 +5976,14 @@
       </p:sp>
       <p:sp>
         <p:nvSpPr>
-          <p:cNvPr id="30" name="TextBox 29"/>
+          <p:cNvPr id="21" name="TextBox 20"/>
           <p:cNvSpPr txBox="1"/>
           <p:nvPr/>
         </p:nvSpPr>
         <p:spPr>
           <a:xfrm>
-            <a:off x="6400800" y="2843784"/>
-            <a:ext cx="5358384" cy="274320"/>
+            <a:off x="6428232" y="1563624"/>
+            <a:ext cx="5257800" cy="731520"/>
           </a:xfrm>
           <a:prstGeom prst="rect">
             <a:avLst/>
@@ -6280,114 +5995,51 @@
             <a:spAutoFit/>
           </a:bodyPr>
           <a:lstStyle/>
-          <a:p/>
           <a:p>
             <a:pPr>
               <a:defRPr sz="1200" b="1">
                 <a:solidFill>
-                  <a:srgbClr val="232F3E"/>
-                </a:solidFill>
-              </a:defRPr>
-            </a:pPr>
-            <a:r>
-              <a:t>AWS Skill Builder - 試験準備プラン</a:t>
-            </a:r>
-          </a:p>
-        </p:txBody>
-      </p:sp>
-      <p:sp>
-        <p:nvSpPr>
-          <p:cNvPr id="31" name="TextBox 30"/>
-          <p:cNvSpPr txBox="1"/>
-          <p:nvPr/>
-        </p:nvSpPr>
-        <p:spPr>
-          <a:xfrm>
-            <a:off x="6400800" y="3145536"/>
-            <a:ext cx="5358384" cy="256032"/>
-          </a:xfrm>
-          <a:prstGeom prst="rect">
-            <a:avLst/>
-          </a:prstGeom>
-          <a:noFill/>
-        </p:spPr>
-        <p:txBody>
-          <a:bodyPr wrap="square">
-            <a:spAutoFit/>
-          </a:bodyPr>
-          <a:lstStyle/>
-          <a:p/>
-          <a:p>
-            <a:pPr>
-              <a:defRPr sz="850" u="sng">
-                <a:solidFill>
-                  <a:srgbClr val="0056B3"/>
-                </a:solidFill>
-              </a:defRPr>
-            </a:pPr>
-            <a:r>
-              <a:t>https://skillbuilder.aws/category/exam-prep/ai-practitioner</a:t>
-            </a:r>
-          </a:p>
-        </p:txBody>
-      </p:sp>
-      <p:sp>
-        <p:nvSpPr>
-          <p:cNvPr id="32" name="TextBox 31"/>
-          <p:cNvSpPr txBox="1"/>
-          <p:nvPr/>
-        </p:nvSpPr>
-        <p:spPr>
-          <a:xfrm>
-            <a:off x="6291072" y="3611880"/>
-            <a:ext cx="5577840" cy="320040"/>
-          </a:xfrm>
-          <a:prstGeom prst="rect">
-            <a:avLst/>
-          </a:prstGeom>
-          <a:noFill/>
-        </p:spPr>
-        <p:txBody>
-          <a:bodyPr wrap="none">
-            <a:spAutoFit/>
-          </a:bodyPr>
-          <a:lstStyle/>
-          <a:p/>
-          <a:p>
-            <a:pPr>
-              <a:defRPr sz="1300" b="1">
-                <a:solidFill>
-                  <a:srgbClr val="FF9900"/>
-                </a:solidFill>
-              </a:defRPr>
-            </a:pPr>
-            <a:r>
-              <a:t>【AWSサービス公式ドキュメント】</a:t>
-            </a:r>
-          </a:p>
-        </p:txBody>
-      </p:sp>
-      <p:sp>
-        <p:nvSpPr>
-          <p:cNvPr id="33" name="Rectangle 32"/>
+                  <a:srgbClr val="FFFFFF"/>
+                </a:solidFill>
+              </a:defRPr>
+            </a:pPr>
+            <a:r>
+              <a:t>AWS Skill Builder - 試験準備コース（無料）</a:t>
+            </a:r>
+          </a:p>
+          <a:p>
+            <a:pPr>
+              <a:defRPr sz="900" u="sng">
+                <a:solidFill>
+                  <a:srgbClr val="58C4FF"/>
+                </a:solidFill>
+              </a:defRPr>
+            </a:pPr>
+            <a:r>
+              <a:t>https://skillbuilder.aws/learn/X83W99WJXA/exam-prep-standard-course-aws-certified-ai-practitioner-aif-c01/KUW4WB2K4B</a:t>
+            </a:r>
+          </a:p>
+        </p:txBody>
+      </p:sp>
+      <p:sp>
+        <p:nvSpPr>
+          <p:cNvPr id="22" name="Rectangle 21"/>
           <p:cNvSpPr/>
           <p:nvPr/>
         </p:nvSpPr>
         <p:spPr>
           <a:xfrm>
-            <a:off x="6291072" y="3950208"/>
-            <a:ext cx="5577840" cy="658368"/>
+            <a:off x="6263640" y="2331720"/>
+            <a:ext cx="5486400" cy="786384"/>
           </a:xfrm>
           <a:prstGeom prst="rect">
             <a:avLst/>
           </a:prstGeom>
           <a:solidFill>
-            <a:srgbClr val="FFFFFF"/>
+            <a:srgbClr val="223244"/>
           </a:solidFill>
           <a:ln>
-            <a:solidFill>
-              <a:srgbClr val="CCCCCC"/>
-            </a:solidFill>
+            <a:noFill/>
           </a:ln>
         </p:spPr>
         <p:style>
@@ -6414,14 +6066,14 @@
       </p:sp>
       <p:sp>
         <p:nvSpPr>
-          <p:cNvPr id="34" name="TextBox 33"/>
+          <p:cNvPr id="23" name="TextBox 22"/>
           <p:cNvSpPr txBox="1"/>
           <p:nvPr/>
         </p:nvSpPr>
         <p:spPr>
           <a:xfrm>
-            <a:off x="6400800" y="3995928"/>
-            <a:ext cx="5358384" cy="274320"/>
+            <a:off x="6428232" y="2386584"/>
+            <a:ext cx="5257800" cy="731520"/>
           </a:xfrm>
           <a:prstGeom prst="rect">
             <a:avLst/>
@@ -6433,78 +6085,51 @@
             <a:spAutoFit/>
           </a:bodyPr>
           <a:lstStyle/>
-          <a:p/>
           <a:p>
             <a:pPr>
               <a:defRPr sz="1200" b="1">
                 <a:solidFill>
-                  <a:srgbClr val="232F3E"/>
-                </a:solidFill>
-              </a:defRPr>
-            </a:pPr>
-            <a:r>
-              <a:t>Amazon Bedrock 公式ドキュメント</a:t>
-            </a:r>
-          </a:p>
-        </p:txBody>
-      </p:sp>
-      <p:sp>
-        <p:nvSpPr>
-          <p:cNvPr id="35" name="TextBox 34"/>
-          <p:cNvSpPr txBox="1"/>
-          <p:nvPr/>
-        </p:nvSpPr>
-        <p:spPr>
-          <a:xfrm>
-            <a:off x="6400800" y="4297680"/>
-            <a:ext cx="5358384" cy="256032"/>
-          </a:xfrm>
-          <a:prstGeom prst="rect">
-            <a:avLst/>
-          </a:prstGeom>
-          <a:noFill/>
-        </p:spPr>
-        <p:txBody>
-          <a:bodyPr wrap="square">
-            <a:spAutoFit/>
-          </a:bodyPr>
-          <a:lstStyle/>
-          <a:p/>
-          <a:p>
-            <a:pPr>
-              <a:defRPr sz="850" u="sng">
-                <a:solidFill>
-                  <a:srgbClr val="0056B3"/>
-                </a:solidFill>
-              </a:defRPr>
-            </a:pPr>
-            <a:r>
-              <a:t>https://docs.aws.amazon.com/bedrock/latest/userguide/what-is-bedrock.html</a:t>
-            </a:r>
-          </a:p>
-        </p:txBody>
-      </p:sp>
-      <p:sp>
-        <p:nvSpPr>
-          <p:cNvPr id="36" name="Rectangle 35"/>
+                  <a:srgbClr val="FFFFFF"/>
+                </a:solidFill>
+              </a:defRPr>
+            </a:pPr>
+            <a:r>
+              <a:t>AWS Skill Builder - 公式模擬問題集（無料）</a:t>
+            </a:r>
+          </a:p>
+          <a:p>
+            <a:pPr>
+              <a:defRPr sz="900" u="sng">
+                <a:solidFill>
+                  <a:srgbClr val="58C4FF"/>
+                </a:solidFill>
+              </a:defRPr>
+            </a:pPr>
+            <a:r>
+              <a:t>https://explore.skillbuilder.aws/learn/course/19790/exam-prep-official-practice-question-set-aws-certified-ai-practitioner-aif-c01-english</a:t>
+            </a:r>
+          </a:p>
+        </p:txBody>
+      </p:sp>
+      <p:sp>
+        <p:nvSpPr>
+          <p:cNvPr id="24" name="Rectangle 23"/>
           <p:cNvSpPr/>
           <p:nvPr/>
         </p:nvSpPr>
         <p:spPr>
           <a:xfrm>
-            <a:off x="6291072" y="4654296"/>
-            <a:ext cx="5577840" cy="658368"/>
+            <a:off x="6263640" y="3154680"/>
+            <a:ext cx="5486400" cy="786384"/>
           </a:xfrm>
           <a:prstGeom prst="rect">
             <a:avLst/>
           </a:prstGeom>
           <a:solidFill>
-            <a:srgbClr val="FFFFFF"/>
+            <a:srgbClr val="1A2635"/>
           </a:solidFill>
           <a:ln>
-            <a:solidFill>
-              <a:srgbClr val="CCCCCC"/>
-            </a:solidFill>
+            <a:noFill/>
           </a:ln>
         </p:spPr>
         <p:style>
@@ -6531,14 +6156,14 @@
       </p:sp>
       <p:sp>
         <p:nvSpPr>
-          <p:cNvPr id="37" name="TextBox 36"/>
+          <p:cNvPr id="25" name="TextBox 24"/>
           <p:cNvSpPr txBox="1"/>
           <p:nvPr/>
         </p:nvSpPr>
         <p:spPr>
           <a:xfrm>
-            <a:off x="6400800" y="4700016"/>
-            <a:ext cx="5358384" cy="274320"/>
+            <a:off x="6428232" y="3209544"/>
+            <a:ext cx="5257800" cy="731520"/>
           </a:xfrm>
           <a:prstGeom prst="rect">
             <a:avLst/>
@@ -6550,31 +6175,85 @@
             <a:spAutoFit/>
           </a:bodyPr>
           <a:lstStyle/>
-          <a:p/>
           <a:p>
             <a:pPr>
               <a:defRPr sz="1200" b="1">
                 <a:solidFill>
-                  <a:srgbClr val="232F3E"/>
-                </a:solidFill>
-              </a:defRPr>
-            </a:pPr>
-            <a:r>
-              <a:t>Amazon SageMaker 公式ドキュメント</a:t>
-            </a:r>
-          </a:p>
-        </p:txBody>
-      </p:sp>
-      <p:sp>
-        <p:nvSpPr>
-          <p:cNvPr id="38" name="TextBox 37"/>
+                  <a:srgbClr val="FFFFFF"/>
+                </a:solidFill>
+              </a:defRPr>
+            </a:pPr>
+            <a:r>
+              <a:t>AWS Skill Builder - 試験準備プラン</a:t>
+            </a:r>
+          </a:p>
+          <a:p>
+            <a:pPr>
+              <a:defRPr sz="900" u="sng">
+                <a:solidFill>
+                  <a:srgbClr val="58C4FF"/>
+                </a:solidFill>
+              </a:defRPr>
+            </a:pPr>
+            <a:r>
+              <a:t>https://skillbuilder.aws/category/exam-prep/ai-practitioner</a:t>
+            </a:r>
+          </a:p>
+        </p:txBody>
+      </p:sp>
+      <p:sp>
+        <p:nvSpPr>
+          <p:cNvPr id="26" name="Rectangle 25"/>
+          <p:cNvSpPr/>
+          <p:nvPr/>
+        </p:nvSpPr>
+        <p:spPr>
+          <a:xfrm>
+            <a:off x="6263640" y="3977640"/>
+            <a:ext cx="5486400" cy="786384"/>
+          </a:xfrm>
+          <a:prstGeom prst="rect">
+            <a:avLst/>
+          </a:prstGeom>
+          <a:solidFill>
+            <a:srgbClr val="223244"/>
+          </a:solidFill>
+          <a:ln>
+            <a:noFill/>
+          </a:ln>
+        </p:spPr>
+        <p:style>
+          <a:lnRef idx="1">
+            <a:schemeClr val="accent1"/>
+          </a:lnRef>
+          <a:fillRef idx="3">
+            <a:schemeClr val="accent1"/>
+          </a:fillRef>
+          <a:effectRef idx="2">
+            <a:schemeClr val="accent1"/>
+          </a:effectRef>
+          <a:fontRef idx="minor">
+            <a:schemeClr val="lt1"/>
+          </a:fontRef>
+        </p:style>
+        <p:txBody>
+          <a:bodyPr rtlCol="0" anchor="ctr"/>
+          <a:lstStyle/>
+          <a:p>
+            <a:pPr algn="ctr"/>
+          </a:p>
+        </p:txBody>
+      </p:sp>
+      <p:sp>
+        <p:nvSpPr>
+          <p:cNvPr id="27" name="TextBox 26"/>
           <p:cNvSpPr txBox="1"/>
           <p:nvPr/>
         </p:nvSpPr>
         <p:spPr>
           <a:xfrm>
-            <a:off x="6400800" y="5001768"/>
-            <a:ext cx="5358384" cy="256032"/>
+            <a:off x="6428232" y="4032504"/>
+            <a:ext cx="5257800" cy="731520"/>
           </a:xfrm>
           <a:prstGeom prst="rect">
             <a:avLst/>
@@ -6586,12 +6265,113 @@
             <a:spAutoFit/>
           </a:bodyPr>
           <a:lstStyle/>
-          <a:p/>
-          <a:p>
-            <a:pPr>
-              <a:defRPr sz="850" u="sng">
-                <a:solidFill>
-                  <a:srgbClr val="0056B3"/>
+          <a:p>
+            <a:pPr>
+              <a:defRPr sz="1200" b="1">
+                <a:solidFill>
+                  <a:srgbClr val="FFFFFF"/>
+                </a:solidFill>
+              </a:defRPr>
+            </a:pPr>
+            <a:r>
+              <a:t>Amazon Bedrock 公式ドキュメント</a:t>
+            </a:r>
+          </a:p>
+          <a:p>
+            <a:pPr>
+              <a:defRPr sz="900" u="sng">
+                <a:solidFill>
+                  <a:srgbClr val="58C4FF"/>
+                </a:solidFill>
+              </a:defRPr>
+            </a:pPr>
+            <a:r>
+              <a:t>https://docs.aws.amazon.com/bedrock/latest/userguide/what-is-bedrock.html</a:t>
+            </a:r>
+          </a:p>
+        </p:txBody>
+      </p:sp>
+      <p:sp>
+        <p:nvSpPr>
+          <p:cNvPr id="28" name="Rectangle 27"/>
+          <p:cNvSpPr/>
+          <p:nvPr/>
+        </p:nvSpPr>
+        <p:spPr>
+          <a:xfrm>
+            <a:off x="6263640" y="4800600"/>
+            <a:ext cx="5486400" cy="786384"/>
+          </a:xfrm>
+          <a:prstGeom prst="rect">
+            <a:avLst/>
+          </a:prstGeom>
+          <a:solidFill>
+            <a:srgbClr val="1A2635"/>
+          </a:solidFill>
+          <a:ln>
+            <a:noFill/>
+          </a:ln>
+        </p:spPr>
+        <p:style>
+          <a:lnRef idx="1">
+            <a:schemeClr val="accent1"/>
+          </a:lnRef>
+          <a:fillRef idx="3">
+            <a:schemeClr val="accent1"/>
+          </a:fillRef>
+          <a:effectRef idx="2">
+            <a:schemeClr val="accent1"/>
+          </a:effectRef>
+          <a:fontRef idx="minor">
+            <a:schemeClr val="lt1"/>
+          </a:fontRef>
+        </p:style>
+        <p:txBody>
+          <a:bodyPr rtlCol="0" anchor="ctr"/>
+          <a:lstStyle/>
+          <a:p>
+            <a:pPr algn="ctr"/>
+          </a:p>
+        </p:txBody>
+      </p:sp>
+      <p:sp>
+        <p:nvSpPr>
+          <p:cNvPr id="29" name="TextBox 28"/>
+          <p:cNvSpPr txBox="1"/>
+          <p:nvPr/>
+        </p:nvSpPr>
+        <p:spPr>
+          <a:xfrm>
+            <a:off x="6428232" y="4855464"/>
+            <a:ext cx="5257800" cy="731520"/>
+          </a:xfrm>
+          <a:prstGeom prst="rect">
+            <a:avLst/>
+          </a:prstGeom>
+          <a:noFill/>
+        </p:spPr>
+        <p:txBody>
+          <a:bodyPr wrap="square">
+            <a:spAutoFit/>
+          </a:bodyPr>
+          <a:lstStyle/>
+          <a:p>
+            <a:pPr>
+              <a:defRPr sz="1200" b="1">
+                <a:solidFill>
+                  <a:srgbClr val="FFFFFF"/>
+                </a:solidFill>
+              </a:defRPr>
+            </a:pPr>
+            <a:r>
+              <a:t>Amazon SageMaker 公式ドキュメント</a:t>
+            </a:r>
+          </a:p>
+          <a:p>
+            <a:pPr>
+              <a:defRPr sz="900" u="sng">
+                <a:solidFill>
+                  <a:srgbClr val="58C4FF"/>
                 </a:solidFill>
               </a:defRPr>
             </a:pPr>

--- a/docs/certification/AWS_AI_Practitioner_Overview.pptx
+++ b/docs/certification/AWS_AI_Practitioner_Overview.pptx
@@ -5,21 +5,21 @@
     <p:sldMasterId id="2147483648" r:id="rId1"/>
   </p:sldMasterIdLst>
   <p:sldIdLst>
-    <p:sldId id="256" r:id="rId7"/>
-    <p:sldId id="257" r:id="rId8"/>
-    <p:sldId id="258" r:id="rId9"/>
-    <p:sldId id="259" r:id="rId10"/>
-    <p:sldId id="260" r:id="rId11"/>
-    <p:sldId id="261" r:id="rId12"/>
-    <p:sldId id="262" r:id="rId13"/>
-    <p:sldId id="263" r:id="rId14"/>
-    <p:sldId id="264" r:id="rId15"/>
-    <p:sldId id="265" r:id="rId16"/>
-    <p:sldId id="266" r:id="rId17"/>
-    <p:sldId id="267" r:id="rId18"/>
-    <p:sldId id="268" r:id="rId19"/>
+    <p:sldId id="256" r:id="rId2"/>
+    <p:sldId id="257" r:id="rId3"/>
+    <p:sldId id="258" r:id="rId4"/>
+    <p:sldId id="259" r:id="rId5"/>
+    <p:sldId id="260" r:id="rId6"/>
+    <p:sldId id="261" r:id="rId7"/>
+    <p:sldId id="262" r:id="rId8"/>
+    <p:sldId id="263" r:id="rId9"/>
+    <p:sldId id="264" r:id="rId10"/>
+    <p:sldId id="265" r:id="rId11"/>
+    <p:sldId id="266" r:id="rId12"/>
+    <p:sldId id="267" r:id="rId13"/>
+    <p:sldId id="268" r:id="rId14"/>
   </p:sldIdLst>
-  <p:sldSz cx="12188952" cy="6858000" type="screen4x3"/>
+  <p:sldSz cx="12188825" cy="6858000"/>
   <p:notesSz cx="6858000" cy="9144000"/>
   <p:defaultTextStyle>
     <a:defPPr>
@@ -116,7 +116,60 @@
       </a:defRPr>
     </a:lvl9pPr>
   </p:defaultTextStyle>
+  <p:extLst>
+    <p:ext uri="{EFAFB233-063F-42B5-8137-9DF3F51BA10A}">
+      <p15:sldGuideLst xmlns:p15="http://schemas.microsoft.com/office/powerpoint/2012/main">
+        <p15:guide id="1" orient="horz" pos="2160">
+          <p15:clr>
+            <a:srgbClr val="A4A3A4"/>
+          </p15:clr>
+        </p15:guide>
+        <p15:guide id="2" pos="2880">
+          <p15:clr>
+            <a:srgbClr val="A4A3A4"/>
+          </p15:clr>
+        </p15:guide>
+      </p15:sldGuideLst>
+    </p:ext>
+  </p:extLst>
 </p:presentation>
+</file>
+
+<file path=ppt/changesInfos/changesInfo1.xml><?xml version="1.0" encoding="utf-8"?>
+<pc:chgInfo xmlns:a="http://schemas.openxmlformats.org/drawingml/2006/main" xmlns:r="http://schemas.openxmlformats.org/officeDocument/2006/relationships" xmlns:ac="http://schemas.microsoft.com/office/drawing/2013/main/command" xmlns:pc="http://schemas.microsoft.com/office/powerpoint/2013/main/command">
+  <pc:docChgLst>
+    <pc:chgData name="一成 本多" userId="106a17ecfda0c2b1" providerId="LiveId" clId="{799C7C9F-AE79-4430-BE4D-453A60B54C30}"/>
+    <pc:docChg chg="modSld">
+      <pc:chgData name="一成 本多" userId="106a17ecfda0c2b1" providerId="LiveId" clId="{799C7C9F-AE79-4430-BE4D-453A60B54C30}" dt="2026-04-29T03:58:15.239" v="1" actId="6549"/>
+      <pc:docMkLst>
+        <pc:docMk/>
+      </pc:docMkLst>
+      <pc:sldChg chg="modSp mod">
+        <pc:chgData name="一成 本多" userId="106a17ecfda0c2b1" providerId="LiveId" clId="{799C7C9F-AE79-4430-BE4D-453A60B54C30}" dt="2026-04-29T03:58:15.239" v="1" actId="6549"/>
+        <pc:sldMkLst>
+          <pc:docMk/>
+          <pc:sldMk cId="0" sldId="268"/>
+        </pc:sldMkLst>
+        <pc:spChg chg="mod">
+          <ac:chgData name="一成 本多" userId="106a17ecfda0c2b1" providerId="LiveId" clId="{799C7C9F-AE79-4430-BE4D-453A60B54C30}" dt="2026-04-29T03:58:12.247" v="0" actId="6549"/>
+          <ac:spMkLst>
+            <pc:docMk/>
+            <pc:sldMk cId="0" sldId="268"/>
+            <ac:spMk id="7" creationId="{00000000-0000-0000-0000-000000000000}"/>
+          </ac:spMkLst>
+        </pc:spChg>
+        <pc:spChg chg="mod">
+          <ac:chgData name="一成 本多" userId="106a17ecfda0c2b1" providerId="LiveId" clId="{799C7C9F-AE79-4430-BE4D-453A60B54C30}" dt="2026-04-29T03:58:15.239" v="1" actId="6549"/>
+          <ac:spMkLst>
+            <pc:docMk/>
+            <pc:sldMk cId="0" sldId="268"/>
+            <ac:spMk id="19" creationId="{00000000-0000-0000-0000-000000000000}"/>
+          </ac:spMkLst>
+        </pc:spChg>
+      </pc:sldChg>
+    </pc:docChg>
+  </pc:docChgLst>
+</pc:chgInfo>
 </file>
 
 <file path=ppt/slideLayouts/slideLayout1.xml><?xml version="1.0" encoding="utf-8"?>
@@ -157,10 +210,9 @@
           <a:lstStyle/>
           <a:p>
             <a:r>
-              <a:rPr lang="en-US" smtClean="0"/>
+              <a:rPr lang="en-US"/>
               <a:t>Click to edit Master title style</a:t>
             </a:r>
-            <a:endParaRPr lang="en-US"/>
           </a:p>
         </p:txBody>
       </p:sp>
@@ -276,10 +328,9 @@
           </a:lstStyle>
           <a:p>
             <a:r>
-              <a:rPr lang="en-US" smtClean="0"/>
+              <a:rPr lang="en-US"/>
               <a:t>Click to edit Master subtitle style</a:t>
             </a:r>
-            <a:endParaRPr lang="en-US"/>
           </a:p>
         </p:txBody>
       </p:sp>
@@ -300,7 +351,7 @@
           <a:p>
             <a:fld id="{5BCAD085-E8A6-8845-BD4E-CB4CCA059FC4}" type="datetimeFigureOut">
               <a:rPr lang="en-US" smtClean="0"/>
-              <a:t>1/27/13</a:t>
+              <a:t>4/29/2026</a:t>
             </a:fld>
             <a:endParaRPr lang="en-US"/>
           </a:p>
@@ -394,10 +445,9 @@
           <a:lstStyle/>
           <a:p>
             <a:r>
-              <a:rPr lang="en-US" smtClean="0"/>
+              <a:rPr lang="en-US"/>
               <a:t>Click to edit Master title style</a:t>
             </a:r>
-            <a:endParaRPr lang="en-US"/>
           </a:p>
         </p:txBody>
       </p:sp>
@@ -418,38 +468,37 @@
           <a:p>
             <a:pPr lvl="0"/>
             <a:r>
-              <a:rPr lang="en-US" smtClean="0"/>
+              <a:rPr lang="en-US"/>
               <a:t>Click to edit Master text styles</a:t>
             </a:r>
           </a:p>
           <a:p>
             <a:pPr lvl="1"/>
             <a:r>
-              <a:rPr lang="en-US" smtClean="0"/>
+              <a:rPr lang="en-US"/>
               <a:t>Second level</a:t>
             </a:r>
           </a:p>
           <a:p>
             <a:pPr lvl="2"/>
             <a:r>
-              <a:rPr lang="en-US" smtClean="0"/>
+              <a:rPr lang="en-US"/>
               <a:t>Third level</a:t>
             </a:r>
           </a:p>
           <a:p>
             <a:pPr lvl="3"/>
             <a:r>
-              <a:rPr lang="en-US" smtClean="0"/>
+              <a:rPr lang="en-US"/>
               <a:t>Fourth level</a:t>
             </a:r>
           </a:p>
           <a:p>
             <a:pPr lvl="4"/>
             <a:r>
-              <a:rPr lang="en-US" smtClean="0"/>
+              <a:rPr lang="en-US"/>
               <a:t>Fifth level</a:t>
             </a:r>
-            <a:endParaRPr lang="en-US"/>
           </a:p>
         </p:txBody>
       </p:sp>
@@ -470,7 +519,7 @@
           <a:p>
             <a:fld id="{5BCAD085-E8A6-8845-BD4E-CB4CCA059FC4}" type="datetimeFigureOut">
               <a:rPr lang="en-US" smtClean="0"/>
-              <a:t>1/27/13</a:t>
+              <a:t>4/29/2026</a:t>
             </a:fld>
             <a:endParaRPr lang="en-US"/>
           </a:p>
@@ -569,10 +618,9 @@
           <a:lstStyle/>
           <a:p>
             <a:r>
-              <a:rPr lang="en-US" smtClean="0"/>
+              <a:rPr lang="en-US"/>
               <a:t>Click to edit Master title style</a:t>
             </a:r>
-            <a:endParaRPr lang="en-US"/>
           </a:p>
         </p:txBody>
       </p:sp>
@@ -598,38 +646,37 @@
           <a:p>
             <a:pPr lvl="0"/>
             <a:r>
-              <a:rPr lang="en-US" smtClean="0"/>
+              <a:rPr lang="en-US"/>
               <a:t>Click to edit Master text styles</a:t>
             </a:r>
           </a:p>
           <a:p>
             <a:pPr lvl="1"/>
             <a:r>
-              <a:rPr lang="en-US" smtClean="0"/>
+              <a:rPr lang="en-US"/>
               <a:t>Second level</a:t>
             </a:r>
           </a:p>
           <a:p>
             <a:pPr lvl="2"/>
             <a:r>
-              <a:rPr lang="en-US" smtClean="0"/>
+              <a:rPr lang="en-US"/>
               <a:t>Third level</a:t>
             </a:r>
           </a:p>
           <a:p>
             <a:pPr lvl="3"/>
             <a:r>
-              <a:rPr lang="en-US" smtClean="0"/>
+              <a:rPr lang="en-US"/>
               <a:t>Fourth level</a:t>
             </a:r>
           </a:p>
           <a:p>
             <a:pPr lvl="4"/>
             <a:r>
-              <a:rPr lang="en-US" smtClean="0"/>
+              <a:rPr lang="en-US"/>
               <a:t>Fifth level</a:t>
             </a:r>
-            <a:endParaRPr lang="en-US"/>
           </a:p>
         </p:txBody>
       </p:sp>
@@ -650,7 +697,7 @@
           <a:p>
             <a:fld id="{5BCAD085-E8A6-8845-BD4E-CB4CCA059FC4}" type="datetimeFigureOut">
               <a:rPr lang="en-US" smtClean="0"/>
-              <a:t>1/27/13</a:t>
+              <a:t>4/29/2026</a:t>
             </a:fld>
             <a:endParaRPr lang="en-US"/>
           </a:p>
@@ -744,10 +791,9 @@
           <a:lstStyle/>
           <a:p>
             <a:r>
-              <a:rPr lang="en-US" smtClean="0"/>
+              <a:rPr lang="en-US"/>
               <a:t>Click to edit Master title style</a:t>
             </a:r>
-            <a:endParaRPr lang="en-US"/>
           </a:p>
         </p:txBody>
       </p:sp>
@@ -768,38 +814,37 @@
           <a:p>
             <a:pPr lvl="0"/>
             <a:r>
-              <a:rPr lang="en-US" smtClean="0"/>
+              <a:rPr lang="en-US"/>
               <a:t>Click to edit Master text styles</a:t>
             </a:r>
           </a:p>
           <a:p>
             <a:pPr lvl="1"/>
             <a:r>
-              <a:rPr lang="en-US" smtClean="0"/>
+              <a:rPr lang="en-US"/>
               <a:t>Second level</a:t>
             </a:r>
           </a:p>
           <a:p>
             <a:pPr lvl="2"/>
             <a:r>
-              <a:rPr lang="en-US" smtClean="0"/>
+              <a:rPr lang="en-US"/>
               <a:t>Third level</a:t>
             </a:r>
           </a:p>
           <a:p>
             <a:pPr lvl="3"/>
             <a:r>
-              <a:rPr lang="en-US" smtClean="0"/>
+              <a:rPr lang="en-US"/>
               <a:t>Fourth level</a:t>
             </a:r>
           </a:p>
           <a:p>
             <a:pPr lvl="4"/>
             <a:r>
-              <a:rPr lang="en-US" smtClean="0"/>
+              <a:rPr lang="en-US"/>
               <a:t>Fifth level</a:t>
             </a:r>
-            <a:endParaRPr lang="en-US"/>
           </a:p>
         </p:txBody>
       </p:sp>
@@ -820,7 +865,7 @@
           <a:p>
             <a:fld id="{5BCAD085-E8A6-8845-BD4E-CB4CCA059FC4}" type="datetimeFigureOut">
               <a:rPr lang="en-US" smtClean="0"/>
-              <a:t>1/27/13</a:t>
+              <a:t>4/29/2026</a:t>
             </a:fld>
             <a:endParaRPr lang="en-US"/>
           </a:p>
@@ -923,10 +968,9 @@
           </a:lstStyle>
           <a:p>
             <a:r>
-              <a:rPr lang="en-US" smtClean="0"/>
+              <a:rPr lang="en-US"/>
               <a:t>Click to edit Master title style</a:t>
             </a:r>
-            <a:endParaRPr lang="en-US"/>
           </a:p>
         </p:txBody>
       </p:sp>
@@ -1043,7 +1087,7 @@
           <a:p>
             <a:pPr lvl="0"/>
             <a:r>
-              <a:rPr lang="en-US" smtClean="0"/>
+              <a:rPr lang="en-US"/>
               <a:t>Click to edit Master text styles</a:t>
             </a:r>
           </a:p>
@@ -1066,7 +1110,7 @@
           <a:p>
             <a:fld id="{5BCAD085-E8A6-8845-BD4E-CB4CCA059FC4}" type="datetimeFigureOut">
               <a:rPr lang="en-US" smtClean="0"/>
-              <a:t>1/27/13</a:t>
+              <a:t>4/29/2026</a:t>
             </a:fld>
             <a:endParaRPr lang="en-US"/>
           </a:p>
@@ -1160,10 +1204,9 @@
           <a:lstStyle/>
           <a:p>
             <a:r>
-              <a:rPr lang="en-US" smtClean="0"/>
+              <a:rPr lang="en-US"/>
               <a:t>Click to edit Master title style</a:t>
             </a:r>
-            <a:endParaRPr lang="en-US"/>
           </a:p>
         </p:txBody>
       </p:sp>
@@ -1217,38 +1260,37 @@
           <a:p>
             <a:pPr lvl="0"/>
             <a:r>
-              <a:rPr lang="en-US" smtClean="0"/>
+              <a:rPr lang="en-US"/>
               <a:t>Click to edit Master text styles</a:t>
             </a:r>
           </a:p>
           <a:p>
             <a:pPr lvl="1"/>
             <a:r>
-              <a:rPr lang="en-US" smtClean="0"/>
+              <a:rPr lang="en-US"/>
               <a:t>Second level</a:t>
             </a:r>
           </a:p>
           <a:p>
             <a:pPr lvl="2"/>
             <a:r>
-              <a:rPr lang="en-US" smtClean="0"/>
+              <a:rPr lang="en-US"/>
               <a:t>Third level</a:t>
             </a:r>
           </a:p>
           <a:p>
             <a:pPr lvl="3"/>
             <a:r>
-              <a:rPr lang="en-US" smtClean="0"/>
+              <a:rPr lang="en-US"/>
               <a:t>Fourth level</a:t>
             </a:r>
           </a:p>
           <a:p>
             <a:pPr lvl="4"/>
             <a:r>
-              <a:rPr lang="en-US" smtClean="0"/>
+              <a:rPr lang="en-US"/>
               <a:t>Fifth level</a:t>
             </a:r>
-            <a:endParaRPr lang="en-US"/>
           </a:p>
         </p:txBody>
       </p:sp>
@@ -1302,38 +1344,37 @@
           <a:p>
             <a:pPr lvl="0"/>
             <a:r>
-              <a:rPr lang="en-US" smtClean="0"/>
+              <a:rPr lang="en-US"/>
               <a:t>Click to edit Master text styles</a:t>
             </a:r>
           </a:p>
           <a:p>
             <a:pPr lvl="1"/>
             <a:r>
-              <a:rPr lang="en-US" smtClean="0"/>
+              <a:rPr lang="en-US"/>
               <a:t>Second level</a:t>
             </a:r>
           </a:p>
           <a:p>
             <a:pPr lvl="2"/>
             <a:r>
-              <a:rPr lang="en-US" smtClean="0"/>
+              <a:rPr lang="en-US"/>
               <a:t>Third level</a:t>
             </a:r>
           </a:p>
           <a:p>
             <a:pPr lvl="3"/>
             <a:r>
-              <a:rPr lang="en-US" smtClean="0"/>
+              <a:rPr lang="en-US"/>
               <a:t>Fourth level</a:t>
             </a:r>
           </a:p>
           <a:p>
             <a:pPr lvl="4"/>
             <a:r>
-              <a:rPr lang="en-US" smtClean="0"/>
+              <a:rPr lang="en-US"/>
               <a:t>Fifth level</a:t>
             </a:r>
-            <a:endParaRPr lang="en-US"/>
           </a:p>
         </p:txBody>
       </p:sp>
@@ -1354,7 +1395,7 @@
           <a:p>
             <a:fld id="{5BCAD085-E8A6-8845-BD4E-CB4CCA059FC4}" type="datetimeFigureOut">
               <a:rPr lang="en-US" smtClean="0"/>
-              <a:t>1/27/13</a:t>
+              <a:t>4/29/2026</a:t>
             </a:fld>
             <a:endParaRPr lang="en-US"/>
           </a:p>
@@ -1452,10 +1493,9 @@
           </a:lstStyle>
           <a:p>
             <a:r>
-              <a:rPr lang="en-US" smtClean="0"/>
+              <a:rPr lang="en-US"/>
               <a:t>Click to edit Master title style</a:t>
             </a:r>
-            <a:endParaRPr lang="en-US"/>
           </a:p>
         </p:txBody>
       </p:sp>
@@ -1518,7 +1558,7 @@
           <a:p>
             <a:pPr lvl="0"/>
             <a:r>
-              <a:rPr lang="en-US" smtClean="0"/>
+              <a:rPr lang="en-US"/>
               <a:t>Click to edit Master text styles</a:t>
             </a:r>
           </a:p>
@@ -1574,38 +1614,37 @@
           <a:p>
             <a:pPr lvl="0"/>
             <a:r>
-              <a:rPr lang="en-US" smtClean="0"/>
+              <a:rPr lang="en-US"/>
               <a:t>Click to edit Master text styles</a:t>
             </a:r>
           </a:p>
           <a:p>
             <a:pPr lvl="1"/>
             <a:r>
-              <a:rPr lang="en-US" smtClean="0"/>
+              <a:rPr lang="en-US"/>
               <a:t>Second level</a:t>
             </a:r>
           </a:p>
           <a:p>
             <a:pPr lvl="2"/>
             <a:r>
-              <a:rPr lang="en-US" smtClean="0"/>
+              <a:rPr lang="en-US"/>
               <a:t>Third level</a:t>
             </a:r>
           </a:p>
           <a:p>
             <a:pPr lvl="3"/>
             <a:r>
-              <a:rPr lang="en-US" smtClean="0"/>
+              <a:rPr lang="en-US"/>
               <a:t>Fourth level</a:t>
             </a:r>
           </a:p>
           <a:p>
             <a:pPr lvl="4"/>
             <a:r>
-              <a:rPr lang="en-US" smtClean="0"/>
+              <a:rPr lang="en-US"/>
               <a:t>Fifth level</a:t>
             </a:r>
-            <a:endParaRPr lang="en-US"/>
           </a:p>
         </p:txBody>
       </p:sp>
@@ -1668,7 +1707,7 @@
           <a:p>
             <a:pPr lvl="0"/>
             <a:r>
-              <a:rPr lang="en-US" smtClean="0"/>
+              <a:rPr lang="en-US"/>
               <a:t>Click to edit Master text styles</a:t>
             </a:r>
           </a:p>
@@ -1724,38 +1763,37 @@
           <a:p>
             <a:pPr lvl="0"/>
             <a:r>
-              <a:rPr lang="en-US" smtClean="0"/>
+              <a:rPr lang="en-US"/>
               <a:t>Click to edit Master text styles</a:t>
             </a:r>
           </a:p>
           <a:p>
             <a:pPr lvl="1"/>
             <a:r>
-              <a:rPr lang="en-US" smtClean="0"/>
+              <a:rPr lang="en-US"/>
               <a:t>Second level</a:t>
             </a:r>
           </a:p>
           <a:p>
             <a:pPr lvl="2"/>
             <a:r>
-              <a:rPr lang="en-US" smtClean="0"/>
+              <a:rPr lang="en-US"/>
               <a:t>Third level</a:t>
             </a:r>
           </a:p>
           <a:p>
             <a:pPr lvl="3"/>
             <a:r>
-              <a:rPr lang="en-US" smtClean="0"/>
+              <a:rPr lang="en-US"/>
               <a:t>Fourth level</a:t>
             </a:r>
           </a:p>
           <a:p>
             <a:pPr lvl="4"/>
             <a:r>
-              <a:rPr lang="en-US" smtClean="0"/>
+              <a:rPr lang="en-US"/>
               <a:t>Fifth level</a:t>
             </a:r>
-            <a:endParaRPr lang="en-US"/>
           </a:p>
         </p:txBody>
       </p:sp>
@@ -1776,7 +1814,7 @@
           <a:p>
             <a:fld id="{5BCAD085-E8A6-8845-BD4E-CB4CCA059FC4}" type="datetimeFigureOut">
               <a:rPr lang="en-US" smtClean="0"/>
-              <a:t>1/27/13</a:t>
+              <a:t>4/29/2026</a:t>
             </a:fld>
             <a:endParaRPr lang="en-US"/>
           </a:p>
@@ -1870,10 +1908,9 @@
           <a:lstStyle/>
           <a:p>
             <a:r>
-              <a:rPr lang="en-US" smtClean="0"/>
+              <a:rPr lang="en-US"/>
               <a:t>Click to edit Master title style</a:t>
             </a:r>
-            <a:endParaRPr lang="en-US"/>
           </a:p>
         </p:txBody>
       </p:sp>
@@ -1894,7 +1931,7 @@
           <a:p>
             <a:fld id="{5BCAD085-E8A6-8845-BD4E-CB4CCA059FC4}" type="datetimeFigureOut">
               <a:rPr lang="en-US" smtClean="0"/>
-              <a:t>1/27/13</a:t>
+              <a:t>4/29/2026</a:t>
             </a:fld>
             <a:endParaRPr lang="en-US"/>
           </a:p>
@@ -1989,7 +2026,7 @@
           <a:p>
             <a:fld id="{5BCAD085-E8A6-8845-BD4E-CB4CCA059FC4}" type="datetimeFigureOut">
               <a:rPr lang="en-US" smtClean="0"/>
-              <a:t>1/27/13</a:t>
+              <a:t>4/29/2026</a:t>
             </a:fld>
             <a:endParaRPr lang="en-US"/>
           </a:p>
@@ -2092,10 +2129,9 @@
           </a:lstStyle>
           <a:p>
             <a:r>
-              <a:rPr lang="en-US" smtClean="0"/>
+              <a:rPr lang="en-US"/>
               <a:t>Click to edit Master title style</a:t>
             </a:r>
-            <a:endParaRPr lang="en-US"/>
           </a:p>
         </p:txBody>
       </p:sp>
@@ -2149,38 +2185,37 @@
           <a:p>
             <a:pPr lvl="0"/>
             <a:r>
-              <a:rPr lang="en-US" smtClean="0"/>
+              <a:rPr lang="en-US"/>
               <a:t>Click to edit Master text styles</a:t>
             </a:r>
           </a:p>
           <a:p>
             <a:pPr lvl="1"/>
             <a:r>
-              <a:rPr lang="en-US" smtClean="0"/>
+              <a:rPr lang="en-US"/>
               <a:t>Second level</a:t>
             </a:r>
           </a:p>
           <a:p>
             <a:pPr lvl="2"/>
             <a:r>
-              <a:rPr lang="en-US" smtClean="0"/>
+              <a:rPr lang="en-US"/>
               <a:t>Third level</a:t>
             </a:r>
           </a:p>
           <a:p>
             <a:pPr lvl="3"/>
             <a:r>
-              <a:rPr lang="en-US" smtClean="0"/>
+              <a:rPr lang="en-US"/>
               <a:t>Fourth level</a:t>
             </a:r>
           </a:p>
           <a:p>
             <a:pPr lvl="4"/>
             <a:r>
-              <a:rPr lang="en-US" smtClean="0"/>
+              <a:rPr lang="en-US"/>
               <a:t>Fifth level</a:t>
             </a:r>
-            <a:endParaRPr lang="en-US"/>
           </a:p>
         </p:txBody>
       </p:sp>
@@ -2243,7 +2278,7 @@
           <a:p>
             <a:pPr lvl="0"/>
             <a:r>
-              <a:rPr lang="en-US" smtClean="0"/>
+              <a:rPr lang="en-US"/>
               <a:t>Click to edit Master text styles</a:t>
             </a:r>
           </a:p>
@@ -2266,7 +2301,7 @@
           <a:p>
             <a:fld id="{5BCAD085-E8A6-8845-BD4E-CB4CCA059FC4}" type="datetimeFigureOut">
               <a:rPr lang="en-US" smtClean="0"/>
-              <a:t>1/27/13</a:t>
+              <a:t>4/29/2026</a:t>
             </a:fld>
             <a:endParaRPr lang="en-US"/>
           </a:p>
@@ -2369,10 +2404,9 @@
           </a:lstStyle>
           <a:p>
             <a:r>
-              <a:rPr lang="en-US" smtClean="0"/>
+              <a:rPr lang="en-US"/>
               <a:t>Click to edit Master title style</a:t>
             </a:r>
-            <a:endParaRPr lang="en-US"/>
           </a:p>
         </p:txBody>
       </p:sp>
@@ -2496,7 +2530,7 @@
           <a:p>
             <a:pPr lvl="0"/>
             <a:r>
-              <a:rPr lang="en-US" smtClean="0"/>
+              <a:rPr lang="en-US"/>
               <a:t>Click to edit Master text styles</a:t>
             </a:r>
           </a:p>
@@ -2519,7 +2553,7 @@
           <a:p>
             <a:fld id="{5BCAD085-E8A6-8845-BD4E-CB4CCA059FC4}" type="datetimeFigureOut">
               <a:rPr lang="en-US" smtClean="0"/>
-              <a:t>1/27/13</a:t>
+              <a:t>4/29/2026</a:t>
             </a:fld>
             <a:endParaRPr lang="en-US"/>
           </a:p>
@@ -2628,10 +2662,9 @@
           <a:lstStyle/>
           <a:p>
             <a:r>
-              <a:rPr lang="en-US" smtClean="0"/>
+              <a:rPr lang="en-US"/>
               <a:t>Click to edit Master title style</a:t>
             </a:r>
-            <a:endParaRPr lang="en-US"/>
           </a:p>
         </p:txBody>
       </p:sp>
@@ -2662,38 +2695,37 @@
           <a:p>
             <a:pPr lvl="0"/>
             <a:r>
-              <a:rPr lang="en-US" smtClean="0"/>
+              <a:rPr lang="en-US"/>
               <a:t>Click to edit Master text styles</a:t>
             </a:r>
           </a:p>
           <a:p>
             <a:pPr lvl="1"/>
             <a:r>
-              <a:rPr lang="en-US" smtClean="0"/>
+              <a:rPr lang="en-US"/>
               <a:t>Second level</a:t>
             </a:r>
           </a:p>
           <a:p>
             <a:pPr lvl="2"/>
             <a:r>
-              <a:rPr lang="en-US" smtClean="0"/>
+              <a:rPr lang="en-US"/>
               <a:t>Third level</a:t>
             </a:r>
           </a:p>
           <a:p>
             <a:pPr lvl="3"/>
             <a:r>
-              <a:rPr lang="en-US" smtClean="0"/>
+              <a:rPr lang="en-US"/>
               <a:t>Fourth level</a:t>
             </a:r>
           </a:p>
           <a:p>
             <a:pPr lvl="4"/>
             <a:r>
-              <a:rPr lang="en-US" smtClean="0"/>
+              <a:rPr lang="en-US"/>
               <a:t>Fifth level</a:t>
             </a:r>
-            <a:endParaRPr lang="en-US"/>
           </a:p>
         </p:txBody>
       </p:sp>
@@ -2732,7 +2764,7 @@
           <a:p>
             <a:fld id="{5BCAD085-E8A6-8845-BD4E-CB4CCA059FC4}" type="datetimeFigureOut">
               <a:rPr lang="en-US" smtClean="0"/>
-              <a:t>1/27/13</a:t>
+              <a:t>4/29/2026</a:t>
             </a:fld>
             <a:endParaRPr lang="en-US"/>
           </a:p>
@@ -3091,7 +3123,7 @@
 </file>
 
 <file path=ppt/slides/slide1.xml><?xml version="1.0" encoding="utf-8"?>
-<p:sld xmlns:a="http://schemas.openxmlformats.org/drawingml/2006/main" xmlns:p="http://schemas.openxmlformats.org/presentationml/2006/main" xmlns:r="http://schemas.openxmlformats.org/officeDocument/2006/relationships">
+<p:sld xmlns:a="http://schemas.openxmlformats.org/drawingml/2006/main" xmlns:r="http://schemas.openxmlformats.org/officeDocument/2006/relationships" xmlns:p="http://schemas.openxmlformats.org/presentationml/2006/main">
   <p:cSld>
     <p:spTree>
       <p:nvGrpSpPr>
@@ -3099,7 +3131,14 @@
         <p:cNvGrpSpPr/>
         <p:nvPr/>
       </p:nvGrpSpPr>
-      <p:grpSpPr/>
+      <p:grpSpPr>
+        <a:xfrm>
+          <a:off x="0" y="0"/>
+          <a:ext cx="0" cy="0"/>
+          <a:chOff x="0" y="0"/>
+          <a:chExt cx="0" cy="0"/>
+        </a:xfrm>
+      </p:grpSpPr>
       <p:sp>
         <p:nvSpPr>
           <p:cNvPr id="2" name="Rectangle 1"/>
@@ -3140,6 +3179,7 @@
           <a:lstStyle/>
           <a:p>
             <a:pPr algn="ctr"/>
+            <a:endParaRPr/>
           </a:p>
         </p:txBody>
       </p:sp>
@@ -3183,6 +3223,7 @@
           <a:lstStyle/>
           <a:p>
             <a:pPr algn="ctr"/>
+            <a:endParaRPr/>
           </a:p>
         </p:txBody>
       </p:sp>
@@ -3226,6 +3267,7 @@
           <a:lstStyle/>
           <a:p>
             <a:pPr algn="ctr"/>
+            <a:endParaRPr/>
           </a:p>
         </p:txBody>
       </p:sp>
@@ -3250,7 +3292,9 @@
             <a:spAutoFit/>
           </a:bodyPr>
           <a:lstStyle/>
-          <a:p/>
+          <a:p>
+            <a:endParaRPr/>
+          </a:p>
           <a:p>
             <a:pPr algn="ctr">
               <a:defRPr sz="2800" b="0" i="0">
@@ -3286,7 +3330,9 @@
             <a:spAutoFit/>
           </a:bodyPr>
           <a:lstStyle/>
-          <a:p/>
+          <a:p>
+            <a:endParaRPr/>
+          </a:p>
           <a:p>
             <a:pPr algn="ctr">
               <a:defRPr sz="4800" b="1" i="0">
@@ -3322,7 +3368,9 @@
             <a:spAutoFit/>
           </a:bodyPr>
           <a:lstStyle/>
-          <a:p/>
+          <a:p>
+            <a:endParaRPr/>
+          </a:p>
           <a:p>
             <a:pPr algn="ctr">
               <a:defRPr sz="2200" b="0" i="0">
@@ -3358,7 +3406,9 @@
             <a:spAutoFit/>
           </a:bodyPr>
           <a:lstStyle/>
-          <a:p/>
+          <a:p>
+            <a:endParaRPr/>
+          </a:p>
           <a:p>
             <a:pPr algn="ctr">
               <a:defRPr sz="2200" b="0" i="0">
@@ -3394,7 +3444,9 @@
             <a:spAutoFit/>
           </a:bodyPr>
           <a:lstStyle/>
-          <a:p/>
+          <a:p>
+            <a:endParaRPr/>
+          </a:p>
           <a:p>
             <a:pPr algn="ctr">
               <a:defRPr sz="1600" b="0" i="0">
@@ -3418,7 +3470,7 @@
 </file>
 
 <file path=ppt/slides/slide10.xml><?xml version="1.0" encoding="utf-8"?>
-<p:sld xmlns:a="http://schemas.openxmlformats.org/drawingml/2006/main" xmlns:p="http://schemas.openxmlformats.org/presentationml/2006/main" xmlns:r="http://schemas.openxmlformats.org/officeDocument/2006/relationships">
+<p:sld xmlns:a="http://schemas.openxmlformats.org/drawingml/2006/main" xmlns:r="http://schemas.openxmlformats.org/officeDocument/2006/relationships" xmlns:p="http://schemas.openxmlformats.org/presentationml/2006/main">
   <p:cSld>
     <p:spTree>
       <p:nvGrpSpPr>
@@ -3426,7 +3478,14 @@
         <p:cNvGrpSpPr/>
         <p:nvPr/>
       </p:nvGrpSpPr>
-      <p:grpSpPr/>
+      <p:grpSpPr>
+        <a:xfrm>
+          <a:off x="0" y="0"/>
+          <a:ext cx="0" cy="0"/>
+          <a:chOff x="0" y="0"/>
+          <a:chExt cx="0" cy="0"/>
+        </a:xfrm>
+      </p:grpSpPr>
       <p:sp>
         <p:nvSpPr>
           <p:cNvPr id="2" name="Rectangle 1"/>
@@ -3467,6 +3526,7 @@
           <a:lstStyle/>
           <a:p>
             <a:pPr algn="ctr"/>
+            <a:endParaRPr/>
           </a:p>
         </p:txBody>
       </p:sp>
@@ -3510,6 +3570,7 @@
           <a:lstStyle/>
           <a:p>
             <a:pPr algn="ctr"/>
+            <a:endParaRPr/>
           </a:p>
         </p:txBody>
       </p:sp>
@@ -3534,7 +3595,9 @@
             <a:spAutoFit/>
           </a:bodyPr>
           <a:lstStyle/>
-          <a:p/>
+          <a:p>
+            <a:endParaRPr/>
+          </a:p>
           <a:p>
             <a:pPr>
               <a:defRPr sz="2800" b="1">
@@ -3589,6 +3652,7 @@
           <a:lstStyle/>
           <a:p>
             <a:pPr algn="ctr"/>
+            <a:endParaRPr/>
           </a:p>
         </p:txBody>
       </p:sp>
@@ -3613,7 +3677,9 @@
             <a:spAutoFit/>
           </a:bodyPr>
           <a:lstStyle/>
-          <a:p/>
+          <a:p>
+            <a:endParaRPr/>
+          </a:p>
           <a:p>
             <a:pPr>
               <a:defRPr sz="1600" b="1">
@@ -3758,6 +3824,7 @@
           <a:lstStyle/>
           <a:p>
             <a:pPr algn="ctr"/>
+            <a:endParaRPr/>
           </a:p>
         </p:txBody>
       </p:sp>
@@ -3782,7 +3849,9 @@
             <a:spAutoFit/>
           </a:bodyPr>
           <a:lstStyle/>
-          <a:p/>
+          <a:p>
+            <a:endParaRPr/>
+          </a:p>
           <a:p>
             <a:pPr>
               <a:defRPr sz="1600" b="1">
@@ -3912,6 +3981,7 @@
           <a:lstStyle/>
           <a:p>
             <a:pPr algn="ctr"/>
+            <a:endParaRPr/>
           </a:p>
         </p:txBody>
       </p:sp>
@@ -3936,7 +4006,9 @@
             <a:spAutoFit/>
           </a:bodyPr>
           <a:lstStyle/>
-          <a:p/>
+          <a:p>
+            <a:endParaRPr/>
+          </a:p>
           <a:p>
             <a:pPr algn="l">
               <a:defRPr sz="1400" b="1" i="0">
@@ -3960,7 +4032,7 @@
 </file>
 
 <file path=ppt/slides/slide11.xml><?xml version="1.0" encoding="utf-8"?>
-<p:sld xmlns:a="http://schemas.openxmlformats.org/drawingml/2006/main" xmlns:p="http://schemas.openxmlformats.org/presentationml/2006/main" xmlns:r="http://schemas.openxmlformats.org/officeDocument/2006/relationships">
+<p:sld xmlns:a="http://schemas.openxmlformats.org/drawingml/2006/main" xmlns:r="http://schemas.openxmlformats.org/officeDocument/2006/relationships" xmlns:p="http://schemas.openxmlformats.org/presentationml/2006/main">
   <p:cSld>
     <p:spTree>
       <p:nvGrpSpPr>
@@ -3968,7 +4040,14 @@
         <p:cNvGrpSpPr/>
         <p:nvPr/>
       </p:nvGrpSpPr>
-      <p:grpSpPr/>
+      <p:grpSpPr>
+        <a:xfrm>
+          <a:off x="0" y="0"/>
+          <a:ext cx="0" cy="0"/>
+          <a:chOff x="0" y="0"/>
+          <a:chExt cx="0" cy="0"/>
+        </a:xfrm>
+      </p:grpSpPr>
       <p:sp>
         <p:nvSpPr>
           <p:cNvPr id="2" name="Rectangle 1"/>
@@ -4009,6 +4088,7 @@
           <a:lstStyle/>
           <a:p>
             <a:pPr algn="ctr"/>
+            <a:endParaRPr/>
           </a:p>
         </p:txBody>
       </p:sp>
@@ -4052,6 +4132,7 @@
           <a:lstStyle/>
           <a:p>
             <a:pPr algn="ctr"/>
+            <a:endParaRPr/>
           </a:p>
         </p:txBody>
       </p:sp>
@@ -4076,7 +4157,9 @@
             <a:spAutoFit/>
           </a:bodyPr>
           <a:lstStyle/>
-          <a:p/>
+          <a:p>
+            <a:endParaRPr/>
+          </a:p>
           <a:p>
             <a:pPr>
               <a:defRPr sz="2800" b="1">
@@ -4131,6 +4214,7 @@
           <a:lstStyle/>
           <a:p>
             <a:pPr algn="ctr"/>
+            <a:endParaRPr/>
           </a:p>
         </p:txBody>
       </p:sp>
@@ -4155,7 +4239,9 @@
             <a:spAutoFit/>
           </a:bodyPr>
           <a:lstStyle/>
-          <a:p/>
+          <a:p>
+            <a:endParaRPr/>
+          </a:p>
           <a:p>
             <a:pPr algn="ctr">
               <a:defRPr sz="1300" b="1">
@@ -4222,6 +4308,7 @@
           <a:lstStyle/>
           <a:p>
             <a:pPr algn="ctr"/>
+            <a:endParaRPr/>
           </a:p>
         </p:txBody>
       </p:sp>
@@ -4246,7 +4333,9 @@
             <a:spAutoFit/>
           </a:bodyPr>
           <a:lstStyle/>
-          <a:p/>
+          <a:p>
+            <a:endParaRPr/>
+          </a:p>
           <a:p>
             <a:pPr>
               <a:defRPr sz="1400">
@@ -4301,6 +4390,7 @@
           <a:lstStyle/>
           <a:p>
             <a:pPr algn="ctr"/>
+            <a:endParaRPr/>
           </a:p>
         </p:txBody>
       </p:sp>
@@ -4325,7 +4415,9 @@
             <a:spAutoFit/>
           </a:bodyPr>
           <a:lstStyle/>
-          <a:p/>
+          <a:p>
+            <a:endParaRPr/>
+          </a:p>
           <a:p>
             <a:pPr algn="ctr">
               <a:defRPr sz="1300" b="1">
@@ -4392,6 +4484,7 @@
           <a:lstStyle/>
           <a:p>
             <a:pPr algn="ctr"/>
+            <a:endParaRPr/>
           </a:p>
         </p:txBody>
       </p:sp>
@@ -4416,7 +4509,9 @@
             <a:spAutoFit/>
           </a:bodyPr>
           <a:lstStyle/>
-          <a:p/>
+          <a:p>
+            <a:endParaRPr/>
+          </a:p>
           <a:p>
             <a:pPr>
               <a:defRPr sz="1400">
@@ -4471,6 +4566,7 @@
           <a:lstStyle/>
           <a:p>
             <a:pPr algn="ctr"/>
+            <a:endParaRPr/>
           </a:p>
         </p:txBody>
       </p:sp>
@@ -4495,7 +4591,9 @@
             <a:spAutoFit/>
           </a:bodyPr>
           <a:lstStyle/>
-          <a:p/>
+          <a:p>
+            <a:endParaRPr/>
+          </a:p>
           <a:p>
             <a:pPr algn="ctr">
               <a:defRPr sz="1300" b="1">
@@ -4562,6 +4660,7 @@
           <a:lstStyle/>
           <a:p>
             <a:pPr algn="ctr"/>
+            <a:endParaRPr/>
           </a:p>
         </p:txBody>
       </p:sp>
@@ -4586,7 +4685,9 @@
             <a:spAutoFit/>
           </a:bodyPr>
           <a:lstStyle/>
-          <a:p/>
+          <a:p>
+            <a:endParaRPr/>
+          </a:p>
           <a:p>
             <a:pPr>
               <a:defRPr sz="1400">
@@ -4641,6 +4742,7 @@
           <a:lstStyle/>
           <a:p>
             <a:pPr algn="ctr"/>
+            <a:endParaRPr/>
           </a:p>
         </p:txBody>
       </p:sp>
@@ -4665,7 +4767,9 @@
             <a:spAutoFit/>
           </a:bodyPr>
           <a:lstStyle/>
-          <a:p/>
+          <a:p>
+            <a:endParaRPr/>
+          </a:p>
           <a:p>
             <a:pPr algn="ctr">
               <a:defRPr sz="1300" b="1">
@@ -4732,6 +4836,7 @@
           <a:lstStyle/>
           <a:p>
             <a:pPr algn="ctr"/>
+            <a:endParaRPr/>
           </a:p>
         </p:txBody>
       </p:sp>
@@ -4756,7 +4861,9 @@
             <a:spAutoFit/>
           </a:bodyPr>
           <a:lstStyle/>
-          <a:p/>
+          <a:p>
+            <a:endParaRPr/>
+          </a:p>
           <a:p>
             <a:pPr>
               <a:defRPr sz="1400">
@@ -4780,7 +4887,7 @@
 </file>
 
 <file path=ppt/slides/slide12.xml><?xml version="1.0" encoding="utf-8"?>
-<p:sld xmlns:a="http://schemas.openxmlformats.org/drawingml/2006/main" xmlns:p="http://schemas.openxmlformats.org/presentationml/2006/main" xmlns:r="http://schemas.openxmlformats.org/officeDocument/2006/relationships">
+<p:sld xmlns:a="http://schemas.openxmlformats.org/drawingml/2006/main" xmlns:r="http://schemas.openxmlformats.org/officeDocument/2006/relationships" xmlns:p="http://schemas.openxmlformats.org/presentationml/2006/main">
   <p:cSld>
     <p:spTree>
       <p:nvGrpSpPr>
@@ -4788,7 +4895,14 @@
         <p:cNvGrpSpPr/>
         <p:nvPr/>
       </p:nvGrpSpPr>
-      <p:grpSpPr/>
+      <p:grpSpPr>
+        <a:xfrm>
+          <a:off x="0" y="0"/>
+          <a:ext cx="0" cy="0"/>
+          <a:chOff x="0" y="0"/>
+          <a:chExt cx="0" cy="0"/>
+        </a:xfrm>
+      </p:grpSpPr>
       <p:sp>
         <p:nvSpPr>
           <p:cNvPr id="2" name="Rectangle 1"/>
@@ -4829,6 +4943,7 @@
           <a:lstStyle/>
           <a:p>
             <a:pPr algn="ctr"/>
+            <a:endParaRPr/>
           </a:p>
         </p:txBody>
       </p:sp>
@@ -4872,6 +4987,7 @@
           <a:lstStyle/>
           <a:p>
             <a:pPr algn="ctr"/>
+            <a:endParaRPr/>
           </a:p>
         </p:txBody>
       </p:sp>
@@ -4896,7 +5012,9 @@
             <a:spAutoFit/>
           </a:bodyPr>
           <a:lstStyle/>
-          <a:p/>
+          <a:p>
+            <a:endParaRPr/>
+          </a:p>
           <a:p>
             <a:pPr algn="l">
               <a:defRPr sz="2800" b="1" i="0">
@@ -4932,7 +5050,9 @@
             <a:spAutoFit/>
           </a:bodyPr>
           <a:lstStyle/>
-          <a:p/>
+          <a:p>
+            <a:endParaRPr/>
+          </a:p>
           <a:p>
             <a:pPr>
               <a:spcBef>
@@ -5065,6 +5185,7 @@
           <a:lstStyle/>
           <a:p>
             <a:pPr algn="ctr"/>
+            <a:endParaRPr/>
           </a:p>
         </p:txBody>
       </p:sp>
@@ -5089,7 +5210,9 @@
             <a:spAutoFit/>
           </a:bodyPr>
           <a:lstStyle/>
-          <a:p/>
+          <a:p>
+            <a:endParaRPr/>
+          </a:p>
           <a:p>
             <a:pPr algn="ctr">
               <a:defRPr sz="1800" b="1" i="0">
@@ -5125,7 +5248,9 @@
             <a:spAutoFit/>
           </a:bodyPr>
           <a:lstStyle/>
-          <a:p/>
+          <a:p>
+            <a:endParaRPr/>
+          </a:p>
           <a:p>
             <a:pPr algn="ctr">
               <a:defRPr sz="1600" b="0" i="0">
@@ -5149,7 +5274,7 @@
 </file>
 
 <file path=ppt/slides/slide13.xml><?xml version="1.0" encoding="utf-8"?>
-<p:sld xmlns:a="http://schemas.openxmlformats.org/drawingml/2006/main" xmlns:p="http://schemas.openxmlformats.org/presentationml/2006/main" xmlns:r="http://schemas.openxmlformats.org/officeDocument/2006/relationships">
+<p:sld xmlns:a="http://schemas.openxmlformats.org/drawingml/2006/main" xmlns:r="http://schemas.openxmlformats.org/officeDocument/2006/relationships" xmlns:p="http://schemas.openxmlformats.org/presentationml/2006/main">
   <p:cSld>
     <p:spTree>
       <p:nvGrpSpPr>
@@ -5157,7 +5282,14 @@
         <p:cNvGrpSpPr/>
         <p:nvPr/>
       </p:nvGrpSpPr>
-      <p:grpSpPr/>
+      <p:grpSpPr>
+        <a:xfrm>
+          <a:off x="0" y="0"/>
+          <a:ext cx="0" cy="0"/>
+          <a:chOff x="0" y="0"/>
+          <a:chExt cx="0" cy="0"/>
+        </a:xfrm>
+      </p:grpSpPr>
       <p:sp>
         <p:nvSpPr>
           <p:cNvPr id="2" name="Rectangle 1"/>
@@ -5198,6 +5330,7 @@
           <a:lstStyle/>
           <a:p>
             <a:pPr algn="ctr"/>
+            <a:endParaRPr/>
           </a:p>
         </p:txBody>
       </p:sp>
@@ -5241,6 +5374,7 @@
           <a:lstStyle/>
           <a:p>
             <a:pPr algn="ctr"/>
+            <a:endParaRPr/>
           </a:p>
         </p:txBody>
       </p:sp>
@@ -5284,6 +5418,7 @@
           <a:lstStyle/>
           <a:p>
             <a:pPr algn="ctr"/>
+            <a:endParaRPr/>
           </a:p>
         </p:txBody>
       </p:sp>
@@ -5308,7 +5443,9 @@
             <a:spAutoFit/>
           </a:bodyPr>
           <a:lstStyle/>
-          <a:p/>
+          <a:p>
+            <a:endParaRPr/>
+          </a:p>
           <a:p>
             <a:pPr algn="l">
               <a:defRPr sz="2600" b="1" i="0">
@@ -5363,6 +5500,7 @@
           <a:lstStyle/>
           <a:p>
             <a:pPr algn="ctr"/>
+            <a:endParaRPr/>
           </a:p>
         </p:txBody>
       </p:sp>
@@ -5375,7 +5513,7 @@
         <p:spPr>
           <a:xfrm>
             <a:off x="457200" y="1078992"/>
-            <a:ext cx="5303520" cy="365760"/>
+            <a:ext cx="902811" cy="307777"/>
           </a:xfrm>
           <a:prstGeom prst="rect">
             <a:avLst/>
@@ -5387,7 +5525,6 @@
             <a:spAutoFit/>
           </a:bodyPr>
           <a:lstStyle/>
-          <a:p/>
           <a:p>
             <a:pPr>
               <a:defRPr sz="1400" b="1">
@@ -5397,8 +5534,10 @@
               </a:defRPr>
             </a:pPr>
             <a:r>
+              <a:rPr dirty="0" err="1"/>
               <a:t>試験公式</a:t>
             </a:r>
+            <a:endParaRPr dirty="0"/>
           </a:p>
         </p:txBody>
       </p:sp>
@@ -5442,6 +5581,7 @@
           <a:lstStyle/>
           <a:p>
             <a:pPr algn="ctr"/>
+            <a:endParaRPr/>
           </a:p>
         </p:txBody>
       </p:sp>
@@ -5532,6 +5672,7 @@
           <a:lstStyle/>
           <a:p>
             <a:pPr algn="ctr"/>
+            <a:endParaRPr/>
           </a:p>
         </p:txBody>
       </p:sp>
@@ -5622,6 +5763,7 @@
           <a:lstStyle/>
           <a:p>
             <a:pPr algn="ctr"/>
+            <a:endParaRPr/>
           </a:p>
         </p:txBody>
       </p:sp>
@@ -5712,6 +5854,7 @@
           <a:lstStyle/>
           <a:p>
             <a:pPr algn="ctr"/>
+            <a:endParaRPr/>
           </a:p>
         </p:txBody>
       </p:sp>
@@ -5802,6 +5945,7 @@
           <a:lstStyle/>
           <a:p>
             <a:pPr algn="ctr"/>
+            <a:endParaRPr/>
           </a:p>
         </p:txBody>
       </p:sp>
@@ -5892,6 +6036,7 @@
           <a:lstStyle/>
           <a:p>
             <a:pPr algn="ctr"/>
+            <a:endParaRPr/>
           </a:p>
         </p:txBody>
       </p:sp>
@@ -5904,7 +6049,7 @@
         <p:spPr>
           <a:xfrm>
             <a:off x="6400800" y="1078992"/>
-            <a:ext cx="5303520" cy="365760"/>
+            <a:ext cx="1980029" cy="307777"/>
           </a:xfrm>
           <a:prstGeom prst="rect">
             <a:avLst/>
@@ -5916,7 +6061,6 @@
             <a:spAutoFit/>
           </a:bodyPr>
           <a:lstStyle/>
-          <a:p/>
           <a:p>
             <a:pPr>
               <a:defRPr sz="1400" b="1">
@@ -5926,7 +6070,12 @@
               </a:defRPr>
             </a:pPr>
             <a:r>
-              <a:t>学習リソース（公式）</a:t>
+              <a:rPr dirty="0" err="1"/>
+              <a:t>学習リソース（公式</a:t>
+            </a:r>
+            <a:r>
+              <a:rPr dirty="0"/>
+              <a:t>）</a:t>
             </a:r>
           </a:p>
         </p:txBody>
@@ -5971,6 +6120,7 @@
           <a:lstStyle/>
           <a:p>
             <a:pPr algn="ctr"/>
+            <a:endParaRPr/>
           </a:p>
         </p:txBody>
       </p:sp>
@@ -6061,6 +6211,7 @@
           <a:lstStyle/>
           <a:p>
             <a:pPr algn="ctr"/>
+            <a:endParaRPr/>
           </a:p>
         </p:txBody>
       </p:sp>
@@ -6151,6 +6302,7 @@
           <a:lstStyle/>
           <a:p>
             <a:pPr algn="ctr"/>
+            <a:endParaRPr/>
           </a:p>
         </p:txBody>
       </p:sp>
@@ -6241,6 +6393,7 @@
           <a:lstStyle/>
           <a:p>
             <a:pPr algn="ctr"/>
+            <a:endParaRPr/>
           </a:p>
         </p:txBody>
       </p:sp>
@@ -6331,6 +6484,7 @@
           <a:lstStyle/>
           <a:p>
             <a:pPr algn="ctr"/>
+            <a:endParaRPr/>
           </a:p>
         </p:txBody>
       </p:sp>
@@ -6390,7 +6544,7 @@
 </file>
 
 <file path=ppt/slides/slide2.xml><?xml version="1.0" encoding="utf-8"?>
-<p:sld xmlns:a="http://schemas.openxmlformats.org/drawingml/2006/main" xmlns:p="http://schemas.openxmlformats.org/presentationml/2006/main" xmlns:r="http://schemas.openxmlformats.org/officeDocument/2006/relationships">
+<p:sld xmlns:a="http://schemas.openxmlformats.org/drawingml/2006/main" xmlns:r="http://schemas.openxmlformats.org/officeDocument/2006/relationships" xmlns:p="http://schemas.openxmlformats.org/presentationml/2006/main">
   <p:cSld>
     <p:spTree>
       <p:nvGrpSpPr>
@@ -6398,7 +6552,14 @@
         <p:cNvGrpSpPr/>
         <p:nvPr/>
       </p:nvGrpSpPr>
-      <p:grpSpPr/>
+      <p:grpSpPr>
+        <a:xfrm>
+          <a:off x="0" y="0"/>
+          <a:ext cx="0" cy="0"/>
+          <a:chOff x="0" y="0"/>
+          <a:chExt cx="0" cy="0"/>
+        </a:xfrm>
+      </p:grpSpPr>
       <p:sp>
         <p:nvSpPr>
           <p:cNvPr id="2" name="Rectangle 1"/>
@@ -6439,6 +6600,7 @@
           <a:lstStyle/>
           <a:p>
             <a:pPr algn="ctr"/>
+            <a:endParaRPr/>
           </a:p>
         </p:txBody>
       </p:sp>
@@ -6482,6 +6644,7 @@
           <a:lstStyle/>
           <a:p>
             <a:pPr algn="ctr"/>
+            <a:endParaRPr/>
           </a:p>
         </p:txBody>
       </p:sp>
@@ -6506,7 +6669,9 @@
             <a:spAutoFit/>
           </a:bodyPr>
           <a:lstStyle/>
-          <a:p/>
+          <a:p>
+            <a:endParaRPr/>
+          </a:p>
           <a:p>
             <a:pPr>
               <a:defRPr sz="2800" b="1">
@@ -6561,6 +6726,7 @@
           <a:lstStyle/>
           <a:p>
             <a:pPr algn="ctr"/>
+            <a:endParaRPr/>
           </a:p>
         </p:txBody>
       </p:sp>
@@ -6585,7 +6751,9 @@
             <a:spAutoFit/>
           </a:bodyPr>
           <a:lstStyle/>
-          <a:p/>
+          <a:p>
+            <a:endParaRPr/>
+          </a:p>
           <a:p>
             <a:pPr>
               <a:defRPr sz="1600" b="1">
@@ -6621,7 +6789,9 @@
             <a:spAutoFit/>
           </a:bodyPr>
           <a:lstStyle/>
-          <a:p/>
+          <a:p>
+            <a:endParaRPr/>
+          </a:p>
           <a:p>
             <a:pPr>
               <a:defRPr sz="1600">
@@ -6676,6 +6846,7 @@
           <a:lstStyle/>
           <a:p>
             <a:pPr algn="ctr"/>
+            <a:endParaRPr/>
           </a:p>
         </p:txBody>
       </p:sp>
@@ -6700,7 +6871,9 @@
             <a:spAutoFit/>
           </a:bodyPr>
           <a:lstStyle/>
-          <a:p/>
+          <a:p>
+            <a:endParaRPr/>
+          </a:p>
           <a:p>
             <a:pPr>
               <a:defRPr sz="1600" b="1">
@@ -6736,7 +6909,9 @@
             <a:spAutoFit/>
           </a:bodyPr>
           <a:lstStyle/>
-          <a:p/>
+          <a:p>
+            <a:endParaRPr/>
+          </a:p>
           <a:p>
             <a:pPr>
               <a:defRPr sz="1600">
@@ -6791,6 +6966,7 @@
           <a:lstStyle/>
           <a:p>
             <a:pPr algn="ctr"/>
+            <a:endParaRPr/>
           </a:p>
         </p:txBody>
       </p:sp>
@@ -6815,7 +6991,9 @@
             <a:spAutoFit/>
           </a:bodyPr>
           <a:lstStyle/>
-          <a:p/>
+          <a:p>
+            <a:endParaRPr/>
+          </a:p>
           <a:p>
             <a:pPr>
               <a:defRPr sz="1600" b="1">
@@ -6851,7 +7029,9 @@
             <a:spAutoFit/>
           </a:bodyPr>
           <a:lstStyle/>
-          <a:p/>
+          <a:p>
+            <a:endParaRPr/>
+          </a:p>
           <a:p>
             <a:pPr>
               <a:defRPr sz="1600">
@@ -6906,6 +7086,7 @@
           <a:lstStyle/>
           <a:p>
             <a:pPr algn="ctr"/>
+            <a:endParaRPr/>
           </a:p>
         </p:txBody>
       </p:sp>
@@ -6930,7 +7111,9 @@
             <a:spAutoFit/>
           </a:bodyPr>
           <a:lstStyle/>
-          <a:p/>
+          <a:p>
+            <a:endParaRPr/>
+          </a:p>
           <a:p>
             <a:pPr>
               <a:defRPr sz="1600" b="1">
@@ -6966,7 +7149,9 @@
             <a:spAutoFit/>
           </a:bodyPr>
           <a:lstStyle/>
-          <a:p/>
+          <a:p>
+            <a:endParaRPr/>
+          </a:p>
           <a:p>
             <a:pPr>
               <a:defRPr sz="1600">
@@ -7021,6 +7206,7 @@
           <a:lstStyle/>
           <a:p>
             <a:pPr algn="ctr"/>
+            <a:endParaRPr/>
           </a:p>
         </p:txBody>
       </p:sp>
@@ -7045,7 +7231,9 @@
             <a:spAutoFit/>
           </a:bodyPr>
           <a:lstStyle/>
-          <a:p/>
+          <a:p>
+            <a:endParaRPr/>
+          </a:p>
           <a:p>
             <a:pPr>
               <a:defRPr sz="1600" b="1">
@@ -7081,7 +7269,9 @@
             <a:spAutoFit/>
           </a:bodyPr>
           <a:lstStyle/>
-          <a:p/>
+          <a:p>
+            <a:endParaRPr/>
+          </a:p>
           <a:p>
             <a:pPr>
               <a:defRPr sz="1600">
@@ -7136,6 +7326,7 @@
           <a:lstStyle/>
           <a:p>
             <a:pPr algn="ctr"/>
+            <a:endParaRPr/>
           </a:p>
         </p:txBody>
       </p:sp>
@@ -7160,7 +7351,9 @@
             <a:spAutoFit/>
           </a:bodyPr>
           <a:lstStyle/>
-          <a:p/>
+          <a:p>
+            <a:endParaRPr/>
+          </a:p>
           <a:p>
             <a:pPr>
               <a:defRPr sz="1600" b="1">
@@ -7196,7 +7389,9 @@
             <a:spAutoFit/>
           </a:bodyPr>
           <a:lstStyle/>
-          <a:p/>
+          <a:p>
+            <a:endParaRPr/>
+          </a:p>
           <a:p>
             <a:pPr>
               <a:defRPr sz="1600">
@@ -7251,6 +7446,7 @@
           <a:lstStyle/>
           <a:p>
             <a:pPr algn="ctr"/>
+            <a:endParaRPr/>
           </a:p>
         </p:txBody>
       </p:sp>
@@ -7275,7 +7471,9 @@
             <a:spAutoFit/>
           </a:bodyPr>
           <a:lstStyle/>
-          <a:p/>
+          <a:p>
+            <a:endParaRPr/>
+          </a:p>
           <a:p>
             <a:pPr>
               <a:defRPr sz="1600" b="1">
@@ -7311,7 +7509,9 @@
             <a:spAutoFit/>
           </a:bodyPr>
           <a:lstStyle/>
-          <a:p/>
+          <a:p>
+            <a:endParaRPr/>
+          </a:p>
           <a:p>
             <a:pPr>
               <a:defRPr sz="1600">
@@ -7366,6 +7566,7 @@
           <a:lstStyle/>
           <a:p>
             <a:pPr algn="ctr"/>
+            <a:endParaRPr/>
           </a:p>
         </p:txBody>
       </p:sp>
@@ -7390,7 +7591,9 @@
             <a:spAutoFit/>
           </a:bodyPr>
           <a:lstStyle/>
-          <a:p/>
+          <a:p>
+            <a:endParaRPr/>
+          </a:p>
           <a:p>
             <a:pPr>
               <a:defRPr sz="1600" b="1">
@@ -7426,7 +7629,9 @@
             <a:spAutoFit/>
           </a:bodyPr>
           <a:lstStyle/>
-          <a:p/>
+          <a:p>
+            <a:endParaRPr/>
+          </a:p>
           <a:p>
             <a:pPr>
               <a:defRPr sz="1600">
@@ -7450,7 +7655,7 @@
 </file>
 
 <file path=ppt/slides/slide3.xml><?xml version="1.0" encoding="utf-8"?>
-<p:sld xmlns:a="http://schemas.openxmlformats.org/drawingml/2006/main" xmlns:p="http://schemas.openxmlformats.org/presentationml/2006/main" xmlns:r="http://schemas.openxmlformats.org/officeDocument/2006/relationships">
+<p:sld xmlns:a="http://schemas.openxmlformats.org/drawingml/2006/main" xmlns:r="http://schemas.openxmlformats.org/officeDocument/2006/relationships" xmlns:p="http://schemas.openxmlformats.org/presentationml/2006/main">
   <p:cSld>
     <p:spTree>
       <p:nvGrpSpPr>
@@ -7458,7 +7663,14 @@
         <p:cNvGrpSpPr/>
         <p:nvPr/>
       </p:nvGrpSpPr>
-      <p:grpSpPr/>
+      <p:grpSpPr>
+        <a:xfrm>
+          <a:off x="0" y="0"/>
+          <a:ext cx="0" cy="0"/>
+          <a:chOff x="0" y="0"/>
+          <a:chExt cx="0" cy="0"/>
+        </a:xfrm>
+      </p:grpSpPr>
       <p:sp>
         <p:nvSpPr>
           <p:cNvPr id="2" name="Rectangle 1"/>
@@ -7499,6 +7711,7 @@
           <a:lstStyle/>
           <a:p>
             <a:pPr algn="ctr"/>
+            <a:endParaRPr/>
           </a:p>
         </p:txBody>
       </p:sp>
@@ -7542,6 +7755,7 @@
           <a:lstStyle/>
           <a:p>
             <a:pPr algn="ctr"/>
+            <a:endParaRPr/>
           </a:p>
         </p:txBody>
       </p:sp>
@@ -7566,7 +7780,9 @@
             <a:spAutoFit/>
           </a:bodyPr>
           <a:lstStyle/>
-          <a:p/>
+          <a:p>
+            <a:endParaRPr/>
+          </a:p>
           <a:p>
             <a:pPr>
               <a:defRPr sz="2800" b="1">
@@ -7602,7 +7818,9 @@
             <a:spAutoFit/>
           </a:bodyPr>
           <a:lstStyle/>
-          <a:p/>
+          <a:p>
+            <a:endParaRPr/>
+          </a:p>
           <a:p>
             <a:pPr>
               <a:defRPr sz="1500" b="1">
@@ -7657,6 +7875,7 @@
           <a:lstStyle/>
           <a:p>
             <a:pPr algn="ctr"/>
+            <a:endParaRPr/>
           </a:p>
         </p:txBody>
       </p:sp>
@@ -7700,6 +7919,7 @@
           <a:lstStyle/>
           <a:p>
             <a:pPr algn="ctr"/>
+            <a:endParaRPr/>
           </a:p>
         </p:txBody>
       </p:sp>
@@ -7724,7 +7944,9 @@
             <a:spAutoFit/>
           </a:bodyPr>
           <a:lstStyle/>
-          <a:p/>
+          <a:p>
+            <a:endParaRPr/>
+          </a:p>
           <a:p>
             <a:pPr>
               <a:defRPr sz="1600" b="1">
@@ -7760,7 +7982,9 @@
             <a:spAutoFit/>
           </a:bodyPr>
           <a:lstStyle/>
-          <a:p/>
+          <a:p>
+            <a:endParaRPr/>
+          </a:p>
           <a:p>
             <a:pPr>
               <a:defRPr sz="1500" b="1">
@@ -7815,6 +8039,7 @@
           <a:lstStyle/>
           <a:p>
             <a:pPr algn="ctr"/>
+            <a:endParaRPr/>
           </a:p>
         </p:txBody>
       </p:sp>
@@ -7858,6 +8083,7 @@
           <a:lstStyle/>
           <a:p>
             <a:pPr algn="ctr"/>
+            <a:endParaRPr/>
           </a:p>
         </p:txBody>
       </p:sp>
@@ -7882,7 +8108,9 @@
             <a:spAutoFit/>
           </a:bodyPr>
           <a:lstStyle/>
-          <a:p/>
+          <a:p>
+            <a:endParaRPr/>
+          </a:p>
           <a:p>
             <a:pPr>
               <a:defRPr sz="1600" b="1">
@@ -7918,7 +8146,9 @@
             <a:spAutoFit/>
           </a:bodyPr>
           <a:lstStyle/>
-          <a:p/>
+          <a:p>
+            <a:endParaRPr/>
+          </a:p>
           <a:p>
             <a:pPr>
               <a:defRPr sz="1500" b="1">
@@ -7973,6 +8203,7 @@
           <a:lstStyle/>
           <a:p>
             <a:pPr algn="ctr"/>
+            <a:endParaRPr/>
           </a:p>
         </p:txBody>
       </p:sp>
@@ -8016,6 +8247,7 @@
           <a:lstStyle/>
           <a:p>
             <a:pPr algn="ctr"/>
+            <a:endParaRPr/>
           </a:p>
         </p:txBody>
       </p:sp>
@@ -8040,7 +8272,9 @@
             <a:spAutoFit/>
           </a:bodyPr>
           <a:lstStyle/>
-          <a:p/>
+          <a:p>
+            <a:endParaRPr/>
+          </a:p>
           <a:p>
             <a:pPr>
               <a:defRPr sz="1600" b="1">
@@ -8076,7 +8310,9 @@
             <a:spAutoFit/>
           </a:bodyPr>
           <a:lstStyle/>
-          <a:p/>
+          <a:p>
+            <a:endParaRPr/>
+          </a:p>
           <a:p>
             <a:pPr>
               <a:defRPr sz="1500" b="1">
@@ -8131,6 +8367,7 @@
           <a:lstStyle/>
           <a:p>
             <a:pPr algn="ctr"/>
+            <a:endParaRPr/>
           </a:p>
         </p:txBody>
       </p:sp>
@@ -8174,6 +8411,7 @@
           <a:lstStyle/>
           <a:p>
             <a:pPr algn="ctr"/>
+            <a:endParaRPr/>
           </a:p>
         </p:txBody>
       </p:sp>
@@ -8198,7 +8436,9 @@
             <a:spAutoFit/>
           </a:bodyPr>
           <a:lstStyle/>
-          <a:p/>
+          <a:p>
+            <a:endParaRPr/>
+          </a:p>
           <a:p>
             <a:pPr>
               <a:defRPr sz="1600" b="1">
@@ -8234,7 +8474,9 @@
             <a:spAutoFit/>
           </a:bodyPr>
           <a:lstStyle/>
-          <a:p/>
+          <a:p>
+            <a:endParaRPr/>
+          </a:p>
           <a:p>
             <a:pPr>
               <a:defRPr sz="1500" b="1">
@@ -8289,6 +8531,7 @@
           <a:lstStyle/>
           <a:p>
             <a:pPr algn="ctr"/>
+            <a:endParaRPr/>
           </a:p>
         </p:txBody>
       </p:sp>
@@ -8332,6 +8575,7 @@
           <a:lstStyle/>
           <a:p>
             <a:pPr algn="ctr"/>
+            <a:endParaRPr/>
           </a:p>
         </p:txBody>
       </p:sp>
@@ -8356,7 +8600,9 @@
             <a:spAutoFit/>
           </a:bodyPr>
           <a:lstStyle/>
-          <a:p/>
+          <a:p>
+            <a:endParaRPr/>
+          </a:p>
           <a:p>
             <a:pPr>
               <a:defRPr sz="1600" b="1">
@@ -8380,7 +8626,7 @@
 </file>
 
 <file path=ppt/slides/slide4.xml><?xml version="1.0" encoding="utf-8"?>
-<p:sld xmlns:a="http://schemas.openxmlformats.org/drawingml/2006/main" xmlns:p="http://schemas.openxmlformats.org/presentationml/2006/main" xmlns:r="http://schemas.openxmlformats.org/officeDocument/2006/relationships">
+<p:sld xmlns:a="http://schemas.openxmlformats.org/drawingml/2006/main" xmlns:r="http://schemas.openxmlformats.org/officeDocument/2006/relationships" xmlns:p="http://schemas.openxmlformats.org/presentationml/2006/main">
   <p:cSld>
     <p:spTree>
       <p:nvGrpSpPr>
@@ -8388,7 +8634,14 @@
         <p:cNvGrpSpPr/>
         <p:nvPr/>
       </p:nvGrpSpPr>
-      <p:grpSpPr/>
+      <p:grpSpPr>
+        <a:xfrm>
+          <a:off x="0" y="0"/>
+          <a:ext cx="0" cy="0"/>
+          <a:chOff x="0" y="0"/>
+          <a:chExt cx="0" cy="0"/>
+        </a:xfrm>
+      </p:grpSpPr>
       <p:sp>
         <p:nvSpPr>
           <p:cNvPr id="2" name="Rectangle 1"/>
@@ -8429,6 +8682,7 @@
           <a:lstStyle/>
           <a:p>
             <a:pPr algn="ctr"/>
+            <a:endParaRPr/>
           </a:p>
         </p:txBody>
       </p:sp>
@@ -8472,6 +8726,7 @@
           <a:lstStyle/>
           <a:p>
             <a:pPr algn="ctr"/>
+            <a:endParaRPr/>
           </a:p>
         </p:txBody>
       </p:sp>
@@ -8496,7 +8751,9 @@
             <a:spAutoFit/>
           </a:bodyPr>
           <a:lstStyle/>
-          <a:p/>
+          <a:p>
+            <a:endParaRPr/>
+          </a:p>
           <a:p>
             <a:pPr>
               <a:defRPr sz="2800" b="1">
@@ -8551,6 +8808,7 @@
           <a:lstStyle/>
           <a:p>
             <a:pPr algn="ctr"/>
+            <a:endParaRPr/>
           </a:p>
         </p:txBody>
       </p:sp>
@@ -8575,7 +8833,9 @@
             <a:spAutoFit/>
           </a:bodyPr>
           <a:lstStyle/>
-          <a:p/>
+          <a:p>
+            <a:endParaRPr/>
+          </a:p>
           <a:p>
             <a:pPr>
               <a:defRPr sz="1600" b="1">
@@ -8705,6 +8965,7 @@
           <a:lstStyle/>
           <a:p>
             <a:pPr algn="ctr"/>
+            <a:endParaRPr/>
           </a:p>
         </p:txBody>
       </p:sp>
@@ -8729,7 +8990,9 @@
             <a:spAutoFit/>
           </a:bodyPr>
           <a:lstStyle/>
-          <a:p/>
+          <a:p>
+            <a:endParaRPr/>
+          </a:p>
           <a:p>
             <a:pPr>
               <a:defRPr sz="1600" b="1">
@@ -8874,6 +9137,7 @@
           <a:lstStyle/>
           <a:p>
             <a:pPr algn="ctr"/>
+            <a:endParaRPr/>
           </a:p>
         </p:txBody>
       </p:sp>
@@ -8898,7 +9162,9 @@
             <a:spAutoFit/>
           </a:bodyPr>
           <a:lstStyle/>
-          <a:p/>
+          <a:p>
+            <a:endParaRPr/>
+          </a:p>
           <a:p>
             <a:pPr algn="l">
               <a:defRPr sz="1400" b="0" i="0">
@@ -8922,7 +9188,7 @@
 </file>
 
 <file path=ppt/slides/slide5.xml><?xml version="1.0" encoding="utf-8"?>
-<p:sld xmlns:a="http://schemas.openxmlformats.org/drawingml/2006/main" xmlns:p="http://schemas.openxmlformats.org/presentationml/2006/main" xmlns:r="http://schemas.openxmlformats.org/officeDocument/2006/relationships">
+<p:sld xmlns:a="http://schemas.openxmlformats.org/drawingml/2006/main" xmlns:r="http://schemas.openxmlformats.org/officeDocument/2006/relationships" xmlns:p="http://schemas.openxmlformats.org/presentationml/2006/main">
   <p:cSld>
     <p:spTree>
       <p:nvGrpSpPr>
@@ -8930,7 +9196,14 @@
         <p:cNvGrpSpPr/>
         <p:nvPr/>
       </p:nvGrpSpPr>
-      <p:grpSpPr/>
+      <p:grpSpPr>
+        <a:xfrm>
+          <a:off x="0" y="0"/>
+          <a:ext cx="0" cy="0"/>
+          <a:chOff x="0" y="0"/>
+          <a:chExt cx="0" cy="0"/>
+        </a:xfrm>
+      </p:grpSpPr>
       <p:sp>
         <p:nvSpPr>
           <p:cNvPr id="2" name="Rectangle 1"/>
@@ -8971,6 +9244,7 @@
           <a:lstStyle/>
           <a:p>
             <a:pPr algn="ctr"/>
+            <a:endParaRPr/>
           </a:p>
         </p:txBody>
       </p:sp>
@@ -9014,6 +9288,7 @@
           <a:lstStyle/>
           <a:p>
             <a:pPr algn="ctr"/>
+            <a:endParaRPr/>
           </a:p>
         </p:txBody>
       </p:sp>
@@ -9038,7 +9313,9 @@
             <a:spAutoFit/>
           </a:bodyPr>
           <a:lstStyle/>
-          <a:p/>
+          <a:p>
+            <a:endParaRPr/>
+          </a:p>
           <a:p>
             <a:pPr>
               <a:defRPr sz="2800" b="1">
@@ -9093,6 +9370,7 @@
           <a:lstStyle/>
           <a:p>
             <a:pPr algn="ctr"/>
+            <a:endParaRPr/>
           </a:p>
         </p:txBody>
       </p:sp>
@@ -9117,7 +9395,9 @@
             <a:spAutoFit/>
           </a:bodyPr>
           <a:lstStyle/>
-          <a:p/>
+          <a:p>
+            <a:endParaRPr/>
+          </a:p>
           <a:p>
             <a:pPr>
               <a:defRPr sz="1600" b="1">
@@ -9277,6 +9557,7 @@
           <a:lstStyle/>
           <a:p>
             <a:pPr algn="ctr"/>
+            <a:endParaRPr/>
           </a:p>
         </p:txBody>
       </p:sp>
@@ -9301,7 +9582,9 @@
             <a:spAutoFit/>
           </a:bodyPr>
           <a:lstStyle/>
-          <a:p/>
+          <a:p>
+            <a:endParaRPr/>
+          </a:p>
           <a:p>
             <a:pPr>
               <a:defRPr sz="1600" b="1">
@@ -9446,6 +9729,7 @@
           <a:lstStyle/>
           <a:p>
             <a:pPr algn="ctr"/>
+            <a:endParaRPr/>
           </a:p>
         </p:txBody>
       </p:sp>
@@ -9470,7 +9754,9 @@
             <a:spAutoFit/>
           </a:bodyPr>
           <a:lstStyle/>
-          <a:p/>
+          <a:p>
+            <a:endParaRPr/>
+          </a:p>
           <a:p>
             <a:pPr algn="l">
               <a:defRPr sz="1400" b="0" i="0">
@@ -9494,7 +9780,7 @@
 </file>
 
 <file path=ppt/slides/slide6.xml><?xml version="1.0" encoding="utf-8"?>
-<p:sld xmlns:a="http://schemas.openxmlformats.org/drawingml/2006/main" xmlns:p="http://schemas.openxmlformats.org/presentationml/2006/main" xmlns:r="http://schemas.openxmlformats.org/officeDocument/2006/relationships">
+<p:sld xmlns:a="http://schemas.openxmlformats.org/drawingml/2006/main" xmlns:r="http://schemas.openxmlformats.org/officeDocument/2006/relationships" xmlns:p="http://schemas.openxmlformats.org/presentationml/2006/main">
   <p:cSld>
     <p:spTree>
       <p:nvGrpSpPr>
@@ -9502,7 +9788,14 @@
         <p:cNvGrpSpPr/>
         <p:nvPr/>
       </p:nvGrpSpPr>
-      <p:grpSpPr/>
+      <p:grpSpPr>
+        <a:xfrm>
+          <a:off x="0" y="0"/>
+          <a:ext cx="0" cy="0"/>
+          <a:chOff x="0" y="0"/>
+          <a:chExt cx="0" cy="0"/>
+        </a:xfrm>
+      </p:grpSpPr>
       <p:sp>
         <p:nvSpPr>
           <p:cNvPr id="2" name="Rectangle 1"/>
@@ -9543,6 +9836,7 @@
           <a:lstStyle/>
           <a:p>
             <a:pPr algn="ctr"/>
+            <a:endParaRPr/>
           </a:p>
         </p:txBody>
       </p:sp>
@@ -9586,6 +9880,7 @@
           <a:lstStyle/>
           <a:p>
             <a:pPr algn="ctr"/>
+            <a:endParaRPr/>
           </a:p>
         </p:txBody>
       </p:sp>
@@ -9610,7 +9905,9 @@
             <a:spAutoFit/>
           </a:bodyPr>
           <a:lstStyle/>
-          <a:p/>
+          <a:p>
+            <a:endParaRPr/>
+          </a:p>
           <a:p>
             <a:pPr>
               <a:defRPr sz="2800" b="1">
@@ -9665,6 +9962,7 @@
           <a:lstStyle/>
           <a:p>
             <a:pPr algn="ctr"/>
+            <a:endParaRPr/>
           </a:p>
         </p:txBody>
       </p:sp>
@@ -9689,7 +9987,9 @@
             <a:spAutoFit/>
           </a:bodyPr>
           <a:lstStyle/>
-          <a:p/>
+          <a:p>
+            <a:endParaRPr/>
+          </a:p>
           <a:p>
             <a:pPr>
               <a:defRPr sz="1600" b="1">
@@ -9849,6 +10149,7 @@
           <a:lstStyle/>
           <a:p>
             <a:pPr algn="ctr"/>
+            <a:endParaRPr/>
           </a:p>
         </p:txBody>
       </p:sp>
@@ -9873,7 +10174,9 @@
             <a:spAutoFit/>
           </a:bodyPr>
           <a:lstStyle/>
-          <a:p/>
+          <a:p>
+            <a:endParaRPr/>
+          </a:p>
           <a:p>
             <a:pPr>
               <a:defRPr sz="1600" b="1">
@@ -10033,6 +10336,7 @@
           <a:lstStyle/>
           <a:p>
             <a:pPr algn="ctr"/>
+            <a:endParaRPr/>
           </a:p>
         </p:txBody>
       </p:sp>
@@ -10057,7 +10361,9 @@
             <a:spAutoFit/>
           </a:bodyPr>
           <a:lstStyle/>
-          <a:p/>
+          <a:p>
+            <a:endParaRPr/>
+          </a:p>
           <a:p>
             <a:pPr algn="l">
               <a:defRPr sz="1400" b="1" i="0">
@@ -10081,7 +10387,7 @@
 </file>
 
 <file path=ppt/slides/slide7.xml><?xml version="1.0" encoding="utf-8"?>
-<p:sld xmlns:a="http://schemas.openxmlformats.org/drawingml/2006/main" xmlns:p="http://schemas.openxmlformats.org/presentationml/2006/main" xmlns:r="http://schemas.openxmlformats.org/officeDocument/2006/relationships">
+<p:sld xmlns:a="http://schemas.openxmlformats.org/drawingml/2006/main" xmlns:r="http://schemas.openxmlformats.org/officeDocument/2006/relationships" xmlns:p="http://schemas.openxmlformats.org/presentationml/2006/main">
   <p:cSld>
     <p:spTree>
       <p:nvGrpSpPr>
@@ -10089,7 +10395,14 @@
         <p:cNvGrpSpPr/>
         <p:nvPr/>
       </p:nvGrpSpPr>
-      <p:grpSpPr/>
+      <p:grpSpPr>
+        <a:xfrm>
+          <a:off x="0" y="0"/>
+          <a:ext cx="0" cy="0"/>
+          <a:chOff x="0" y="0"/>
+          <a:chExt cx="0" cy="0"/>
+        </a:xfrm>
+      </p:grpSpPr>
       <p:sp>
         <p:nvSpPr>
           <p:cNvPr id="2" name="Rectangle 1"/>
@@ -10130,6 +10443,7 @@
           <a:lstStyle/>
           <a:p>
             <a:pPr algn="ctr"/>
+            <a:endParaRPr/>
           </a:p>
         </p:txBody>
       </p:sp>
@@ -10173,6 +10487,7 @@
           <a:lstStyle/>
           <a:p>
             <a:pPr algn="ctr"/>
+            <a:endParaRPr/>
           </a:p>
         </p:txBody>
       </p:sp>
@@ -10197,7 +10512,9 @@
             <a:spAutoFit/>
           </a:bodyPr>
           <a:lstStyle/>
-          <a:p/>
+          <a:p>
+            <a:endParaRPr/>
+          </a:p>
           <a:p>
             <a:pPr>
               <a:defRPr sz="2800" b="1">
@@ -10252,6 +10569,7 @@
           <a:lstStyle/>
           <a:p>
             <a:pPr algn="ctr"/>
+            <a:endParaRPr/>
           </a:p>
         </p:txBody>
       </p:sp>
@@ -10276,7 +10594,9 @@
             <a:spAutoFit/>
           </a:bodyPr>
           <a:lstStyle/>
-          <a:p/>
+          <a:p>
+            <a:endParaRPr/>
+          </a:p>
           <a:p>
             <a:pPr>
               <a:defRPr sz="1600" b="1">
@@ -10436,6 +10756,7 @@
           <a:lstStyle/>
           <a:p>
             <a:pPr algn="ctr"/>
+            <a:endParaRPr/>
           </a:p>
         </p:txBody>
       </p:sp>
@@ -10460,7 +10781,9 @@
             <a:spAutoFit/>
           </a:bodyPr>
           <a:lstStyle/>
-          <a:p/>
+          <a:p>
+            <a:endParaRPr/>
+          </a:p>
           <a:p>
             <a:pPr>
               <a:defRPr sz="1600" b="1">
@@ -10590,6 +10913,7 @@
           <a:lstStyle/>
           <a:p>
             <a:pPr algn="ctr"/>
+            <a:endParaRPr/>
           </a:p>
         </p:txBody>
       </p:sp>
@@ -10614,7 +10938,9 @@
             <a:spAutoFit/>
           </a:bodyPr>
           <a:lstStyle/>
-          <a:p/>
+          <a:p>
+            <a:endParaRPr/>
+          </a:p>
           <a:p>
             <a:pPr>
               <a:defRPr sz="1600" b="1">
@@ -10714,6 +11040,7 @@
           <a:lstStyle/>
           <a:p>
             <a:pPr algn="ctr"/>
+            <a:endParaRPr/>
           </a:p>
         </p:txBody>
       </p:sp>
@@ -10738,7 +11065,9 @@
             <a:spAutoFit/>
           </a:bodyPr>
           <a:lstStyle/>
-          <a:p/>
+          <a:p>
+            <a:endParaRPr/>
+          </a:p>
           <a:p>
             <a:pPr algn="l">
               <a:defRPr sz="1400" b="0" i="0">
@@ -10762,7 +11091,7 @@
 </file>
 
 <file path=ppt/slides/slide8.xml><?xml version="1.0" encoding="utf-8"?>
-<p:sld xmlns:a="http://schemas.openxmlformats.org/drawingml/2006/main" xmlns:p="http://schemas.openxmlformats.org/presentationml/2006/main" xmlns:r="http://schemas.openxmlformats.org/officeDocument/2006/relationships">
+<p:sld xmlns:a="http://schemas.openxmlformats.org/drawingml/2006/main" xmlns:r="http://schemas.openxmlformats.org/officeDocument/2006/relationships" xmlns:p="http://schemas.openxmlformats.org/presentationml/2006/main">
   <p:cSld>
     <p:spTree>
       <p:nvGrpSpPr>
@@ -10770,7 +11099,14 @@
         <p:cNvGrpSpPr/>
         <p:nvPr/>
       </p:nvGrpSpPr>
-      <p:grpSpPr/>
+      <p:grpSpPr>
+        <a:xfrm>
+          <a:off x="0" y="0"/>
+          <a:ext cx="0" cy="0"/>
+          <a:chOff x="0" y="0"/>
+          <a:chExt cx="0" cy="0"/>
+        </a:xfrm>
+      </p:grpSpPr>
       <p:sp>
         <p:nvSpPr>
           <p:cNvPr id="2" name="Rectangle 1"/>
@@ -10811,6 +11147,7 @@
           <a:lstStyle/>
           <a:p>
             <a:pPr algn="ctr"/>
+            <a:endParaRPr/>
           </a:p>
         </p:txBody>
       </p:sp>
@@ -10854,6 +11191,7 @@
           <a:lstStyle/>
           <a:p>
             <a:pPr algn="ctr"/>
+            <a:endParaRPr/>
           </a:p>
         </p:txBody>
       </p:sp>
@@ -10878,7 +11216,9 @@
             <a:spAutoFit/>
           </a:bodyPr>
           <a:lstStyle/>
-          <a:p/>
+          <a:p>
+            <a:endParaRPr/>
+          </a:p>
           <a:p>
             <a:pPr>
               <a:defRPr sz="2800" b="1">
@@ -10933,6 +11273,7 @@
           <a:lstStyle/>
           <a:p>
             <a:pPr algn="ctr"/>
+            <a:endParaRPr/>
           </a:p>
         </p:txBody>
       </p:sp>
@@ -10957,7 +11298,9 @@
             <a:spAutoFit/>
           </a:bodyPr>
           <a:lstStyle/>
-          <a:p/>
+          <a:p>
+            <a:endParaRPr/>
+          </a:p>
           <a:p>
             <a:pPr>
               <a:defRPr sz="1600" b="1">
@@ -11087,6 +11430,7 @@
           <a:lstStyle/>
           <a:p>
             <a:pPr algn="ctr"/>
+            <a:endParaRPr/>
           </a:p>
         </p:txBody>
       </p:sp>
@@ -11111,7 +11455,9 @@
             <a:spAutoFit/>
           </a:bodyPr>
           <a:lstStyle/>
-          <a:p/>
+          <a:p>
+            <a:endParaRPr/>
+          </a:p>
           <a:p>
             <a:pPr>
               <a:defRPr sz="1600" b="1">
@@ -11241,6 +11587,7 @@
           <a:lstStyle/>
           <a:p>
             <a:pPr algn="ctr"/>
+            <a:endParaRPr/>
           </a:p>
         </p:txBody>
       </p:sp>
@@ -11265,7 +11612,9 @@
             <a:spAutoFit/>
           </a:bodyPr>
           <a:lstStyle/>
-          <a:p/>
+          <a:p>
+            <a:endParaRPr/>
+          </a:p>
           <a:p>
             <a:pPr>
               <a:defRPr sz="1600" b="1">
@@ -11395,6 +11744,7 @@
           <a:lstStyle/>
           <a:p>
             <a:pPr algn="ctr"/>
+            <a:endParaRPr/>
           </a:p>
         </p:txBody>
       </p:sp>
@@ -11419,7 +11769,9 @@
             <a:spAutoFit/>
           </a:bodyPr>
           <a:lstStyle/>
-          <a:p/>
+          <a:p>
+            <a:endParaRPr/>
+          </a:p>
           <a:p>
             <a:pPr algn="l">
               <a:defRPr sz="1400" b="0" i="0">
@@ -11443,7 +11795,7 @@
 </file>
 
 <file path=ppt/slides/slide9.xml><?xml version="1.0" encoding="utf-8"?>
-<p:sld xmlns:a="http://schemas.openxmlformats.org/drawingml/2006/main" xmlns:p="http://schemas.openxmlformats.org/presentationml/2006/main" xmlns:r="http://schemas.openxmlformats.org/officeDocument/2006/relationships">
+<p:sld xmlns:a="http://schemas.openxmlformats.org/drawingml/2006/main" xmlns:r="http://schemas.openxmlformats.org/officeDocument/2006/relationships" xmlns:p="http://schemas.openxmlformats.org/presentationml/2006/main">
   <p:cSld>
     <p:spTree>
       <p:nvGrpSpPr>
@@ -11451,7 +11803,14 @@
         <p:cNvGrpSpPr/>
         <p:nvPr/>
       </p:nvGrpSpPr>
-      <p:grpSpPr/>
+      <p:grpSpPr>
+        <a:xfrm>
+          <a:off x="0" y="0"/>
+          <a:ext cx="0" cy="0"/>
+          <a:chOff x="0" y="0"/>
+          <a:chExt cx="0" cy="0"/>
+        </a:xfrm>
+      </p:grpSpPr>
       <p:sp>
         <p:nvSpPr>
           <p:cNvPr id="2" name="Rectangle 1"/>
@@ -11492,6 +11851,7 @@
           <a:lstStyle/>
           <a:p>
             <a:pPr algn="ctr"/>
+            <a:endParaRPr/>
           </a:p>
         </p:txBody>
       </p:sp>
@@ -11535,6 +11895,7 @@
           <a:lstStyle/>
           <a:p>
             <a:pPr algn="ctr"/>
+            <a:endParaRPr/>
           </a:p>
         </p:txBody>
       </p:sp>
@@ -11559,7 +11920,9 @@
             <a:spAutoFit/>
           </a:bodyPr>
           <a:lstStyle/>
-          <a:p/>
+          <a:p>
+            <a:endParaRPr/>
+          </a:p>
           <a:p>
             <a:pPr>
               <a:defRPr sz="2800" b="1">
@@ -11614,6 +11977,7 @@
           <a:lstStyle/>
           <a:p>
             <a:pPr algn="ctr"/>
+            <a:endParaRPr/>
           </a:p>
         </p:txBody>
       </p:sp>
@@ -11638,7 +12002,9 @@
             <a:spAutoFit/>
           </a:bodyPr>
           <a:lstStyle/>
-          <a:p/>
+          <a:p>
+            <a:endParaRPr/>
+          </a:p>
           <a:p>
             <a:pPr>
               <a:defRPr sz="1600" b="1">
@@ -11768,6 +12134,7 @@
           <a:lstStyle/>
           <a:p>
             <a:pPr algn="ctr"/>
+            <a:endParaRPr/>
           </a:p>
         </p:txBody>
       </p:sp>
@@ -11792,7 +12159,9 @@
             <a:spAutoFit/>
           </a:bodyPr>
           <a:lstStyle/>
-          <a:p/>
+          <a:p>
+            <a:endParaRPr/>
+          </a:p>
           <a:p>
             <a:pPr>
               <a:defRPr sz="1600" b="1">
@@ -11907,6 +12276,7 @@
           <a:lstStyle/>
           <a:p>
             <a:pPr algn="ctr"/>
+            <a:endParaRPr/>
           </a:p>
         </p:txBody>
       </p:sp>
@@ -11931,7 +12301,9 @@
             <a:spAutoFit/>
           </a:bodyPr>
           <a:lstStyle/>
-          <a:p/>
+          <a:p>
+            <a:endParaRPr/>
+          </a:p>
           <a:p>
             <a:pPr>
               <a:defRPr sz="1600" b="1">
